--- a/docs/Cardiomyocyte_Analyzer_분석프로토콜_지표설명.pptx
+++ b/docs/Cardiomyocyte_Analyzer_분석프로토콜_지표설명.pptx
@@ -19,9 +19,14 @@
     <p:sldId id="267" r:id="rId13"/>
     <p:sldId id="268" r:id="rId14"/>
     <p:sldId id="269" r:id="rId15"/>
+    <p:sldId id="270" r:id="rId16"/>
+    <p:sldId id="271" r:id="rId17"/>
+    <p:sldId id="272" r:id="rId18"/>
+    <p:sldId id="273" r:id="rId19"/>
+    <p:sldId id="274" r:id="rId20"/>
   </p:sldIdLst>
   <p:notesMasterIdLst>
-    <p:notesMasterId r:id="rId16"/>
+    <p:notesMasterId r:id="rId21"/>
   </p:notesMasterIdLst>
   <p:sldSz cx="9144000" cy="5143500"/>
   <p:notesSz cx="5143500" cy="9144000"/>
@@ -1359,6 +1364,446 @@
             <a:fld id="{F7021451-1387-4CA6-816F-3879F97B5CBC}" type="slidenum">
               <a:rPr lang="en-US"/>
               <a:t>14</a:t>
+            </a:fld>
+            <a:endParaRPr lang="en-US"/>
+          </a:p>
+        </p:txBody>
+      </p:sp>
+    </p:spTree>
+    <p:extLst>
+      <p:ext uri="{BB962C8B-B14F-4D97-AF65-F5344CB8AC3E}">
+        <p14:creationId xmlns:p14="http://schemas.microsoft.com/office/powerpoint/2010/main" val="1024086991"/>
+      </p:ext>
+    </p:extLst>
+  </p:cSld>
+  <p:clrMapOvr>
+    <a:masterClrMapping/>
+  </p:clrMapOvr>
+</p:notes>
+</file>
+
+<file path=ppt/notesSlides/notesSlide15.xml><?xml version="1.0" encoding="utf-8"?>
+<p:notes xmlns:a="http://schemas.openxmlformats.org/drawingml/2006/main" xmlns:r="http://schemas.openxmlformats.org/officeDocument/2006/relationships" xmlns:p="http://schemas.openxmlformats.org/presentationml/2006/main">
+  <p:cSld>
+    <p:spTree>
+      <p:nvGrpSpPr>
+        <p:cNvPr id="1" name=""/>
+        <p:cNvGrpSpPr/>
+        <p:nvPr/>
+      </p:nvGrpSpPr>
+      <p:grpSpPr>
+        <a:xfrm>
+          <a:off x="0" y="0"/>
+          <a:ext cx="0" cy="0"/>
+          <a:chOff x="0" y="0"/>
+          <a:chExt cx="0" cy="0"/>
+        </a:xfrm>
+      </p:grpSpPr>
+      <p:sp>
+        <p:nvSpPr>
+          <p:cNvPr id="2" name="Slide Image Placeholder 1"/>
+          <p:cNvSpPr>
+            <a:spLocks noGrp="1" noRot="1" noChangeAspect="1"/>
+          </p:cNvSpPr>
+          <p:nvPr>
+            <p:ph type="sldImg"/>
+          </p:nvPr>
+        </p:nvSpPr>
+        <p:spPr/>
+      </p:sp>
+      <p:sp>
+        <p:nvSpPr>
+          <p:cNvPr id="3" name="Notes Placeholder 2"/>
+          <p:cNvSpPr>
+            <a:spLocks noGrp="1"/>
+          </p:cNvSpPr>
+          <p:nvPr>
+            <p:ph type="body" idx="1"/>
+          </p:nvPr>
+        </p:nvSpPr>
+        <p:spPr/>
+        <p:txBody>
+          <a:bodyPr/>
+          <a:lstStyle/>
+          <a:p>
+            <a:r>
+              <a:rPr lang="en-US" dirty="0"/>
+              <a:t/>
+            </a:r>
+            <a:endParaRPr lang="en-US" dirty="0"/>
+          </a:p>
+        </p:txBody>
+      </p:sp>
+      <p:sp>
+        <p:nvSpPr>
+          <p:cNvPr id="4" name="Slide Number Placeholder 3"/>
+          <p:cNvSpPr>
+            <a:spLocks noGrp="1"/>
+          </p:cNvSpPr>
+          <p:nvPr>
+            <p:ph type="sldNum" sz="quarter" idx="10"/>
+          </p:nvPr>
+        </p:nvSpPr>
+        <p:spPr/>
+        <p:txBody>
+          <a:bodyPr/>
+          <a:lstStyle/>
+          <a:p>
+            <a:fld id="{F7021451-1387-4CA6-816F-3879F97B5CBC}" type="slidenum">
+              <a:rPr lang="en-US"/>
+              <a:t>15</a:t>
+            </a:fld>
+            <a:endParaRPr lang="en-US"/>
+          </a:p>
+        </p:txBody>
+      </p:sp>
+    </p:spTree>
+    <p:extLst>
+      <p:ext uri="{BB962C8B-B14F-4D97-AF65-F5344CB8AC3E}">
+        <p14:creationId xmlns:p14="http://schemas.microsoft.com/office/powerpoint/2010/main" val="1024086991"/>
+      </p:ext>
+    </p:extLst>
+  </p:cSld>
+  <p:clrMapOvr>
+    <a:masterClrMapping/>
+  </p:clrMapOvr>
+</p:notes>
+</file>
+
+<file path=ppt/notesSlides/notesSlide16.xml><?xml version="1.0" encoding="utf-8"?>
+<p:notes xmlns:a="http://schemas.openxmlformats.org/drawingml/2006/main" xmlns:r="http://schemas.openxmlformats.org/officeDocument/2006/relationships" xmlns:p="http://schemas.openxmlformats.org/presentationml/2006/main">
+  <p:cSld>
+    <p:spTree>
+      <p:nvGrpSpPr>
+        <p:cNvPr id="1" name=""/>
+        <p:cNvGrpSpPr/>
+        <p:nvPr/>
+      </p:nvGrpSpPr>
+      <p:grpSpPr>
+        <a:xfrm>
+          <a:off x="0" y="0"/>
+          <a:ext cx="0" cy="0"/>
+          <a:chOff x="0" y="0"/>
+          <a:chExt cx="0" cy="0"/>
+        </a:xfrm>
+      </p:grpSpPr>
+      <p:sp>
+        <p:nvSpPr>
+          <p:cNvPr id="2" name="Slide Image Placeholder 1"/>
+          <p:cNvSpPr>
+            <a:spLocks noGrp="1" noRot="1" noChangeAspect="1"/>
+          </p:cNvSpPr>
+          <p:nvPr>
+            <p:ph type="sldImg"/>
+          </p:nvPr>
+        </p:nvSpPr>
+        <p:spPr/>
+      </p:sp>
+      <p:sp>
+        <p:nvSpPr>
+          <p:cNvPr id="3" name="Notes Placeholder 2"/>
+          <p:cNvSpPr>
+            <a:spLocks noGrp="1"/>
+          </p:cNvSpPr>
+          <p:nvPr>
+            <p:ph type="body" idx="1"/>
+          </p:nvPr>
+        </p:nvSpPr>
+        <p:spPr/>
+        <p:txBody>
+          <a:bodyPr/>
+          <a:lstStyle/>
+          <a:p>
+            <a:r>
+              <a:rPr lang="en-US" dirty="0"/>
+              <a:t/>
+            </a:r>
+            <a:endParaRPr lang="en-US" dirty="0"/>
+          </a:p>
+        </p:txBody>
+      </p:sp>
+      <p:sp>
+        <p:nvSpPr>
+          <p:cNvPr id="4" name="Slide Number Placeholder 3"/>
+          <p:cNvSpPr>
+            <a:spLocks noGrp="1"/>
+          </p:cNvSpPr>
+          <p:nvPr>
+            <p:ph type="sldNum" sz="quarter" idx="10"/>
+          </p:nvPr>
+        </p:nvSpPr>
+        <p:spPr/>
+        <p:txBody>
+          <a:bodyPr/>
+          <a:lstStyle/>
+          <a:p>
+            <a:fld id="{F7021451-1387-4CA6-816F-3879F97B5CBC}" type="slidenum">
+              <a:rPr lang="en-US"/>
+              <a:t>16</a:t>
+            </a:fld>
+            <a:endParaRPr lang="en-US"/>
+          </a:p>
+        </p:txBody>
+      </p:sp>
+    </p:spTree>
+    <p:extLst>
+      <p:ext uri="{BB962C8B-B14F-4D97-AF65-F5344CB8AC3E}">
+        <p14:creationId xmlns:p14="http://schemas.microsoft.com/office/powerpoint/2010/main" val="1024086991"/>
+      </p:ext>
+    </p:extLst>
+  </p:cSld>
+  <p:clrMapOvr>
+    <a:masterClrMapping/>
+  </p:clrMapOvr>
+</p:notes>
+</file>
+
+<file path=ppt/notesSlides/notesSlide17.xml><?xml version="1.0" encoding="utf-8"?>
+<p:notes xmlns:a="http://schemas.openxmlformats.org/drawingml/2006/main" xmlns:r="http://schemas.openxmlformats.org/officeDocument/2006/relationships" xmlns:p="http://schemas.openxmlformats.org/presentationml/2006/main">
+  <p:cSld>
+    <p:spTree>
+      <p:nvGrpSpPr>
+        <p:cNvPr id="1" name=""/>
+        <p:cNvGrpSpPr/>
+        <p:nvPr/>
+      </p:nvGrpSpPr>
+      <p:grpSpPr>
+        <a:xfrm>
+          <a:off x="0" y="0"/>
+          <a:ext cx="0" cy="0"/>
+          <a:chOff x="0" y="0"/>
+          <a:chExt cx="0" cy="0"/>
+        </a:xfrm>
+      </p:grpSpPr>
+      <p:sp>
+        <p:nvSpPr>
+          <p:cNvPr id="2" name="Slide Image Placeholder 1"/>
+          <p:cNvSpPr>
+            <a:spLocks noGrp="1" noRot="1" noChangeAspect="1"/>
+          </p:cNvSpPr>
+          <p:nvPr>
+            <p:ph type="sldImg"/>
+          </p:nvPr>
+        </p:nvSpPr>
+        <p:spPr/>
+      </p:sp>
+      <p:sp>
+        <p:nvSpPr>
+          <p:cNvPr id="3" name="Notes Placeholder 2"/>
+          <p:cNvSpPr>
+            <a:spLocks noGrp="1"/>
+          </p:cNvSpPr>
+          <p:nvPr>
+            <p:ph type="body" idx="1"/>
+          </p:nvPr>
+        </p:nvSpPr>
+        <p:spPr/>
+        <p:txBody>
+          <a:bodyPr/>
+          <a:lstStyle/>
+          <a:p>
+            <a:r>
+              <a:rPr lang="en-US" dirty="0"/>
+              <a:t/>
+            </a:r>
+            <a:endParaRPr lang="en-US" dirty="0"/>
+          </a:p>
+        </p:txBody>
+      </p:sp>
+      <p:sp>
+        <p:nvSpPr>
+          <p:cNvPr id="4" name="Slide Number Placeholder 3"/>
+          <p:cNvSpPr>
+            <a:spLocks noGrp="1"/>
+          </p:cNvSpPr>
+          <p:nvPr>
+            <p:ph type="sldNum" sz="quarter" idx="10"/>
+          </p:nvPr>
+        </p:nvSpPr>
+        <p:spPr/>
+        <p:txBody>
+          <a:bodyPr/>
+          <a:lstStyle/>
+          <a:p>
+            <a:fld id="{F7021451-1387-4CA6-816F-3879F97B5CBC}" type="slidenum">
+              <a:rPr lang="en-US"/>
+              <a:t>17</a:t>
+            </a:fld>
+            <a:endParaRPr lang="en-US"/>
+          </a:p>
+        </p:txBody>
+      </p:sp>
+    </p:spTree>
+    <p:extLst>
+      <p:ext uri="{BB962C8B-B14F-4D97-AF65-F5344CB8AC3E}">
+        <p14:creationId xmlns:p14="http://schemas.microsoft.com/office/powerpoint/2010/main" val="1024086991"/>
+      </p:ext>
+    </p:extLst>
+  </p:cSld>
+  <p:clrMapOvr>
+    <a:masterClrMapping/>
+  </p:clrMapOvr>
+</p:notes>
+</file>
+
+<file path=ppt/notesSlides/notesSlide18.xml><?xml version="1.0" encoding="utf-8"?>
+<p:notes xmlns:a="http://schemas.openxmlformats.org/drawingml/2006/main" xmlns:r="http://schemas.openxmlformats.org/officeDocument/2006/relationships" xmlns:p="http://schemas.openxmlformats.org/presentationml/2006/main">
+  <p:cSld>
+    <p:spTree>
+      <p:nvGrpSpPr>
+        <p:cNvPr id="1" name=""/>
+        <p:cNvGrpSpPr/>
+        <p:nvPr/>
+      </p:nvGrpSpPr>
+      <p:grpSpPr>
+        <a:xfrm>
+          <a:off x="0" y="0"/>
+          <a:ext cx="0" cy="0"/>
+          <a:chOff x="0" y="0"/>
+          <a:chExt cx="0" cy="0"/>
+        </a:xfrm>
+      </p:grpSpPr>
+      <p:sp>
+        <p:nvSpPr>
+          <p:cNvPr id="2" name="Slide Image Placeholder 1"/>
+          <p:cNvSpPr>
+            <a:spLocks noGrp="1" noRot="1" noChangeAspect="1"/>
+          </p:cNvSpPr>
+          <p:nvPr>
+            <p:ph type="sldImg"/>
+          </p:nvPr>
+        </p:nvSpPr>
+        <p:spPr/>
+      </p:sp>
+      <p:sp>
+        <p:nvSpPr>
+          <p:cNvPr id="3" name="Notes Placeholder 2"/>
+          <p:cNvSpPr>
+            <a:spLocks noGrp="1"/>
+          </p:cNvSpPr>
+          <p:nvPr>
+            <p:ph type="body" idx="1"/>
+          </p:nvPr>
+        </p:nvSpPr>
+        <p:spPr/>
+        <p:txBody>
+          <a:bodyPr/>
+          <a:lstStyle/>
+          <a:p>
+            <a:r>
+              <a:rPr lang="en-US" dirty="0"/>
+              <a:t/>
+            </a:r>
+            <a:endParaRPr lang="en-US" dirty="0"/>
+          </a:p>
+        </p:txBody>
+      </p:sp>
+      <p:sp>
+        <p:nvSpPr>
+          <p:cNvPr id="4" name="Slide Number Placeholder 3"/>
+          <p:cNvSpPr>
+            <a:spLocks noGrp="1"/>
+          </p:cNvSpPr>
+          <p:nvPr>
+            <p:ph type="sldNum" sz="quarter" idx="10"/>
+          </p:nvPr>
+        </p:nvSpPr>
+        <p:spPr/>
+        <p:txBody>
+          <a:bodyPr/>
+          <a:lstStyle/>
+          <a:p>
+            <a:fld id="{F7021451-1387-4CA6-816F-3879F97B5CBC}" type="slidenum">
+              <a:rPr lang="en-US"/>
+              <a:t>18</a:t>
+            </a:fld>
+            <a:endParaRPr lang="en-US"/>
+          </a:p>
+        </p:txBody>
+      </p:sp>
+    </p:spTree>
+    <p:extLst>
+      <p:ext uri="{BB962C8B-B14F-4D97-AF65-F5344CB8AC3E}">
+        <p14:creationId xmlns:p14="http://schemas.microsoft.com/office/powerpoint/2010/main" val="1024086991"/>
+      </p:ext>
+    </p:extLst>
+  </p:cSld>
+  <p:clrMapOvr>
+    <a:masterClrMapping/>
+  </p:clrMapOvr>
+</p:notes>
+</file>
+
+<file path=ppt/notesSlides/notesSlide19.xml><?xml version="1.0" encoding="utf-8"?>
+<p:notes xmlns:a="http://schemas.openxmlformats.org/drawingml/2006/main" xmlns:r="http://schemas.openxmlformats.org/officeDocument/2006/relationships" xmlns:p="http://schemas.openxmlformats.org/presentationml/2006/main">
+  <p:cSld>
+    <p:spTree>
+      <p:nvGrpSpPr>
+        <p:cNvPr id="1" name=""/>
+        <p:cNvGrpSpPr/>
+        <p:nvPr/>
+      </p:nvGrpSpPr>
+      <p:grpSpPr>
+        <a:xfrm>
+          <a:off x="0" y="0"/>
+          <a:ext cx="0" cy="0"/>
+          <a:chOff x="0" y="0"/>
+          <a:chExt cx="0" cy="0"/>
+        </a:xfrm>
+      </p:grpSpPr>
+      <p:sp>
+        <p:nvSpPr>
+          <p:cNvPr id="2" name="Slide Image Placeholder 1"/>
+          <p:cNvSpPr>
+            <a:spLocks noGrp="1" noRot="1" noChangeAspect="1"/>
+          </p:cNvSpPr>
+          <p:nvPr>
+            <p:ph type="sldImg"/>
+          </p:nvPr>
+        </p:nvSpPr>
+        <p:spPr/>
+      </p:sp>
+      <p:sp>
+        <p:nvSpPr>
+          <p:cNvPr id="3" name="Notes Placeholder 2"/>
+          <p:cNvSpPr>
+            <a:spLocks noGrp="1"/>
+          </p:cNvSpPr>
+          <p:nvPr>
+            <p:ph type="body" idx="1"/>
+          </p:nvPr>
+        </p:nvSpPr>
+        <p:spPr/>
+        <p:txBody>
+          <a:bodyPr/>
+          <a:lstStyle/>
+          <a:p>
+            <a:r>
+              <a:rPr lang="en-US" dirty="0"/>
+              <a:t/>
+            </a:r>
+            <a:endParaRPr lang="en-US" dirty="0"/>
+          </a:p>
+        </p:txBody>
+      </p:sp>
+      <p:sp>
+        <p:nvSpPr>
+          <p:cNvPr id="4" name="Slide Number Placeholder 3"/>
+          <p:cNvSpPr>
+            <a:spLocks noGrp="1"/>
+          </p:cNvSpPr>
+          <p:nvPr>
+            <p:ph type="sldNum" sz="quarter" idx="10"/>
+          </p:nvPr>
+        </p:nvSpPr>
+        <p:spPr/>
+        <p:txBody>
+          <a:bodyPr/>
+          <a:lstStyle/>
+          <a:p>
+            <a:fld id="{F7021451-1387-4CA6-816F-3879F97B5CBC}" type="slidenum">
+              <a:rPr lang="en-US"/>
+              <a:t>19</a:t>
             </a:fld>
             <a:endParaRPr lang="en-US"/>
           </a:p>
@@ -3753,7 +4198,7 @@
                 <a:ea typeface="Arial" pitchFamily="34" charset="-122"/>
                 <a:cs typeface="Arial" pitchFamily="34" charset="-120"/>
               </a:rPr>
-              <a:t>결과 파일과 해석 체크리스트</a:t>
+              <a:t>결과 해석 예시 — 실제 데이터</a:t>
             </a:r>
             <a:endParaRPr lang="en-US" sz="2600" dirty="0"/>
           </a:p>
@@ -3761,41 +4206,14 @@
       </p:sp>
       <p:sp>
         <p:nvSpPr>
-          <p:cNvPr id="3" name="Shape 1"/>
-          <p:cNvSpPr/>
+          <p:cNvPr id="3" name="Text 1"/>
+          <p:cNvSpPr txBox="1"/>
           <p:nvPr/>
         </p:nvSpPr>
         <p:spPr>
           <a:xfrm>
-            <a:off x="457200" y="1188720"/>
-            <a:ext cx="2651760" cy="1463040"/>
-          </a:xfrm>
-          <a:prstGeom prst="roundRect">
-            <a:avLst>
-              <a:gd name="adj" fmla="val 5000"/>
-            </a:avLst>
-          </a:prstGeom>
-          <a:solidFill>
-            <a:srgbClr val="F3F4F6"/>
-          </a:solidFill>
-          <a:ln w="12700">
-            <a:solidFill>
-              <a:srgbClr val="F3F4F6"/>
-            </a:solidFill>
-            <a:prstDash val="solid"/>
-          </a:ln>
-        </p:spPr>
-      </p:sp>
-      <p:sp>
-        <p:nvSpPr>
-          <p:cNvPr id="4" name="Text 2"/>
-          <p:cNvSpPr txBox="1"/>
-          <p:nvPr/>
-        </p:nvSpPr>
-        <p:spPr>
-          <a:xfrm>
-            <a:off x="621792" y="1298448"/>
-            <a:ext cx="2322576" cy="292608"/>
+            <a:off x="457200" y="804672"/>
+            <a:ext cx="8229600" cy="320040"/>
           </a:xfrm>
           <a:prstGeom prst="rect">
             <a:avLst/>
@@ -3811,6 +4229,69 @@
               <a:buNone/>
             </a:pPr>
             <a:r>
+              <a:rPr lang="en-US" sz="1200" dirty="0">
+                <a:solidFill>
+                  <a:srgbClr val="6B7280"/>
+                </a:solidFill>
+                <a:latin typeface="Arial" pitchFamily="34" charset="0"/>
+                <a:ea typeface="Arial" pitchFamily="34" charset="-122"/>
+                <a:cs typeface="Arial" pitchFamily="34" charset="-120"/>
+              </a:rPr>
+              <a:t>C6 · AR05 세포주 × Vehicle · UT H, optical_flow 모드, 그룹당 영상 1개 (n=1: 경향만, 통계 불가)</a:t>
+            </a:r>
+            <a:endParaRPr lang="en-US" sz="1200" dirty="0"/>
+          </a:p>
+        </p:txBody>
+      </p:sp>
+      <p:pic>
+        <p:nvPicPr>
+          <p:cNvPr id="4" name="Image 0" descr="/tmp/claude-0/-home-user-n8n/7b9d6c12-691f-5b28-9147-ab4657efa51a/scratchpad/deck/real_result.png">    </p:cNvPr>
+          <p:cNvPicPr>
+            <a:picLocks noChangeAspect="1"/>
+          </p:cNvPicPr>
+          <p:nvPr/>
+        </p:nvPicPr>
+        <p:blipFill>
+          <a:blip r:embed="rId1"/>
+          <a:stretch>
+            <a:fillRect/>
+          </a:stretch>
+        </p:blipFill>
+        <p:spPr>
+          <a:xfrm>
+            <a:off x="457200" y="1188720"/>
+            <a:ext cx="2331720" cy="3429000"/>
+          </a:xfrm>
+          <a:prstGeom prst="rect">
+            <a:avLst/>
+          </a:prstGeom>
+        </p:spPr>
+      </p:pic>
+      <p:sp>
+        <p:nvSpPr>
+          <p:cNvPr id="5" name="Text 2"/>
+          <p:cNvSpPr txBox="1"/>
+          <p:nvPr/>
+        </p:nvSpPr>
+        <p:spPr>
+          <a:xfrm>
+            <a:off x="3017520" y="1188720"/>
+            <a:ext cx="5669280" cy="274320"/>
+          </a:xfrm>
+          <a:prstGeom prst="rect">
+            <a:avLst/>
+          </a:prstGeom>
+          <a:noFill/>
+          <a:ln/>
+        </p:spPr>
+        <p:txBody>
+          <a:bodyPr wrap="square" lIns="0" tIns="0" rIns="0" bIns="0" rtlCol="0" anchor="ctr"/>
+          <a:lstStyle/>
+          <a:p>
+            <a:pPr indent="0" marL="0">
+              <a:buNone/>
+            </a:pPr>
+            <a:r>
               <a:rPr lang="en-US" sz="1300" b="1" dirty="0">
                 <a:solidFill>
                   <a:srgbClr val="7A1F2B"/>
@@ -3819,7 +4300,7 @@
                 <a:ea typeface="Arial" pitchFamily="34" charset="-122"/>
                 <a:cs typeface="Arial" pitchFamily="34" charset="-120"/>
               </a:rPr>
-              <a:t>plot.png / plot.svg</a:t>
+              <a:t>그림 읽는 법</a:t>
             </a:r>
             <a:endParaRPr lang="en-US" sz="1300" dirty="0"/>
           </a:p>
@@ -3827,14 +4308,14 @@
       </p:sp>
       <p:sp>
         <p:nvSpPr>
-          <p:cNvPr id="5" name="Text 3"/>
+          <p:cNvPr id="6" name="Text 3"/>
           <p:cNvSpPr txBox="1"/>
           <p:nvPr/>
         </p:nvSpPr>
         <p:spPr>
           <a:xfrm>
-            <a:off x="621792" y="1609344"/>
-            <a:ext cx="2322576" cy="950976"/>
+            <a:off x="3017520" y="1508760"/>
+            <a:ext cx="5669280" cy="3108960"/>
           </a:xfrm>
           <a:prstGeom prst="rect">
             <a:avLst/>
@@ -3846,303 +4327,6 @@
           <a:bodyPr wrap="square" lIns="0" tIns="0" rIns="0" bIns="0" rtlCol="0" anchor="t"/>
           <a:lstStyle/>
           <a:p>
-            <a:pPr indent="0" marL="0">
-              <a:spcAft>
-                <a:spcPts val="300"/>
-              </a:spcAft>
-              <a:buNone/>
-            </a:pPr>
-            <a:r>
-              <a:rPr lang="en-US" sz="1000" dirty="0">
-                <a:solidFill>
-                  <a:srgbClr val="1F2933"/>
-                </a:solidFill>
-                <a:latin typeface="Arial" pitchFamily="34" charset="0"/>
-                <a:ea typeface="Arial" pitchFamily="34" charset="-122"/>
-                <a:cs typeface="Arial" pitchFamily="34" charset="-120"/>
-              </a:rPr>
-              <a:t>신호 트레이스 + 검출된 봉우리(·), 기준선(▼). PIV/광류는 벡터장 패널 추가. 그룹 비교는 논문형 다중 패널.</a:t>
-            </a:r>
-            <a:endParaRPr lang="en-US" sz="1000" dirty="0"/>
-          </a:p>
-        </p:txBody>
-      </p:sp>
-      <p:sp>
-        <p:nvSpPr>
-          <p:cNvPr id="6" name="Shape 4"/>
-          <p:cNvSpPr/>
-          <p:nvPr/>
-        </p:nvSpPr>
-        <p:spPr>
-          <a:xfrm>
-            <a:off x="3246120" y="1188720"/>
-            <a:ext cx="2651760" cy="1463040"/>
-          </a:xfrm>
-          <a:prstGeom prst="roundRect">
-            <a:avLst>
-              <a:gd name="adj" fmla="val 5000"/>
-            </a:avLst>
-          </a:prstGeom>
-          <a:solidFill>
-            <a:srgbClr val="F3F4F6"/>
-          </a:solidFill>
-          <a:ln w="12700">
-            <a:solidFill>
-              <a:srgbClr val="F3F4F6"/>
-            </a:solidFill>
-            <a:prstDash val="solid"/>
-          </a:ln>
-        </p:spPr>
-      </p:sp>
-      <p:sp>
-        <p:nvSpPr>
-          <p:cNvPr id="7" name="Text 5"/>
-          <p:cNvSpPr txBox="1"/>
-          <p:nvPr/>
-        </p:nvSpPr>
-        <p:spPr>
-          <a:xfrm>
-            <a:off x="3410712" y="1298448"/>
-            <a:ext cx="2322576" cy="292608"/>
-          </a:xfrm>
-          <a:prstGeom prst="rect">
-            <a:avLst/>
-          </a:prstGeom>
-          <a:noFill/>
-          <a:ln/>
-        </p:spPr>
-        <p:txBody>
-          <a:bodyPr wrap="square" lIns="0" tIns="0" rIns="0" bIns="0" rtlCol="0" anchor="ctr"/>
-          <a:lstStyle/>
-          <a:p>
-            <a:pPr indent="0" marL="0">
-              <a:buNone/>
-            </a:pPr>
-            <a:r>
-              <a:rPr lang="en-US" sz="1300" b="1" dirty="0">
-                <a:solidFill>
-                  <a:srgbClr val="7A1F2B"/>
-                </a:solidFill>
-                <a:latin typeface="Arial" pitchFamily="34" charset="0"/>
-                <a:ea typeface="Arial" pitchFamily="34" charset="-122"/>
-                <a:cs typeface="Arial" pitchFamily="34" charset="-120"/>
-              </a:rPr>
-              <a:t>data.csv</a:t>
-            </a:r>
-            <a:endParaRPr lang="en-US" sz="1300" dirty="0"/>
-          </a:p>
-        </p:txBody>
-      </p:sp>
-      <p:sp>
-        <p:nvSpPr>
-          <p:cNvPr id="8" name="Text 6"/>
-          <p:cNvSpPr txBox="1"/>
-          <p:nvPr/>
-        </p:nvSpPr>
-        <p:spPr>
-          <a:xfrm>
-            <a:off x="3410712" y="1609344"/>
-            <a:ext cx="2322576" cy="950976"/>
-          </a:xfrm>
-          <a:prstGeom prst="rect">
-            <a:avLst/>
-          </a:prstGeom>
-          <a:noFill/>
-          <a:ln/>
-        </p:spPr>
-        <p:txBody>
-          <a:bodyPr wrap="square" lIns="0" tIns="0" rIns="0" bIns="0" rtlCol="0" anchor="t"/>
-          <a:lstStyle/>
-          <a:p>
-            <a:pPr indent="0" marL="0">
-              <a:spcAft>
-                <a:spcPts val="300"/>
-              </a:spcAft>
-              <a:buNone/>
-            </a:pPr>
-            <a:r>
-              <a:rPr lang="en-US" sz="1000" dirty="0">
-                <a:solidFill>
-                  <a:srgbClr val="1F2933"/>
-                </a:solidFill>
-                <a:latin typeface="Arial" pitchFamily="34" charset="0"/>
-                <a:ea typeface="Arial" pitchFamily="34" charset="-122"/>
-                <a:cs typeface="Arial" pitchFamily="34" charset="-120"/>
-              </a:rPr>
-              <a:t>박동별(또는 트랜지언트별·객체별) 한 줄씩. Prism/Excel로 바로 가져가기. 그룹 비교는 영상별 요약 + 그룹 열.</a:t>
-            </a:r>
-            <a:endParaRPr lang="en-US" sz="1000" dirty="0"/>
-          </a:p>
-        </p:txBody>
-      </p:sp>
-      <p:sp>
-        <p:nvSpPr>
-          <p:cNvPr id="9" name="Shape 7"/>
-          <p:cNvSpPr/>
-          <p:nvPr/>
-        </p:nvSpPr>
-        <p:spPr>
-          <a:xfrm>
-            <a:off x="6035040" y="1188720"/>
-            <a:ext cx="2651760" cy="1463040"/>
-          </a:xfrm>
-          <a:prstGeom prst="roundRect">
-            <a:avLst>
-              <a:gd name="adj" fmla="val 5000"/>
-            </a:avLst>
-          </a:prstGeom>
-          <a:solidFill>
-            <a:srgbClr val="F3F4F6"/>
-          </a:solidFill>
-          <a:ln w="12700">
-            <a:solidFill>
-              <a:srgbClr val="F3F4F6"/>
-            </a:solidFill>
-            <a:prstDash val="solid"/>
-          </a:ln>
-        </p:spPr>
-      </p:sp>
-      <p:sp>
-        <p:nvSpPr>
-          <p:cNvPr id="10" name="Text 8"/>
-          <p:cNvSpPr txBox="1"/>
-          <p:nvPr/>
-        </p:nvSpPr>
-        <p:spPr>
-          <a:xfrm>
-            <a:off x="6199632" y="1298448"/>
-            <a:ext cx="2322576" cy="292608"/>
-          </a:xfrm>
-          <a:prstGeom prst="rect">
-            <a:avLst/>
-          </a:prstGeom>
-          <a:noFill/>
-          <a:ln/>
-        </p:spPr>
-        <p:txBody>
-          <a:bodyPr wrap="square" lIns="0" tIns="0" rIns="0" bIns="0" rtlCol="0" anchor="ctr"/>
-          <a:lstStyle/>
-          <a:p>
-            <a:pPr indent="0" marL="0">
-              <a:buNone/>
-            </a:pPr>
-            <a:r>
-              <a:rPr lang="en-US" sz="1300" b="1" dirty="0">
-                <a:solidFill>
-                  <a:srgbClr val="7A1F2B"/>
-                </a:solidFill>
-                <a:latin typeface="Arial" pitchFamily="34" charset="0"/>
-                <a:ea typeface="Arial" pitchFamily="34" charset="-122"/>
-                <a:cs typeface="Arial" pitchFamily="34" charset="-120"/>
-              </a:rPr>
-              <a:t>summary.json</a:t>
-            </a:r>
-            <a:endParaRPr lang="en-US" sz="1300" dirty="0"/>
-          </a:p>
-        </p:txBody>
-      </p:sp>
-      <p:sp>
-        <p:nvSpPr>
-          <p:cNvPr id="11" name="Text 9"/>
-          <p:cNvSpPr txBox="1"/>
-          <p:nvPr/>
-        </p:nvSpPr>
-        <p:spPr>
-          <a:xfrm>
-            <a:off x="6199632" y="1609344"/>
-            <a:ext cx="2322576" cy="950976"/>
-          </a:xfrm>
-          <a:prstGeom prst="rect">
-            <a:avLst/>
-          </a:prstGeom>
-          <a:noFill/>
-          <a:ln/>
-        </p:spPr>
-        <p:txBody>
-          <a:bodyPr wrap="square" lIns="0" tIns="0" rIns="0" bIns="0" rtlCol="0" anchor="t"/>
-          <a:lstStyle/>
-          <a:p>
-            <a:pPr indent="0" marL="0">
-              <a:spcAft>
-                <a:spcPts val="300"/>
-              </a:spcAft>
-              <a:buNone/>
-            </a:pPr>
-            <a:r>
-              <a:rPr lang="en-US" sz="1000" dirty="0">
-                <a:solidFill>
-                  <a:srgbClr val="1F2933"/>
-                </a:solidFill>
-                <a:latin typeface="Arial" pitchFamily="34" charset="0"/>
-                <a:ea typeface="Arial" pitchFamily="34" charset="-122"/>
-                <a:cs typeface="Arial" pitchFamily="34" charset="-120"/>
-              </a:rPr>
-              <a:t>요약 지표 전부 + 사용한 설정(신호 방식, fps, 스무딩 창, 피크 민감도, ROI). 논문 Methods에 쓸 값.</a:t>
-            </a:r>
-            <a:endParaRPr lang="en-US" sz="1000" dirty="0"/>
-          </a:p>
-        </p:txBody>
-      </p:sp>
-      <p:sp>
-        <p:nvSpPr>
-          <p:cNvPr id="12" name="Text 10"/>
-          <p:cNvSpPr txBox="1"/>
-          <p:nvPr/>
-        </p:nvSpPr>
-        <p:spPr>
-          <a:xfrm>
-            <a:off x="457200" y="2834640"/>
-            <a:ext cx="4572000" cy="274320"/>
-          </a:xfrm>
-          <a:prstGeom prst="rect">
-            <a:avLst/>
-          </a:prstGeom>
-          <a:noFill/>
-          <a:ln/>
-        </p:spPr>
-        <p:txBody>
-          <a:bodyPr wrap="square" lIns="0" tIns="0" rIns="0" bIns="0" rtlCol="0" anchor="ctr"/>
-          <a:lstStyle/>
-          <a:p>
-            <a:pPr indent="0" marL="0">
-              <a:buNone/>
-            </a:pPr>
-            <a:r>
-              <a:rPr lang="en-US" sz="1300" b="1" dirty="0">
-                <a:solidFill>
-                  <a:srgbClr val="7A1F2B"/>
-                </a:solidFill>
-                <a:latin typeface="Arial" pitchFamily="34" charset="0"/>
-                <a:ea typeface="Arial" pitchFamily="34" charset="-122"/>
-                <a:cs typeface="Arial" pitchFamily="34" charset="-120"/>
-              </a:rPr>
-              <a:t>분석 후 확인할 것</a:t>
-            </a:r>
-            <a:endParaRPr lang="en-US" sz="1300" dirty="0"/>
-          </a:p>
-        </p:txBody>
-      </p:sp>
-      <p:sp>
-        <p:nvSpPr>
-          <p:cNvPr id="13" name="Text 11"/>
-          <p:cNvSpPr txBox="1"/>
-          <p:nvPr/>
-        </p:nvSpPr>
-        <p:spPr>
-          <a:xfrm>
-            <a:off x="457200" y="3200400"/>
-            <a:ext cx="8229600" cy="1508760"/>
-          </a:xfrm>
-          <a:prstGeom prst="rect">
-            <a:avLst/>
-          </a:prstGeom>
-          <a:noFill/>
-          <a:ln/>
-        </p:spPr>
-        <p:txBody>
-          <a:bodyPr wrap="square" lIns="0" tIns="0" rIns="0" bIns="0" rtlCol="0" anchor="t"/>
-          <a:lstStyle/>
-          <a:p>
             <a:pPr marL="342900" indent="-342900">
               <a:spcAft>
                 <a:spcPts val="500"/>
@@ -4159,7 +4343,7 @@
                 <a:ea typeface="Arial" pitchFamily="34" charset="-122"/>
                 <a:cs typeface="Arial" pitchFamily="34" charset="-120"/>
               </a:rPr>
-              <a:t>그림의 봉우리 수가 눈으로 센 박동 수와 맞는가? (틀리면 피크 민감도 조정)</a:t>
+              <a:t>x축 묶음 = 세포주(C6, AR05), 색 = 조건(파랑 Vehicle, 빨강 UT H). 같은 묶음 안의 두 막대를 비교합니다.</a:t>
             </a:r>
             <a:endParaRPr lang="en-US" sz="1100" dirty="0"/>
           </a:p>
@@ -4180,7 +4364,7 @@
                 <a:ea typeface="Arial" pitchFamily="34" charset="-122"/>
                 <a:cs typeface="Arial" pitchFamily="34" charset="-120"/>
               </a:rPr>
-              <a:t>프레임 속도(fps)가 실제 촬영 값인가? (BPM·모든 시간 지표가 여기에 달림)</a:t>
+              <a:t>막대 위 선과 p-value는 묶음 안 Vehicle 대비 UT H 검정(Mann-Whitney U). n=1이면 p=1로 고정되어 의미가 없습니다.</a:t>
             </a:r>
             <a:endParaRPr lang="en-US" sz="1100" dirty="0"/>
           </a:p>
@@ -4201,7 +4385,7 @@
                 <a:ea typeface="Arial" pitchFamily="34" charset="-122"/>
                 <a:cs typeface="Arial" pitchFamily="34" charset="-120"/>
               </a:rPr>
-              <a:t>PIV 텍스처 경고, ROI 적용 여부, 광류의 complete_wave 수</a:t>
+              <a:t>패널은 지표별로 A–L. 다음 세 장에서 패널마다 '무엇을 재는가 / 값이 크면 / 이 데이터에서'를 정리했습니다.</a:t>
             </a:r>
             <a:endParaRPr lang="en-US" sz="1100" dirty="0"/>
           </a:p>
@@ -4222,7 +4406,7 @@
                 <a:ea typeface="Arial" pitchFamily="34" charset="-122"/>
                 <a:cs typeface="Arial" pitchFamily="34" charset="-120"/>
               </a:rPr>
-              <a:t>두 방식(reference + optical_flow)으로 교차 확인했을 때 BPM이 일치하는가?</a:t>
+              <a:t>단위: 속도·경로는 원본 픽셀 기준(px/s, px). µm/px를 넣으면 µm/s, µm로 바뀝니다.</a:t>
             </a:r>
             <a:endParaRPr lang="en-US" sz="1100" dirty="0"/>
           </a:p>
@@ -4243,7 +4427,7 @@
                 <a:ea typeface="Arial" pitchFamily="34" charset="-122"/>
                 <a:cs typeface="Arial" pitchFamily="34" charset="-120"/>
               </a:rPr>
-              <a:t>그룹 비교: 그룹당 n, 오차막대 종류(SEM/SD), 사용 검정을 캡션대로 논문에 기재</a:t>
+              <a:t>이 데이터의 큰 그림: 두 세포주 모두 UT H에서 박동이 느려지고(D), 수축·이완 속도가 떨어지며(K, L), 수축·이완이 오래 걸리고(E, G, H, I), 박동 간격이 불규칙해집니다(A, B).</a:t>
             </a:r>
             <a:endParaRPr lang="en-US" sz="1100" dirty="0"/>
           </a:p>
@@ -4251,7 +4435,7 @@
       </p:sp>
       <p:sp>
         <p:nvSpPr>
-          <p:cNvPr id="14" name="Text 12"/>
+          <p:cNvPr id="7" name="Text 4"/>
           <p:cNvSpPr txBox="1"/>
           <p:nvPr/>
         </p:nvSpPr>
@@ -4353,6 +4537,5847 @@
                 <a:ea typeface="Arial" pitchFamily="34" charset="-122"/>
                 <a:cs typeface="Arial" pitchFamily="34" charset="-120"/>
               </a:rPr>
+              <a:t>패널별 해석 ① 리듬 (A, B, D, J)</a:t>
+            </a:r>
+            <a:endParaRPr lang="en-US" sz="2600" dirty="0"/>
+          </a:p>
+        </p:txBody>
+      </p:sp>
+      <p:sp>
+        <p:nvSpPr>
+          <p:cNvPr id="3" name="Text 1"/>
+          <p:cNvSpPr txBox="1"/>
+          <p:nvPr/>
+        </p:nvSpPr>
+        <p:spPr>
+          <a:xfrm>
+            <a:off x="457200" y="804672"/>
+            <a:ext cx="8229600" cy="320040"/>
+          </a:xfrm>
+          <a:prstGeom prst="rect">
+            <a:avLst/>
+          </a:prstGeom>
+          <a:noFill/>
+          <a:ln/>
+        </p:spPr>
+        <p:txBody>
+          <a:bodyPr wrap="square" lIns="0" tIns="0" rIns="0" bIns="0" rtlCol="0" anchor="ctr"/>
+          <a:lstStyle/>
+          <a:p>
+            <a:pPr indent="0" marL="0">
+              <a:buNone/>
+            </a:pPr>
+            <a:r>
+              <a:rPr lang="en-US" sz="1200" dirty="0">
+                <a:solidFill>
+                  <a:srgbClr val="6B7280"/>
+                </a:solidFill>
+                <a:latin typeface="Arial" pitchFamily="34" charset="0"/>
+                <a:ea typeface="Arial" pitchFamily="34" charset="-122"/>
+                <a:cs typeface="Arial" pitchFamily="34" charset="-120"/>
+              </a:rPr>
+              <a:t>박동이 얼마나 자주, 얼마나 규칙적으로 뛰는가</a:t>
+            </a:r>
+            <a:endParaRPr lang="en-US" sz="1200" dirty="0"/>
+          </a:p>
+        </p:txBody>
+      </p:sp>
+      <p:graphicFrame>
+        <p:nvGraphicFramePr>
+          <p:cNvPr id="14" name="Table 0"/>
+          <p:cNvGraphicFramePr>
+            <a:graphicFrameLocks noGrp="1"/>
+          </p:cNvGraphicFramePr>
+          <p:nvPr>
+            <p:extLst>
+              <p:ext uri="{D42A27DB-BD31-4B8C-83A1-F6EECF244321}">
+                <p14:modId xmlns:p14="http://schemas.microsoft.com/office/powerpoint/2010/main" val="1579011935"/>
+              </p:ext>
+            </p:extLst>
+          </p:nvPr>
+        </p:nvGraphicFramePr>
+        <p:xfrm>
+          <a:off x="457200" y="1188720"/>
+          <a:ext cx="8229600" cy="914400"/>
+        </p:xfrm>
+        <a:graphic>
+          <a:graphicData uri="http://schemas.openxmlformats.org/drawingml/2006/table">
+            <a:tbl>
+              <a:tblPr/>
+              <a:tblGrid>
+                <a:gridCol w="1737360"/>
+                <a:gridCol w="2103120"/>
+                <a:gridCol w="2103120"/>
+                <a:gridCol w="2286000"/>
+              </a:tblGrid>
+              <a:tr h="566928">
+                <a:tc>
+                  <a:txBody>
+                    <a:bodyPr/>
+                    <a:lstStyle/>
+                    <a:p>
+                      <a:pPr indent="0" marL="0">
+                        <a:buNone/>
+                      </a:pPr>
+                      <a:r>
+                        <a:rPr lang="en-US" sz="850" b="1" dirty="0">
+                          <a:solidFill>
+                            <a:srgbClr val="FFFFFF"/>
+                          </a:solidFill>
+                          <a:latin typeface="Arial" pitchFamily="34" charset="0"/>
+                          <a:ea typeface="Arial" pitchFamily="34" charset="-122"/>
+                          <a:cs typeface="Arial" pitchFamily="34" charset="-120"/>
+                        </a:rPr>
+                        <a:t>패널 · 지표</a:t>
+                      </a:r>
+                      <a:endParaRPr lang="en-US" sz="850" dirty="0">
+                        <a:latin typeface="Arial" charset="0"/>
+                        <a:ea typeface="Arial" charset="0"/>
+                        <a:cs typeface="Arial" charset="0"/>
+                      </a:endParaRPr>
+                    </a:p>
+                  </a:txBody>
+                  <a:tcPr marL="45720" marR="45720" marT="45720" marB="45720" anchor="ctr">
+                    <a:lnL w="6350" cap="flat" cmpd="sng" algn="ctr">
+                      <a:solidFill>
+                        <a:srgbClr val="DDDDDD"/>
+                      </a:solidFill>
+                      <a:prstDash val="solid"/>
+                      <a:round/>
+                      <a:headEnd type="none" w="med" len="med"/>
+                      <a:tailEnd type="none" w="med" len="med"/>
+                    </a:lnL>
+                    <a:lnR w="6350" cap="flat" cmpd="sng" algn="ctr">
+                      <a:solidFill>
+                        <a:srgbClr val="DDDDDD"/>
+                      </a:solidFill>
+                      <a:prstDash val="solid"/>
+                      <a:round/>
+                      <a:headEnd type="none" w="med" len="med"/>
+                      <a:tailEnd type="none" w="med" len="med"/>
+                    </a:lnR>
+                    <a:lnT w="6350" cap="flat" cmpd="sng" algn="ctr">
+                      <a:solidFill>
+                        <a:srgbClr val="DDDDDD"/>
+                      </a:solidFill>
+                      <a:prstDash val="solid"/>
+                      <a:round/>
+                      <a:headEnd type="none" w="med" len="med"/>
+                      <a:tailEnd type="none" w="med" len="med"/>
+                    </a:lnT>
+                    <a:lnB w="6350" cap="flat" cmpd="sng" algn="ctr">
+                      <a:solidFill>
+                        <a:srgbClr val="DDDDDD"/>
+                      </a:solidFill>
+                      <a:prstDash val="solid"/>
+                      <a:round/>
+                      <a:headEnd type="none" w="med" len="med"/>
+                      <a:tailEnd type="none" w="med" len="med"/>
+                    </a:lnB>
+                    <a:solidFill>
+                      <a:srgbClr val="7A1F2B"/>
+                    </a:solidFill>
+                  </a:tcPr>
+                </a:tc>
+                <a:tc>
+                  <a:txBody>
+                    <a:bodyPr/>
+                    <a:lstStyle/>
+                    <a:p>
+                      <a:pPr indent="0" marL="0">
+                        <a:buNone/>
+                      </a:pPr>
+                      <a:r>
+                        <a:rPr lang="en-US" sz="850" b="1" dirty="0">
+                          <a:solidFill>
+                            <a:srgbClr val="FFFFFF"/>
+                          </a:solidFill>
+                          <a:latin typeface="Arial" pitchFamily="34" charset="0"/>
+                          <a:ea typeface="Arial" pitchFamily="34" charset="-122"/>
+                          <a:cs typeface="Arial" pitchFamily="34" charset="-120"/>
+                        </a:rPr>
+                        <a:t>무엇을 재나</a:t>
+                      </a:r>
+                      <a:endParaRPr lang="en-US" sz="850" dirty="0">
+                        <a:latin typeface="Arial" charset="0"/>
+                        <a:ea typeface="Arial" charset="0"/>
+                        <a:cs typeface="Arial" charset="0"/>
+                      </a:endParaRPr>
+                    </a:p>
+                  </a:txBody>
+                  <a:tcPr marL="45720" marR="45720" marT="45720" marB="45720" anchor="ctr">
+                    <a:lnL w="6350" cap="flat" cmpd="sng" algn="ctr">
+                      <a:solidFill>
+                        <a:srgbClr val="DDDDDD"/>
+                      </a:solidFill>
+                      <a:prstDash val="solid"/>
+                      <a:round/>
+                      <a:headEnd type="none" w="med" len="med"/>
+                      <a:tailEnd type="none" w="med" len="med"/>
+                    </a:lnL>
+                    <a:lnR w="6350" cap="flat" cmpd="sng" algn="ctr">
+                      <a:solidFill>
+                        <a:srgbClr val="DDDDDD"/>
+                      </a:solidFill>
+                      <a:prstDash val="solid"/>
+                      <a:round/>
+                      <a:headEnd type="none" w="med" len="med"/>
+                      <a:tailEnd type="none" w="med" len="med"/>
+                    </a:lnR>
+                    <a:lnT w="6350" cap="flat" cmpd="sng" algn="ctr">
+                      <a:solidFill>
+                        <a:srgbClr val="DDDDDD"/>
+                      </a:solidFill>
+                      <a:prstDash val="solid"/>
+                      <a:round/>
+                      <a:headEnd type="none" w="med" len="med"/>
+                      <a:tailEnd type="none" w="med" len="med"/>
+                    </a:lnT>
+                    <a:lnB w="6350" cap="flat" cmpd="sng" algn="ctr">
+                      <a:solidFill>
+                        <a:srgbClr val="DDDDDD"/>
+                      </a:solidFill>
+                      <a:prstDash val="solid"/>
+                      <a:round/>
+                      <a:headEnd type="none" w="med" len="med"/>
+                      <a:tailEnd type="none" w="med" len="med"/>
+                    </a:lnB>
+                    <a:solidFill>
+                      <a:srgbClr val="7A1F2B"/>
+                    </a:solidFill>
+                  </a:tcPr>
+                </a:tc>
+                <a:tc>
+                  <a:txBody>
+                    <a:bodyPr/>
+                    <a:lstStyle/>
+                    <a:p>
+                      <a:pPr indent="0" marL="0">
+                        <a:buNone/>
+                      </a:pPr>
+                      <a:r>
+                        <a:rPr lang="en-US" sz="850" b="1" dirty="0">
+                          <a:solidFill>
+                            <a:srgbClr val="FFFFFF"/>
+                          </a:solidFill>
+                          <a:latin typeface="Arial" pitchFamily="34" charset="0"/>
+                          <a:ea typeface="Arial" pitchFamily="34" charset="-122"/>
+                          <a:cs typeface="Arial" pitchFamily="34" charset="-120"/>
+                        </a:rPr>
+                        <a:t>값이 크면</a:t>
+                      </a:r>
+                      <a:endParaRPr lang="en-US" sz="850" dirty="0">
+                        <a:latin typeface="Arial" charset="0"/>
+                        <a:ea typeface="Arial" charset="0"/>
+                        <a:cs typeface="Arial" charset="0"/>
+                      </a:endParaRPr>
+                    </a:p>
+                  </a:txBody>
+                  <a:tcPr marL="45720" marR="45720" marT="45720" marB="45720" anchor="ctr">
+                    <a:lnL w="6350" cap="flat" cmpd="sng" algn="ctr">
+                      <a:solidFill>
+                        <a:srgbClr val="DDDDDD"/>
+                      </a:solidFill>
+                      <a:prstDash val="solid"/>
+                      <a:round/>
+                      <a:headEnd type="none" w="med" len="med"/>
+                      <a:tailEnd type="none" w="med" len="med"/>
+                    </a:lnL>
+                    <a:lnR w="6350" cap="flat" cmpd="sng" algn="ctr">
+                      <a:solidFill>
+                        <a:srgbClr val="DDDDDD"/>
+                      </a:solidFill>
+                      <a:prstDash val="solid"/>
+                      <a:round/>
+                      <a:headEnd type="none" w="med" len="med"/>
+                      <a:tailEnd type="none" w="med" len="med"/>
+                    </a:lnR>
+                    <a:lnT w="6350" cap="flat" cmpd="sng" algn="ctr">
+                      <a:solidFill>
+                        <a:srgbClr val="DDDDDD"/>
+                      </a:solidFill>
+                      <a:prstDash val="solid"/>
+                      <a:round/>
+                      <a:headEnd type="none" w="med" len="med"/>
+                      <a:tailEnd type="none" w="med" len="med"/>
+                    </a:lnT>
+                    <a:lnB w="6350" cap="flat" cmpd="sng" algn="ctr">
+                      <a:solidFill>
+                        <a:srgbClr val="DDDDDD"/>
+                      </a:solidFill>
+                      <a:prstDash val="solid"/>
+                      <a:round/>
+                      <a:headEnd type="none" w="med" len="med"/>
+                      <a:tailEnd type="none" w="med" len="med"/>
+                    </a:lnB>
+                    <a:solidFill>
+                      <a:srgbClr val="7A1F2B"/>
+                    </a:solidFill>
+                  </a:tcPr>
+                </a:tc>
+                <a:tc>
+                  <a:txBody>
+                    <a:bodyPr/>
+                    <a:lstStyle/>
+                    <a:p>
+                      <a:pPr indent="0" marL="0">
+                        <a:buNone/>
+                      </a:pPr>
+                      <a:r>
+                        <a:rPr lang="en-US" sz="850" b="1" dirty="0">
+                          <a:solidFill>
+                            <a:srgbClr val="FFFFFF"/>
+                          </a:solidFill>
+                          <a:latin typeface="Arial" pitchFamily="34" charset="0"/>
+                          <a:ea typeface="Arial" pitchFamily="34" charset="-122"/>
+                          <a:cs typeface="Arial" pitchFamily="34" charset="-120"/>
+                        </a:rPr>
+                        <a:t>이 데이터에서 (Vehicle → UT H)</a:t>
+                      </a:r>
+                      <a:endParaRPr lang="en-US" sz="850" dirty="0">
+                        <a:latin typeface="Arial" charset="0"/>
+                        <a:ea typeface="Arial" charset="0"/>
+                        <a:cs typeface="Arial" charset="0"/>
+                      </a:endParaRPr>
+                    </a:p>
+                  </a:txBody>
+                  <a:tcPr marL="45720" marR="45720" marT="45720" marB="45720" anchor="ctr">
+                    <a:lnL w="6350" cap="flat" cmpd="sng" algn="ctr">
+                      <a:solidFill>
+                        <a:srgbClr val="DDDDDD"/>
+                      </a:solidFill>
+                      <a:prstDash val="solid"/>
+                      <a:round/>
+                      <a:headEnd type="none" w="med" len="med"/>
+                      <a:tailEnd type="none" w="med" len="med"/>
+                    </a:lnL>
+                    <a:lnR w="6350" cap="flat" cmpd="sng" algn="ctr">
+                      <a:solidFill>
+                        <a:srgbClr val="DDDDDD"/>
+                      </a:solidFill>
+                      <a:prstDash val="solid"/>
+                      <a:round/>
+                      <a:headEnd type="none" w="med" len="med"/>
+                      <a:tailEnd type="none" w="med" len="med"/>
+                    </a:lnR>
+                    <a:lnT w="6350" cap="flat" cmpd="sng" algn="ctr">
+                      <a:solidFill>
+                        <a:srgbClr val="DDDDDD"/>
+                      </a:solidFill>
+                      <a:prstDash val="solid"/>
+                      <a:round/>
+                      <a:headEnd type="none" w="med" len="med"/>
+                      <a:tailEnd type="none" w="med" len="med"/>
+                    </a:lnT>
+                    <a:lnB w="6350" cap="flat" cmpd="sng" algn="ctr">
+                      <a:solidFill>
+                        <a:srgbClr val="DDDDDD"/>
+                      </a:solidFill>
+                      <a:prstDash val="solid"/>
+                      <a:round/>
+                      <a:headEnd type="none" w="med" len="med"/>
+                      <a:tailEnd type="none" w="med" len="med"/>
+                    </a:lnB>
+                    <a:solidFill>
+                      <a:srgbClr val="7A1F2B"/>
+                    </a:solidFill>
+                  </a:tcPr>
+                </a:tc>
+              </a:tr>
+              <a:tr h="566928">
+                <a:tc>
+                  <a:txBody>
+                    <a:bodyPr/>
+                    <a:lstStyle/>
+                    <a:p>
+                      <a:pPr indent="0" marL="0">
+                        <a:buNone/>
+                      </a:pPr>
+                      <a:r>
+                        <a:rPr lang="en-US" sz="850" b="1" dirty="0">
+                          <a:solidFill>
+                            <a:srgbClr val="1F2933"/>
+                          </a:solidFill>
+                          <a:latin typeface="Arial" pitchFamily="34" charset="0"/>
+                          <a:ea typeface="Arial" pitchFamily="34" charset="-122"/>
+                          <a:cs typeface="Arial" pitchFamily="34" charset="-120"/>
+                        </a:rPr>
+                        <a:t>D  Beating rate (BPM)</a:t>
+                      </a:r>
+                      <a:endParaRPr lang="en-US" sz="850" dirty="0">
+                        <a:latin typeface="Arial" charset="0"/>
+                        <a:ea typeface="Arial" charset="0"/>
+                        <a:cs typeface="Arial" charset="0"/>
+                      </a:endParaRPr>
+                    </a:p>
+                  </a:txBody>
+                  <a:tcPr marL="45720" marR="45720" marT="45720" marB="45720" anchor="ctr">
+                    <a:lnL w="6350" cap="flat" cmpd="sng" algn="ctr">
+                      <a:solidFill>
+                        <a:srgbClr val="DDDDDD"/>
+                      </a:solidFill>
+                      <a:prstDash val="solid"/>
+                      <a:round/>
+                      <a:headEnd type="none" w="med" len="med"/>
+                      <a:tailEnd type="none" w="med" len="med"/>
+                    </a:lnL>
+                    <a:lnR w="6350" cap="flat" cmpd="sng" algn="ctr">
+                      <a:solidFill>
+                        <a:srgbClr val="DDDDDD"/>
+                      </a:solidFill>
+                      <a:prstDash val="solid"/>
+                      <a:round/>
+                      <a:headEnd type="none" w="med" len="med"/>
+                      <a:tailEnd type="none" w="med" len="med"/>
+                    </a:lnR>
+                    <a:lnT w="6350" cap="flat" cmpd="sng" algn="ctr">
+                      <a:solidFill>
+                        <a:srgbClr val="DDDDDD"/>
+                      </a:solidFill>
+                      <a:prstDash val="solid"/>
+                      <a:round/>
+                      <a:headEnd type="none" w="med" len="med"/>
+                      <a:tailEnd type="none" w="med" len="med"/>
+                    </a:lnT>
+                    <a:lnB w="6350" cap="flat" cmpd="sng" algn="ctr">
+                      <a:solidFill>
+                        <a:srgbClr val="DDDDDD"/>
+                      </a:solidFill>
+                      <a:prstDash val="solid"/>
+                      <a:round/>
+                      <a:headEnd type="none" w="med" len="med"/>
+                      <a:tailEnd type="none" w="med" len="med"/>
+                    </a:lnB>
+                    <a:solidFill>
+                      <a:srgbClr val="F3F4F6"/>
+                    </a:solidFill>
+                  </a:tcPr>
+                </a:tc>
+                <a:tc>
+                  <a:txBody>
+                    <a:bodyPr/>
+                    <a:lstStyle/>
+                    <a:p>
+                      <a:pPr indent="0" marL="0">
+                        <a:buNone/>
+                      </a:pPr>
+                      <a:r>
+                        <a:rPr lang="en-US" sz="850" dirty="0">
+                          <a:solidFill>
+                            <a:srgbClr val="1F2933"/>
+                          </a:solidFill>
+                          <a:latin typeface="Arial" pitchFamily="34" charset="0"/>
+                          <a:ea typeface="Arial" pitchFamily="34" charset="-122"/>
+                          <a:cs typeface="Arial" pitchFamily="34" charset="-120"/>
+                        </a:rPr>
+                        <a:t>1분당 박동 수 = 60 ÷ 평균 박동 간격</a:t>
+                      </a:r>
+                      <a:endParaRPr lang="en-US" sz="850" dirty="0">
+                        <a:latin typeface="Arial" charset="0"/>
+                        <a:ea typeface="Arial" charset="0"/>
+                        <a:cs typeface="Arial" charset="0"/>
+                      </a:endParaRPr>
+                    </a:p>
+                  </a:txBody>
+                  <a:tcPr marL="45720" marR="45720" marT="45720" marB="45720" anchor="ctr">
+                    <a:lnL w="6350" cap="flat" cmpd="sng" algn="ctr">
+                      <a:solidFill>
+                        <a:srgbClr val="DDDDDD"/>
+                      </a:solidFill>
+                      <a:prstDash val="solid"/>
+                      <a:round/>
+                      <a:headEnd type="none" w="med" len="med"/>
+                      <a:tailEnd type="none" w="med" len="med"/>
+                    </a:lnL>
+                    <a:lnR w="6350" cap="flat" cmpd="sng" algn="ctr">
+                      <a:solidFill>
+                        <a:srgbClr val="DDDDDD"/>
+                      </a:solidFill>
+                      <a:prstDash val="solid"/>
+                      <a:round/>
+                      <a:headEnd type="none" w="med" len="med"/>
+                      <a:tailEnd type="none" w="med" len="med"/>
+                    </a:lnR>
+                    <a:lnT w="6350" cap="flat" cmpd="sng" algn="ctr">
+                      <a:solidFill>
+                        <a:srgbClr val="DDDDDD"/>
+                      </a:solidFill>
+                      <a:prstDash val="solid"/>
+                      <a:round/>
+                      <a:headEnd type="none" w="med" len="med"/>
+                      <a:tailEnd type="none" w="med" len="med"/>
+                    </a:lnT>
+                    <a:lnB w="6350" cap="flat" cmpd="sng" algn="ctr">
+                      <a:solidFill>
+                        <a:srgbClr val="DDDDDD"/>
+                      </a:solidFill>
+                      <a:prstDash val="solid"/>
+                      <a:round/>
+                      <a:headEnd type="none" w="med" len="med"/>
+                      <a:tailEnd type="none" w="med" len="med"/>
+                    </a:lnB>
+                    <a:solidFill>
+                      <a:srgbClr val="F3F4F6"/>
+                    </a:solidFill>
+                  </a:tcPr>
+                </a:tc>
+                <a:tc>
+                  <a:txBody>
+                    <a:bodyPr/>
+                    <a:lstStyle/>
+                    <a:p>
+                      <a:pPr indent="0" marL="0">
+                        <a:buNone/>
+                      </a:pPr>
+                      <a:r>
+                        <a:rPr lang="en-US" sz="850" dirty="0">
+                          <a:solidFill>
+                            <a:srgbClr val="1F2933"/>
+                          </a:solidFill>
+                          <a:latin typeface="Arial" pitchFamily="34" charset="0"/>
+                          <a:ea typeface="Arial" pitchFamily="34" charset="-122"/>
+                          <a:cs typeface="Arial" pitchFamily="34" charset="-120"/>
+                        </a:rPr>
+                        <a:t>빨리 뜀 (β-자극, 온도↑). 미성숙 iPSC-CM은 원래 빠름</a:t>
+                      </a:r>
+                      <a:endParaRPr lang="en-US" sz="850" dirty="0">
+                        <a:latin typeface="Arial" charset="0"/>
+                        <a:ea typeface="Arial" charset="0"/>
+                        <a:cs typeface="Arial" charset="0"/>
+                      </a:endParaRPr>
+                    </a:p>
+                  </a:txBody>
+                  <a:tcPr marL="45720" marR="45720" marT="45720" marB="45720" anchor="ctr">
+                    <a:lnL w="6350" cap="flat" cmpd="sng" algn="ctr">
+                      <a:solidFill>
+                        <a:srgbClr val="DDDDDD"/>
+                      </a:solidFill>
+                      <a:prstDash val="solid"/>
+                      <a:round/>
+                      <a:headEnd type="none" w="med" len="med"/>
+                      <a:tailEnd type="none" w="med" len="med"/>
+                    </a:lnL>
+                    <a:lnR w="6350" cap="flat" cmpd="sng" algn="ctr">
+                      <a:solidFill>
+                        <a:srgbClr val="DDDDDD"/>
+                      </a:solidFill>
+                      <a:prstDash val="solid"/>
+                      <a:round/>
+                      <a:headEnd type="none" w="med" len="med"/>
+                      <a:tailEnd type="none" w="med" len="med"/>
+                    </a:lnR>
+                    <a:lnT w="6350" cap="flat" cmpd="sng" algn="ctr">
+                      <a:solidFill>
+                        <a:srgbClr val="DDDDDD"/>
+                      </a:solidFill>
+                      <a:prstDash val="solid"/>
+                      <a:round/>
+                      <a:headEnd type="none" w="med" len="med"/>
+                      <a:tailEnd type="none" w="med" len="med"/>
+                    </a:lnT>
+                    <a:lnB w="6350" cap="flat" cmpd="sng" algn="ctr">
+                      <a:solidFill>
+                        <a:srgbClr val="DDDDDD"/>
+                      </a:solidFill>
+                      <a:prstDash val="solid"/>
+                      <a:round/>
+                      <a:headEnd type="none" w="med" len="med"/>
+                      <a:tailEnd type="none" w="med" len="med"/>
+                    </a:lnB>
+                    <a:solidFill>
+                      <a:srgbClr val="F3F4F6"/>
+                    </a:solidFill>
+                  </a:tcPr>
+                </a:tc>
+                <a:tc>
+                  <a:txBody>
+                    <a:bodyPr/>
+                    <a:lstStyle/>
+                    <a:p>
+                      <a:pPr indent="0" marL="0">
+                        <a:buNone/>
+                      </a:pPr>
+                      <a:r>
+                        <a:rPr lang="en-US" sz="850" dirty="0">
+                          <a:solidFill>
+                            <a:srgbClr val="1F2933"/>
+                          </a:solidFill>
+                          <a:latin typeface="Arial" pitchFamily="34" charset="0"/>
+                          <a:ea typeface="Arial" pitchFamily="34" charset="-122"/>
+                          <a:cs typeface="Arial" pitchFamily="34" charset="-120"/>
+                        </a:rPr>
+                        <a:t>C6 183 → 35, AR05 57 → 30. UT H가 박동을 크게 늦춤 (음성 변시 효과). C6 Vehicle 183은 영상으로 확인 필요</a:t>
+                      </a:r>
+                      <a:endParaRPr lang="en-US" sz="850" dirty="0">
+                        <a:latin typeface="Arial" charset="0"/>
+                        <a:ea typeface="Arial" charset="0"/>
+                        <a:cs typeface="Arial" charset="0"/>
+                      </a:endParaRPr>
+                    </a:p>
+                  </a:txBody>
+                  <a:tcPr marL="45720" marR="45720" marT="45720" marB="45720" anchor="ctr">
+                    <a:lnL w="6350" cap="flat" cmpd="sng" algn="ctr">
+                      <a:solidFill>
+                        <a:srgbClr val="DDDDDD"/>
+                      </a:solidFill>
+                      <a:prstDash val="solid"/>
+                      <a:round/>
+                      <a:headEnd type="none" w="med" len="med"/>
+                      <a:tailEnd type="none" w="med" len="med"/>
+                    </a:lnL>
+                    <a:lnR w="6350" cap="flat" cmpd="sng" algn="ctr">
+                      <a:solidFill>
+                        <a:srgbClr val="DDDDDD"/>
+                      </a:solidFill>
+                      <a:prstDash val="solid"/>
+                      <a:round/>
+                      <a:headEnd type="none" w="med" len="med"/>
+                      <a:tailEnd type="none" w="med" len="med"/>
+                    </a:lnR>
+                    <a:lnT w="6350" cap="flat" cmpd="sng" algn="ctr">
+                      <a:solidFill>
+                        <a:srgbClr val="DDDDDD"/>
+                      </a:solidFill>
+                      <a:prstDash val="solid"/>
+                      <a:round/>
+                      <a:headEnd type="none" w="med" len="med"/>
+                      <a:tailEnd type="none" w="med" len="med"/>
+                    </a:lnT>
+                    <a:lnB w="6350" cap="flat" cmpd="sng" algn="ctr">
+                      <a:solidFill>
+                        <a:srgbClr val="DDDDDD"/>
+                      </a:solidFill>
+                      <a:prstDash val="solid"/>
+                      <a:round/>
+                      <a:headEnd type="none" w="med" len="med"/>
+                      <a:tailEnd type="none" w="med" len="med"/>
+                    </a:lnB>
+                    <a:solidFill>
+                      <a:srgbClr val="F3F4F6"/>
+                    </a:solidFill>
+                  </a:tcPr>
+                </a:tc>
+              </a:tr>
+              <a:tr h="566928">
+                <a:tc>
+                  <a:txBody>
+                    <a:bodyPr/>
+                    <a:lstStyle/>
+                    <a:p>
+                      <a:pPr indent="0" marL="0">
+                        <a:buNone/>
+                      </a:pPr>
+                      <a:r>
+                        <a:rPr lang="en-US" sz="850" b="1" dirty="0">
+                          <a:solidFill>
+                            <a:srgbClr val="1F2933"/>
+                          </a:solidFill>
+                          <a:latin typeface="Arial" pitchFamily="34" charset="0"/>
+                          <a:ea typeface="Arial" pitchFamily="34" charset="-122"/>
+                          <a:cs typeface="Arial" pitchFamily="34" charset="-120"/>
+                        </a:rPr>
+                        <a:t>J  Inter-beat interval (s)</a:t>
+                      </a:r>
+                      <a:endParaRPr lang="en-US" sz="850" dirty="0">
+                        <a:latin typeface="Arial" charset="0"/>
+                        <a:ea typeface="Arial" charset="0"/>
+                        <a:cs typeface="Arial" charset="0"/>
+                      </a:endParaRPr>
+                    </a:p>
+                  </a:txBody>
+                  <a:tcPr marL="45720" marR="45720" marT="45720" marB="45720" anchor="ctr">
+                    <a:lnL w="6350" cap="flat" cmpd="sng" algn="ctr">
+                      <a:solidFill>
+                        <a:srgbClr val="DDDDDD"/>
+                      </a:solidFill>
+                      <a:prstDash val="solid"/>
+                      <a:round/>
+                      <a:headEnd type="none" w="med" len="med"/>
+                      <a:tailEnd type="none" w="med" len="med"/>
+                    </a:lnL>
+                    <a:lnR w="6350" cap="flat" cmpd="sng" algn="ctr">
+                      <a:solidFill>
+                        <a:srgbClr val="DDDDDD"/>
+                      </a:solidFill>
+                      <a:prstDash val="solid"/>
+                      <a:round/>
+                      <a:headEnd type="none" w="med" len="med"/>
+                      <a:tailEnd type="none" w="med" len="med"/>
+                    </a:lnR>
+                    <a:lnT w="6350" cap="flat" cmpd="sng" algn="ctr">
+                      <a:solidFill>
+                        <a:srgbClr val="DDDDDD"/>
+                      </a:solidFill>
+                      <a:prstDash val="solid"/>
+                      <a:round/>
+                      <a:headEnd type="none" w="med" len="med"/>
+                      <a:tailEnd type="none" w="med" len="med"/>
+                    </a:lnT>
+                    <a:lnB w="6350" cap="flat" cmpd="sng" algn="ctr">
+                      <a:solidFill>
+                        <a:srgbClr val="DDDDDD"/>
+                      </a:solidFill>
+                      <a:prstDash val="solid"/>
+                      <a:round/>
+                      <a:headEnd type="none" w="med" len="med"/>
+                      <a:tailEnd type="none" w="med" len="med"/>
+                    </a:lnB>
+                    <a:solidFill>
+                      <a:srgbClr val="FFFFFF"/>
+                    </a:solidFill>
+                  </a:tcPr>
+                </a:tc>
+                <a:tc>
+                  <a:txBody>
+                    <a:bodyPr/>
+                    <a:lstStyle/>
+                    <a:p>
+                      <a:pPr indent="0" marL="0">
+                        <a:buNone/>
+                      </a:pPr>
+                      <a:r>
+                        <a:rPr lang="en-US" sz="850" dirty="0">
+                          <a:solidFill>
+                            <a:srgbClr val="1F2933"/>
+                          </a:solidFill>
+                          <a:latin typeface="Arial" pitchFamily="34" charset="0"/>
+                          <a:ea typeface="Arial" pitchFamily="34" charset="-122"/>
+                          <a:cs typeface="Arial" pitchFamily="34" charset="-120"/>
+                        </a:rPr>
+                        <a:t>박동과 박동 사이 시간 (BPM의 역수)</a:t>
+                      </a:r>
+                      <a:endParaRPr lang="en-US" sz="850" dirty="0">
+                        <a:latin typeface="Arial" charset="0"/>
+                        <a:ea typeface="Arial" charset="0"/>
+                        <a:cs typeface="Arial" charset="0"/>
+                      </a:endParaRPr>
+                    </a:p>
+                  </a:txBody>
+                  <a:tcPr marL="45720" marR="45720" marT="45720" marB="45720" anchor="ctr">
+                    <a:lnL w="6350" cap="flat" cmpd="sng" algn="ctr">
+                      <a:solidFill>
+                        <a:srgbClr val="DDDDDD"/>
+                      </a:solidFill>
+                      <a:prstDash val="solid"/>
+                      <a:round/>
+                      <a:headEnd type="none" w="med" len="med"/>
+                      <a:tailEnd type="none" w="med" len="med"/>
+                    </a:lnL>
+                    <a:lnR w="6350" cap="flat" cmpd="sng" algn="ctr">
+                      <a:solidFill>
+                        <a:srgbClr val="DDDDDD"/>
+                      </a:solidFill>
+                      <a:prstDash val="solid"/>
+                      <a:round/>
+                      <a:headEnd type="none" w="med" len="med"/>
+                      <a:tailEnd type="none" w="med" len="med"/>
+                    </a:lnR>
+                    <a:lnT w="6350" cap="flat" cmpd="sng" algn="ctr">
+                      <a:solidFill>
+                        <a:srgbClr val="DDDDDD"/>
+                      </a:solidFill>
+                      <a:prstDash val="solid"/>
+                      <a:round/>
+                      <a:headEnd type="none" w="med" len="med"/>
+                      <a:tailEnd type="none" w="med" len="med"/>
+                    </a:lnT>
+                    <a:lnB w="6350" cap="flat" cmpd="sng" algn="ctr">
+                      <a:solidFill>
+                        <a:srgbClr val="DDDDDD"/>
+                      </a:solidFill>
+                      <a:prstDash val="solid"/>
+                      <a:round/>
+                      <a:headEnd type="none" w="med" len="med"/>
+                      <a:tailEnd type="none" w="med" len="med"/>
+                    </a:lnB>
+                    <a:solidFill>
+                      <a:srgbClr val="FFFFFF"/>
+                    </a:solidFill>
+                  </a:tcPr>
+                </a:tc>
+                <a:tc>
+                  <a:txBody>
+                    <a:bodyPr/>
+                    <a:lstStyle/>
+                    <a:p>
+                      <a:pPr indent="0" marL="0">
+                        <a:buNone/>
+                      </a:pPr>
+                      <a:r>
+                        <a:rPr lang="en-US" sz="850" dirty="0">
+                          <a:solidFill>
+                            <a:srgbClr val="1F2933"/>
+                          </a:solidFill>
+                          <a:latin typeface="Arial" pitchFamily="34" charset="0"/>
+                          <a:ea typeface="Arial" pitchFamily="34" charset="-122"/>
+                          <a:cs typeface="Arial" pitchFamily="34" charset="-120"/>
+                        </a:rPr>
+                        <a:t>느리게 뜀. D와 같은 정보를 시간으로 표현</a:t>
+                      </a:r>
+                      <a:endParaRPr lang="en-US" sz="850" dirty="0">
+                        <a:latin typeface="Arial" charset="0"/>
+                        <a:ea typeface="Arial" charset="0"/>
+                        <a:cs typeface="Arial" charset="0"/>
+                      </a:endParaRPr>
+                    </a:p>
+                  </a:txBody>
+                  <a:tcPr marL="45720" marR="45720" marT="45720" marB="45720" anchor="ctr">
+                    <a:lnL w="6350" cap="flat" cmpd="sng" algn="ctr">
+                      <a:solidFill>
+                        <a:srgbClr val="DDDDDD"/>
+                      </a:solidFill>
+                      <a:prstDash val="solid"/>
+                      <a:round/>
+                      <a:headEnd type="none" w="med" len="med"/>
+                      <a:tailEnd type="none" w="med" len="med"/>
+                    </a:lnL>
+                    <a:lnR w="6350" cap="flat" cmpd="sng" algn="ctr">
+                      <a:solidFill>
+                        <a:srgbClr val="DDDDDD"/>
+                      </a:solidFill>
+                      <a:prstDash val="solid"/>
+                      <a:round/>
+                      <a:headEnd type="none" w="med" len="med"/>
+                      <a:tailEnd type="none" w="med" len="med"/>
+                    </a:lnR>
+                    <a:lnT w="6350" cap="flat" cmpd="sng" algn="ctr">
+                      <a:solidFill>
+                        <a:srgbClr val="DDDDDD"/>
+                      </a:solidFill>
+                      <a:prstDash val="solid"/>
+                      <a:round/>
+                      <a:headEnd type="none" w="med" len="med"/>
+                      <a:tailEnd type="none" w="med" len="med"/>
+                    </a:lnT>
+                    <a:lnB w="6350" cap="flat" cmpd="sng" algn="ctr">
+                      <a:solidFill>
+                        <a:srgbClr val="DDDDDD"/>
+                      </a:solidFill>
+                      <a:prstDash val="solid"/>
+                      <a:round/>
+                      <a:headEnd type="none" w="med" len="med"/>
+                      <a:tailEnd type="none" w="med" len="med"/>
+                    </a:lnB>
+                    <a:solidFill>
+                      <a:srgbClr val="FFFFFF"/>
+                    </a:solidFill>
+                  </a:tcPr>
+                </a:tc>
+                <a:tc>
+                  <a:txBody>
+                    <a:bodyPr/>
+                    <a:lstStyle/>
+                    <a:p>
+                      <a:pPr indent="0" marL="0">
+                        <a:buNone/>
+                      </a:pPr>
+                      <a:r>
+                        <a:rPr lang="en-US" sz="850" dirty="0">
+                          <a:solidFill>
+                            <a:srgbClr val="1F2933"/>
+                          </a:solidFill>
+                          <a:latin typeface="Arial" pitchFamily="34" charset="0"/>
+                          <a:ea typeface="Arial" pitchFamily="34" charset="-122"/>
+                          <a:cs typeface="Arial" pitchFamily="34" charset="-120"/>
+                        </a:rPr>
+                        <a:t>C6 0.33 → 1.7 s, AR05 1.05 → 2.0 s. D와 일치</a:t>
+                      </a:r>
+                      <a:endParaRPr lang="en-US" sz="850" dirty="0">
+                        <a:latin typeface="Arial" charset="0"/>
+                        <a:ea typeface="Arial" charset="0"/>
+                        <a:cs typeface="Arial" charset="0"/>
+                      </a:endParaRPr>
+                    </a:p>
+                  </a:txBody>
+                  <a:tcPr marL="45720" marR="45720" marT="45720" marB="45720" anchor="ctr">
+                    <a:lnL w="6350" cap="flat" cmpd="sng" algn="ctr">
+                      <a:solidFill>
+                        <a:srgbClr val="DDDDDD"/>
+                      </a:solidFill>
+                      <a:prstDash val="solid"/>
+                      <a:round/>
+                      <a:headEnd type="none" w="med" len="med"/>
+                      <a:tailEnd type="none" w="med" len="med"/>
+                    </a:lnL>
+                    <a:lnR w="6350" cap="flat" cmpd="sng" algn="ctr">
+                      <a:solidFill>
+                        <a:srgbClr val="DDDDDD"/>
+                      </a:solidFill>
+                      <a:prstDash val="solid"/>
+                      <a:round/>
+                      <a:headEnd type="none" w="med" len="med"/>
+                      <a:tailEnd type="none" w="med" len="med"/>
+                    </a:lnR>
+                    <a:lnT w="6350" cap="flat" cmpd="sng" algn="ctr">
+                      <a:solidFill>
+                        <a:srgbClr val="DDDDDD"/>
+                      </a:solidFill>
+                      <a:prstDash val="solid"/>
+                      <a:round/>
+                      <a:headEnd type="none" w="med" len="med"/>
+                      <a:tailEnd type="none" w="med" len="med"/>
+                    </a:lnT>
+                    <a:lnB w="6350" cap="flat" cmpd="sng" algn="ctr">
+                      <a:solidFill>
+                        <a:srgbClr val="DDDDDD"/>
+                      </a:solidFill>
+                      <a:prstDash val="solid"/>
+                      <a:round/>
+                      <a:headEnd type="none" w="med" len="med"/>
+                      <a:tailEnd type="none" w="med" len="med"/>
+                    </a:lnB>
+                    <a:solidFill>
+                      <a:srgbClr val="FFFFFF"/>
+                    </a:solidFill>
+                  </a:tcPr>
+                </a:tc>
+              </a:tr>
+              <a:tr h="566928">
+                <a:tc>
+                  <a:txBody>
+                    <a:bodyPr/>
+                    <a:lstStyle/>
+                    <a:p>
+                      <a:pPr indent="0" marL="0">
+                        <a:buNone/>
+                      </a:pPr>
+                      <a:r>
+                        <a:rPr lang="en-US" sz="850" b="1" dirty="0">
+                          <a:solidFill>
+                            <a:srgbClr val="1F2933"/>
+                          </a:solidFill>
+                          <a:latin typeface="Arial" pitchFamily="34" charset="0"/>
+                          <a:ea typeface="Arial" pitchFamily="34" charset="-122"/>
+                          <a:cs typeface="Arial" pitchFamily="34" charset="-120"/>
+                        </a:rPr>
+                        <a:t>A  Beating rate variability (IBI CV, %)</a:t>
+                      </a:r>
+                      <a:endParaRPr lang="en-US" sz="850" dirty="0">
+                        <a:latin typeface="Arial" charset="0"/>
+                        <a:ea typeface="Arial" charset="0"/>
+                        <a:cs typeface="Arial" charset="0"/>
+                      </a:endParaRPr>
+                    </a:p>
+                  </a:txBody>
+                  <a:tcPr marL="45720" marR="45720" marT="45720" marB="45720" anchor="ctr">
+                    <a:lnL w="6350" cap="flat" cmpd="sng" algn="ctr">
+                      <a:solidFill>
+                        <a:srgbClr val="DDDDDD"/>
+                      </a:solidFill>
+                      <a:prstDash val="solid"/>
+                      <a:round/>
+                      <a:headEnd type="none" w="med" len="med"/>
+                      <a:tailEnd type="none" w="med" len="med"/>
+                    </a:lnL>
+                    <a:lnR w="6350" cap="flat" cmpd="sng" algn="ctr">
+                      <a:solidFill>
+                        <a:srgbClr val="DDDDDD"/>
+                      </a:solidFill>
+                      <a:prstDash val="solid"/>
+                      <a:round/>
+                      <a:headEnd type="none" w="med" len="med"/>
+                      <a:tailEnd type="none" w="med" len="med"/>
+                    </a:lnR>
+                    <a:lnT w="6350" cap="flat" cmpd="sng" algn="ctr">
+                      <a:solidFill>
+                        <a:srgbClr val="DDDDDD"/>
+                      </a:solidFill>
+                      <a:prstDash val="solid"/>
+                      <a:round/>
+                      <a:headEnd type="none" w="med" len="med"/>
+                      <a:tailEnd type="none" w="med" len="med"/>
+                    </a:lnT>
+                    <a:lnB w="6350" cap="flat" cmpd="sng" algn="ctr">
+                      <a:solidFill>
+                        <a:srgbClr val="DDDDDD"/>
+                      </a:solidFill>
+                      <a:prstDash val="solid"/>
+                      <a:round/>
+                      <a:headEnd type="none" w="med" len="med"/>
+                      <a:tailEnd type="none" w="med" len="med"/>
+                    </a:lnB>
+                    <a:solidFill>
+                      <a:srgbClr val="F3F4F6"/>
+                    </a:solidFill>
+                  </a:tcPr>
+                </a:tc>
+                <a:tc>
+                  <a:txBody>
+                    <a:bodyPr/>
+                    <a:lstStyle/>
+                    <a:p>
+                      <a:pPr indent="0" marL="0">
+                        <a:buNone/>
+                      </a:pPr>
+                      <a:r>
+                        <a:rPr lang="en-US" sz="850" dirty="0">
+                          <a:solidFill>
+                            <a:srgbClr val="1F2933"/>
+                          </a:solidFill>
+                          <a:latin typeface="Arial" pitchFamily="34" charset="0"/>
+                          <a:ea typeface="Arial" pitchFamily="34" charset="-122"/>
+                          <a:cs typeface="Arial" pitchFamily="34" charset="-120"/>
+                        </a:rPr>
+                        <a:t>박동 간격의 변동계수 = SD ÷ 평균 × 100</a:t>
+                      </a:r>
+                      <a:endParaRPr lang="en-US" sz="850" dirty="0">
+                        <a:latin typeface="Arial" charset="0"/>
+                        <a:ea typeface="Arial" charset="0"/>
+                        <a:cs typeface="Arial" charset="0"/>
+                      </a:endParaRPr>
+                    </a:p>
+                  </a:txBody>
+                  <a:tcPr marL="45720" marR="45720" marT="45720" marB="45720" anchor="ctr">
+                    <a:lnL w="6350" cap="flat" cmpd="sng" algn="ctr">
+                      <a:solidFill>
+                        <a:srgbClr val="DDDDDD"/>
+                      </a:solidFill>
+                      <a:prstDash val="solid"/>
+                      <a:round/>
+                      <a:headEnd type="none" w="med" len="med"/>
+                      <a:tailEnd type="none" w="med" len="med"/>
+                    </a:lnL>
+                    <a:lnR w="6350" cap="flat" cmpd="sng" algn="ctr">
+                      <a:solidFill>
+                        <a:srgbClr val="DDDDDD"/>
+                      </a:solidFill>
+                      <a:prstDash val="solid"/>
+                      <a:round/>
+                      <a:headEnd type="none" w="med" len="med"/>
+                      <a:tailEnd type="none" w="med" len="med"/>
+                    </a:lnR>
+                    <a:lnT w="6350" cap="flat" cmpd="sng" algn="ctr">
+                      <a:solidFill>
+                        <a:srgbClr val="DDDDDD"/>
+                      </a:solidFill>
+                      <a:prstDash val="solid"/>
+                      <a:round/>
+                      <a:headEnd type="none" w="med" len="med"/>
+                      <a:tailEnd type="none" w="med" len="med"/>
+                    </a:lnT>
+                    <a:lnB w="6350" cap="flat" cmpd="sng" algn="ctr">
+                      <a:solidFill>
+                        <a:srgbClr val="DDDDDD"/>
+                      </a:solidFill>
+                      <a:prstDash val="solid"/>
+                      <a:round/>
+                      <a:headEnd type="none" w="med" len="med"/>
+                      <a:tailEnd type="none" w="med" len="med"/>
+                    </a:lnB>
+                    <a:solidFill>
+                      <a:srgbClr val="F3F4F6"/>
+                    </a:solidFill>
+                  </a:tcPr>
+                </a:tc>
+                <a:tc>
+                  <a:txBody>
+                    <a:bodyPr/>
+                    <a:lstStyle/>
+                    <a:p>
+                      <a:pPr indent="0" marL="0">
+                        <a:buNone/>
+                      </a:pPr>
+                      <a:r>
+                        <a:rPr lang="en-US" sz="850" dirty="0">
+                          <a:solidFill>
+                            <a:srgbClr val="1F2933"/>
+                          </a:solidFill>
+                          <a:latin typeface="Arial" pitchFamily="34" charset="0"/>
+                          <a:ea typeface="Arial" pitchFamily="34" charset="-122"/>
+                          <a:cs typeface="Arial" pitchFamily="34" charset="-120"/>
+                        </a:rPr>
+                        <a:t>불규칙 박동. 규칙적이면 &lt;10 %, 미성숙 세포·부정맥·검출 오류에서 높음</a:t>
+                      </a:r>
+                      <a:endParaRPr lang="en-US" sz="850" dirty="0">
+                        <a:latin typeface="Arial" charset="0"/>
+                        <a:ea typeface="Arial" charset="0"/>
+                        <a:cs typeface="Arial" charset="0"/>
+                      </a:endParaRPr>
+                    </a:p>
+                  </a:txBody>
+                  <a:tcPr marL="45720" marR="45720" marT="45720" marB="45720" anchor="ctr">
+                    <a:lnL w="6350" cap="flat" cmpd="sng" algn="ctr">
+                      <a:solidFill>
+                        <a:srgbClr val="DDDDDD"/>
+                      </a:solidFill>
+                      <a:prstDash val="solid"/>
+                      <a:round/>
+                      <a:headEnd type="none" w="med" len="med"/>
+                      <a:tailEnd type="none" w="med" len="med"/>
+                    </a:lnL>
+                    <a:lnR w="6350" cap="flat" cmpd="sng" algn="ctr">
+                      <a:solidFill>
+                        <a:srgbClr val="DDDDDD"/>
+                      </a:solidFill>
+                      <a:prstDash val="solid"/>
+                      <a:round/>
+                      <a:headEnd type="none" w="med" len="med"/>
+                      <a:tailEnd type="none" w="med" len="med"/>
+                    </a:lnR>
+                    <a:lnT w="6350" cap="flat" cmpd="sng" algn="ctr">
+                      <a:solidFill>
+                        <a:srgbClr val="DDDDDD"/>
+                      </a:solidFill>
+                      <a:prstDash val="solid"/>
+                      <a:round/>
+                      <a:headEnd type="none" w="med" len="med"/>
+                      <a:tailEnd type="none" w="med" len="med"/>
+                    </a:lnT>
+                    <a:lnB w="6350" cap="flat" cmpd="sng" algn="ctr">
+                      <a:solidFill>
+                        <a:srgbClr val="DDDDDD"/>
+                      </a:solidFill>
+                      <a:prstDash val="solid"/>
+                      <a:round/>
+                      <a:headEnd type="none" w="med" len="med"/>
+                      <a:tailEnd type="none" w="med" len="med"/>
+                    </a:lnB>
+                    <a:solidFill>
+                      <a:srgbClr val="F3F4F6"/>
+                    </a:solidFill>
+                  </a:tcPr>
+                </a:tc>
+                <a:tc>
+                  <a:txBody>
+                    <a:bodyPr/>
+                    <a:lstStyle/>
+                    <a:p>
+                      <a:pPr indent="0" marL="0">
+                        <a:buNone/>
+                      </a:pPr>
+                      <a:r>
+                        <a:rPr lang="en-US" sz="850" dirty="0">
+                          <a:solidFill>
+                            <a:srgbClr val="1F2933"/>
+                          </a:solidFill>
+                          <a:latin typeface="Arial" pitchFamily="34" charset="0"/>
+                          <a:ea typeface="Arial" pitchFamily="34" charset="-122"/>
+                          <a:cs typeface="Arial" pitchFamily="34" charset="-120"/>
+                        </a:rPr>
+                        <a:t>C6 31 → 34 (둘 다 높음), AR05 6 → 29. AR05는 Vehicle이 규칙적이었는데 UT H로 불규칙해짐</a:t>
+                      </a:r>
+                      <a:endParaRPr lang="en-US" sz="850" dirty="0">
+                        <a:latin typeface="Arial" charset="0"/>
+                        <a:ea typeface="Arial" charset="0"/>
+                        <a:cs typeface="Arial" charset="0"/>
+                      </a:endParaRPr>
+                    </a:p>
+                  </a:txBody>
+                  <a:tcPr marL="45720" marR="45720" marT="45720" marB="45720" anchor="ctr">
+                    <a:lnL w="6350" cap="flat" cmpd="sng" algn="ctr">
+                      <a:solidFill>
+                        <a:srgbClr val="DDDDDD"/>
+                      </a:solidFill>
+                      <a:prstDash val="solid"/>
+                      <a:round/>
+                      <a:headEnd type="none" w="med" len="med"/>
+                      <a:tailEnd type="none" w="med" len="med"/>
+                    </a:lnL>
+                    <a:lnR w="6350" cap="flat" cmpd="sng" algn="ctr">
+                      <a:solidFill>
+                        <a:srgbClr val="DDDDDD"/>
+                      </a:solidFill>
+                      <a:prstDash val="solid"/>
+                      <a:round/>
+                      <a:headEnd type="none" w="med" len="med"/>
+                      <a:tailEnd type="none" w="med" len="med"/>
+                    </a:lnR>
+                    <a:lnT w="6350" cap="flat" cmpd="sng" algn="ctr">
+                      <a:solidFill>
+                        <a:srgbClr val="DDDDDD"/>
+                      </a:solidFill>
+                      <a:prstDash val="solid"/>
+                      <a:round/>
+                      <a:headEnd type="none" w="med" len="med"/>
+                      <a:tailEnd type="none" w="med" len="med"/>
+                    </a:lnT>
+                    <a:lnB w="6350" cap="flat" cmpd="sng" algn="ctr">
+                      <a:solidFill>
+                        <a:srgbClr val="DDDDDD"/>
+                      </a:solidFill>
+                      <a:prstDash val="solid"/>
+                      <a:round/>
+                      <a:headEnd type="none" w="med" len="med"/>
+                      <a:tailEnd type="none" w="med" len="med"/>
+                    </a:lnB>
+                    <a:solidFill>
+                      <a:srgbClr val="F3F4F6"/>
+                    </a:solidFill>
+                  </a:tcPr>
+                </a:tc>
+              </a:tr>
+              <a:tr h="566928">
+                <a:tc>
+                  <a:txBody>
+                    <a:bodyPr/>
+                    <a:lstStyle/>
+                    <a:p>
+                      <a:pPr indent="0" marL="0">
+                        <a:buNone/>
+                      </a:pPr>
+                      <a:r>
+                        <a:rPr lang="en-US" sz="850" b="1" dirty="0">
+                          <a:solidFill>
+                            <a:srgbClr val="1F2933"/>
+                          </a:solidFill>
+                          <a:latin typeface="Arial" pitchFamily="34" charset="0"/>
+                          <a:ea typeface="Arial" pitchFamily="34" charset="-122"/>
+                          <a:cs typeface="Arial" pitchFamily="34" charset="-120"/>
+                        </a:rPr>
+                        <a:t>B  Inter-beat interval SD (s)</a:t>
+                      </a:r>
+                      <a:endParaRPr lang="en-US" sz="850" dirty="0">
+                        <a:latin typeface="Arial" charset="0"/>
+                        <a:ea typeface="Arial" charset="0"/>
+                        <a:cs typeface="Arial" charset="0"/>
+                      </a:endParaRPr>
+                    </a:p>
+                  </a:txBody>
+                  <a:tcPr marL="45720" marR="45720" marT="45720" marB="45720" anchor="ctr">
+                    <a:lnL w="6350" cap="flat" cmpd="sng" algn="ctr">
+                      <a:solidFill>
+                        <a:srgbClr val="DDDDDD"/>
+                      </a:solidFill>
+                      <a:prstDash val="solid"/>
+                      <a:round/>
+                      <a:headEnd type="none" w="med" len="med"/>
+                      <a:tailEnd type="none" w="med" len="med"/>
+                    </a:lnL>
+                    <a:lnR w="6350" cap="flat" cmpd="sng" algn="ctr">
+                      <a:solidFill>
+                        <a:srgbClr val="DDDDDD"/>
+                      </a:solidFill>
+                      <a:prstDash val="solid"/>
+                      <a:round/>
+                      <a:headEnd type="none" w="med" len="med"/>
+                      <a:tailEnd type="none" w="med" len="med"/>
+                    </a:lnR>
+                    <a:lnT w="6350" cap="flat" cmpd="sng" algn="ctr">
+                      <a:solidFill>
+                        <a:srgbClr val="DDDDDD"/>
+                      </a:solidFill>
+                      <a:prstDash val="solid"/>
+                      <a:round/>
+                      <a:headEnd type="none" w="med" len="med"/>
+                      <a:tailEnd type="none" w="med" len="med"/>
+                    </a:lnT>
+                    <a:lnB w="6350" cap="flat" cmpd="sng" algn="ctr">
+                      <a:solidFill>
+                        <a:srgbClr val="DDDDDD"/>
+                      </a:solidFill>
+                      <a:prstDash val="solid"/>
+                      <a:round/>
+                      <a:headEnd type="none" w="med" len="med"/>
+                      <a:tailEnd type="none" w="med" len="med"/>
+                    </a:lnB>
+                    <a:solidFill>
+                      <a:srgbClr val="FFFFFF"/>
+                    </a:solidFill>
+                  </a:tcPr>
+                </a:tc>
+                <a:tc>
+                  <a:txBody>
+                    <a:bodyPr/>
+                    <a:lstStyle/>
+                    <a:p>
+                      <a:pPr indent="0" marL="0">
+                        <a:buNone/>
+                      </a:pPr>
+                      <a:r>
+                        <a:rPr lang="en-US" sz="850" dirty="0">
+                          <a:solidFill>
+                            <a:srgbClr val="1F2933"/>
+                          </a:solidFill>
+                          <a:latin typeface="Arial" pitchFamily="34" charset="0"/>
+                          <a:ea typeface="Arial" pitchFamily="34" charset="-122"/>
+                          <a:cs typeface="Arial" pitchFamily="34" charset="-120"/>
+                        </a:rPr>
+                        <a:t>박동 간격의 표준편차 (절대값)</a:t>
+                      </a:r>
+                      <a:endParaRPr lang="en-US" sz="850" dirty="0">
+                        <a:latin typeface="Arial" charset="0"/>
+                        <a:ea typeface="Arial" charset="0"/>
+                        <a:cs typeface="Arial" charset="0"/>
+                      </a:endParaRPr>
+                    </a:p>
+                  </a:txBody>
+                  <a:tcPr marL="45720" marR="45720" marT="45720" marB="45720" anchor="ctr">
+                    <a:lnL w="6350" cap="flat" cmpd="sng" algn="ctr">
+                      <a:solidFill>
+                        <a:srgbClr val="DDDDDD"/>
+                      </a:solidFill>
+                      <a:prstDash val="solid"/>
+                      <a:round/>
+                      <a:headEnd type="none" w="med" len="med"/>
+                      <a:tailEnd type="none" w="med" len="med"/>
+                    </a:lnL>
+                    <a:lnR w="6350" cap="flat" cmpd="sng" algn="ctr">
+                      <a:solidFill>
+                        <a:srgbClr val="DDDDDD"/>
+                      </a:solidFill>
+                      <a:prstDash val="solid"/>
+                      <a:round/>
+                      <a:headEnd type="none" w="med" len="med"/>
+                      <a:tailEnd type="none" w="med" len="med"/>
+                    </a:lnR>
+                    <a:lnT w="6350" cap="flat" cmpd="sng" algn="ctr">
+                      <a:solidFill>
+                        <a:srgbClr val="DDDDDD"/>
+                      </a:solidFill>
+                      <a:prstDash val="solid"/>
+                      <a:round/>
+                      <a:headEnd type="none" w="med" len="med"/>
+                      <a:tailEnd type="none" w="med" len="med"/>
+                    </a:lnT>
+                    <a:lnB w="6350" cap="flat" cmpd="sng" algn="ctr">
+                      <a:solidFill>
+                        <a:srgbClr val="DDDDDD"/>
+                      </a:solidFill>
+                      <a:prstDash val="solid"/>
+                      <a:round/>
+                      <a:headEnd type="none" w="med" len="med"/>
+                      <a:tailEnd type="none" w="med" len="med"/>
+                    </a:lnB>
+                    <a:solidFill>
+                      <a:srgbClr val="FFFFFF"/>
+                    </a:solidFill>
+                  </a:tcPr>
+                </a:tc>
+                <a:tc>
+                  <a:txBody>
+                    <a:bodyPr/>
+                    <a:lstStyle/>
+                    <a:p>
+                      <a:pPr indent="0" marL="0">
+                        <a:buNone/>
+                      </a:pPr>
+                      <a:r>
+                        <a:rPr lang="en-US" sz="850" dirty="0">
+                          <a:solidFill>
+                            <a:srgbClr val="1F2933"/>
+                          </a:solidFill>
+                          <a:latin typeface="Arial" pitchFamily="34" charset="0"/>
+                          <a:ea typeface="Arial" pitchFamily="34" charset="-122"/>
+                          <a:cs typeface="Arial" pitchFamily="34" charset="-120"/>
+                        </a:rPr>
+                        <a:t>A와 같은 뜻. 느리게 뛸수록 커지기 쉬우니 A(비율)를 우선</a:t>
+                      </a:r>
+                      <a:endParaRPr lang="en-US" sz="850" dirty="0">
+                        <a:latin typeface="Arial" charset="0"/>
+                        <a:ea typeface="Arial" charset="0"/>
+                        <a:cs typeface="Arial" charset="0"/>
+                      </a:endParaRPr>
+                    </a:p>
+                  </a:txBody>
+                  <a:tcPr marL="45720" marR="45720" marT="45720" marB="45720" anchor="ctr">
+                    <a:lnL w="6350" cap="flat" cmpd="sng" algn="ctr">
+                      <a:solidFill>
+                        <a:srgbClr val="DDDDDD"/>
+                      </a:solidFill>
+                      <a:prstDash val="solid"/>
+                      <a:round/>
+                      <a:headEnd type="none" w="med" len="med"/>
+                      <a:tailEnd type="none" w="med" len="med"/>
+                    </a:lnL>
+                    <a:lnR w="6350" cap="flat" cmpd="sng" algn="ctr">
+                      <a:solidFill>
+                        <a:srgbClr val="DDDDDD"/>
+                      </a:solidFill>
+                      <a:prstDash val="solid"/>
+                      <a:round/>
+                      <a:headEnd type="none" w="med" len="med"/>
+                      <a:tailEnd type="none" w="med" len="med"/>
+                    </a:lnR>
+                    <a:lnT w="6350" cap="flat" cmpd="sng" algn="ctr">
+                      <a:solidFill>
+                        <a:srgbClr val="DDDDDD"/>
+                      </a:solidFill>
+                      <a:prstDash val="solid"/>
+                      <a:round/>
+                      <a:headEnd type="none" w="med" len="med"/>
+                      <a:tailEnd type="none" w="med" len="med"/>
+                    </a:lnT>
+                    <a:lnB w="6350" cap="flat" cmpd="sng" algn="ctr">
+                      <a:solidFill>
+                        <a:srgbClr val="DDDDDD"/>
+                      </a:solidFill>
+                      <a:prstDash val="solid"/>
+                      <a:round/>
+                      <a:headEnd type="none" w="med" len="med"/>
+                      <a:tailEnd type="none" w="med" len="med"/>
+                    </a:lnB>
+                    <a:solidFill>
+                      <a:srgbClr val="FFFFFF"/>
+                    </a:solidFill>
+                  </a:tcPr>
+                </a:tc>
+                <a:tc>
+                  <a:txBody>
+                    <a:bodyPr/>
+                    <a:lstStyle/>
+                    <a:p>
+                      <a:pPr indent="0" marL="0">
+                        <a:buNone/>
+                      </a:pPr>
+                      <a:r>
+                        <a:rPr lang="en-US" sz="850" dirty="0">
+                          <a:solidFill>
+                            <a:srgbClr val="1F2933"/>
+                          </a:solidFill>
+                          <a:latin typeface="Arial" pitchFamily="34" charset="0"/>
+                          <a:ea typeface="Arial" pitchFamily="34" charset="-122"/>
+                          <a:cs typeface="Arial" pitchFamily="34" charset="-120"/>
+                        </a:rPr>
+                        <a:t>C6 0.10 → 0.57, AR05 0.06 → 0.58 s. 두 세포주 모두 UT H에서 흔들림 증가</a:t>
+                      </a:r>
+                      <a:endParaRPr lang="en-US" sz="850" dirty="0">
+                        <a:latin typeface="Arial" charset="0"/>
+                        <a:ea typeface="Arial" charset="0"/>
+                        <a:cs typeface="Arial" charset="0"/>
+                      </a:endParaRPr>
+                    </a:p>
+                  </a:txBody>
+                  <a:tcPr marL="45720" marR="45720" marT="45720" marB="45720" anchor="ctr">
+                    <a:lnL w="6350" cap="flat" cmpd="sng" algn="ctr">
+                      <a:solidFill>
+                        <a:srgbClr val="DDDDDD"/>
+                      </a:solidFill>
+                      <a:prstDash val="solid"/>
+                      <a:round/>
+                      <a:headEnd type="none" w="med" len="med"/>
+                      <a:tailEnd type="none" w="med" len="med"/>
+                    </a:lnL>
+                    <a:lnR w="6350" cap="flat" cmpd="sng" algn="ctr">
+                      <a:solidFill>
+                        <a:srgbClr val="DDDDDD"/>
+                      </a:solidFill>
+                      <a:prstDash val="solid"/>
+                      <a:round/>
+                      <a:headEnd type="none" w="med" len="med"/>
+                      <a:tailEnd type="none" w="med" len="med"/>
+                    </a:lnR>
+                    <a:lnT w="6350" cap="flat" cmpd="sng" algn="ctr">
+                      <a:solidFill>
+                        <a:srgbClr val="DDDDDD"/>
+                      </a:solidFill>
+                      <a:prstDash val="solid"/>
+                      <a:round/>
+                      <a:headEnd type="none" w="med" len="med"/>
+                      <a:tailEnd type="none" w="med" len="med"/>
+                    </a:lnT>
+                    <a:lnB w="6350" cap="flat" cmpd="sng" algn="ctr">
+                      <a:solidFill>
+                        <a:srgbClr val="DDDDDD"/>
+                      </a:solidFill>
+                      <a:prstDash val="solid"/>
+                      <a:round/>
+                      <a:headEnd type="none" w="med" len="med"/>
+                      <a:tailEnd type="none" w="med" len="med"/>
+                    </a:lnB>
+                    <a:solidFill>
+                      <a:srgbClr val="FFFFFF"/>
+                    </a:solidFill>
+                  </a:tcPr>
+                </a:tc>
+              </a:tr>
+            </a:tbl>
+          </a:graphicData>
+        </a:graphic>
+      </p:graphicFrame>
+      <p:sp>
+        <p:nvSpPr>
+          <p:cNvPr id="5" name="Text 2"/>
+          <p:cNvSpPr txBox="1"/>
+          <p:nvPr/>
+        </p:nvSpPr>
+        <p:spPr>
+          <a:xfrm>
+            <a:off x="457200" y="4160520"/>
+            <a:ext cx="8229600" cy="548640"/>
+          </a:xfrm>
+          <a:prstGeom prst="rect">
+            <a:avLst/>
+          </a:prstGeom>
+          <a:noFill/>
+          <a:ln/>
+        </p:spPr>
+        <p:txBody>
+          <a:bodyPr wrap="square" lIns="0" tIns="0" rIns="0" bIns="0" rtlCol="0" anchor="ctr"/>
+          <a:lstStyle/>
+          <a:p>
+            <a:pPr indent="0" marL="0">
+              <a:buNone/>
+            </a:pPr>
+            <a:r>
+              <a:rPr lang="en-US" sz="1050" b="1" dirty="0">
+                <a:solidFill>
+                  <a:srgbClr val="1F2933"/>
+                </a:solidFill>
+                <a:latin typeface="Arial" pitchFamily="34" charset="0"/>
+                <a:ea typeface="Arial" pitchFamily="34" charset="-122"/>
+                <a:cs typeface="Arial" pitchFamily="34" charset="-120"/>
+              </a:rPr>
+              <a:t>주의: 박동수가 느려지면 간격 SD·시간 지표는 자연히 커집니다. '불규칙'은 CV(%)로, '느려짐'은 BPM으로 따로 말하세요. IBI CV 30 %대는 D30 이전 미성숙 단계에서도 흔한 값입니다.</a:t>
+            </a:r>
+            <a:endParaRPr lang="en-US" sz="1050" dirty="0"/>
+          </a:p>
+        </p:txBody>
+      </p:sp>
+      <p:sp>
+        <p:nvSpPr>
+          <p:cNvPr id="6" name="Text 3"/>
+          <p:cNvSpPr txBox="1"/>
+          <p:nvPr/>
+        </p:nvSpPr>
+        <p:spPr>
+          <a:xfrm>
+            <a:off x="457200" y="4800600"/>
+            <a:ext cx="8229600" cy="228600"/>
+          </a:xfrm>
+          <a:prstGeom prst="rect">
+            <a:avLst/>
+          </a:prstGeom>
+          <a:noFill/>
+          <a:ln/>
+        </p:spPr>
+        <p:txBody>
+          <a:bodyPr wrap="square" lIns="0" tIns="0" rIns="0" bIns="0" rtlCol="0" anchor="ctr"/>
+          <a:lstStyle/>
+          <a:p>
+            <a:pPr algn="r" indent="0" marL="0">
+              <a:buNone/>
+            </a:pPr>
+            <a:r>
+              <a:rPr lang="en-US" sz="800" dirty="0">
+                <a:solidFill>
+                  <a:srgbClr val="6B7280"/>
+                </a:solidFill>
+                <a:latin typeface="Arial" pitchFamily="34" charset="0"/>
+                <a:ea typeface="Arial" pitchFamily="34" charset="-122"/>
+                <a:cs typeface="Arial" pitchFamily="34" charset="-120"/>
+              </a:rPr>
+              <a:t>Cardiomyocyte Analyzer · 분석 프로토콜  13</a:t>
+            </a:r>
+            <a:endParaRPr lang="en-US" sz="800" dirty="0"/>
+          </a:p>
+        </p:txBody>
+      </p:sp>
+    </p:spTree>
+  </p:cSld>
+  <p:clrMapOvr>
+    <a:masterClrMapping/>
+  </p:clrMapOvr>
+</p:sld>
+</file>
+
+<file path=ppt/slides/slide14.xml><?xml version="1.0" encoding="utf-8"?>
+<p:sld xmlns:a="http://schemas.openxmlformats.org/drawingml/2006/main" xmlns:r="http://schemas.openxmlformats.org/officeDocument/2006/relationships" xmlns:p="http://schemas.openxmlformats.org/presentationml/2006/main">
+  <p:cSld name="Slide 14">
+    <p:bg>
+      <p:bgPr>
+        <a:solidFill>
+          <a:srgbClr val="FFFFFF"/>
+        </a:solidFill>
+      </p:bgPr>
+    </p:bg>
+    <p:spTree>
+      <p:nvGrpSpPr>
+        <p:cNvPr id="1" name=""/>
+        <p:cNvGrpSpPr/>
+        <p:nvPr/>
+      </p:nvGrpSpPr>
+      <p:grpSpPr>
+        <a:xfrm>
+          <a:off x="0" y="0"/>
+          <a:ext cx="0" cy="0"/>
+          <a:chOff x="0" y="0"/>
+          <a:chExt cx="0" cy="0"/>
+        </a:xfrm>
+      </p:grpSpPr>
+      <p:sp>
+        <p:nvSpPr>
+          <p:cNvPr id="2" name="Text 0"/>
+          <p:cNvSpPr txBox="1"/>
+          <p:nvPr/>
+        </p:nvSpPr>
+        <p:spPr>
+          <a:xfrm>
+            <a:off x="457200" y="274320"/>
+            <a:ext cx="8229600" cy="548640"/>
+          </a:xfrm>
+          <a:prstGeom prst="rect">
+            <a:avLst/>
+          </a:prstGeom>
+          <a:noFill/>
+          <a:ln/>
+        </p:spPr>
+        <p:txBody>
+          <a:bodyPr wrap="square" lIns="0" tIns="0" rIns="0" bIns="0" rtlCol="0" anchor="ctr"/>
+          <a:lstStyle/>
+          <a:p>
+            <a:pPr indent="0" marL="0">
+              <a:buNone/>
+            </a:pPr>
+            <a:r>
+              <a:rPr lang="en-US" sz="2600" b="1" dirty="0">
+                <a:solidFill>
+                  <a:srgbClr val="1F2933"/>
+                </a:solidFill>
+                <a:latin typeface="Arial" pitchFamily="34" charset="0"/>
+                <a:ea typeface="Arial" pitchFamily="34" charset="-122"/>
+                <a:cs typeface="Arial" pitchFamily="34" charset="-120"/>
+              </a:rPr>
+              <a:t>패널별 해석 ② 수축력·속도 (C, K, L, F)</a:t>
+            </a:r>
+            <a:endParaRPr lang="en-US" sz="2600" dirty="0"/>
+          </a:p>
+        </p:txBody>
+      </p:sp>
+      <p:sp>
+        <p:nvSpPr>
+          <p:cNvPr id="3" name="Text 1"/>
+          <p:cNvSpPr txBox="1"/>
+          <p:nvPr/>
+        </p:nvSpPr>
+        <p:spPr>
+          <a:xfrm>
+            <a:off x="457200" y="804672"/>
+            <a:ext cx="8229600" cy="320040"/>
+          </a:xfrm>
+          <a:prstGeom prst="rect">
+            <a:avLst/>
+          </a:prstGeom>
+          <a:noFill/>
+          <a:ln/>
+        </p:spPr>
+        <p:txBody>
+          <a:bodyPr wrap="square" lIns="0" tIns="0" rIns="0" bIns="0" rtlCol="0" anchor="ctr"/>
+          <a:lstStyle/>
+          <a:p>
+            <a:pPr indent="0" marL="0">
+              <a:buNone/>
+            </a:pPr>
+            <a:r>
+              <a:rPr lang="en-US" sz="1200" dirty="0">
+                <a:solidFill>
+                  <a:srgbClr val="6B7280"/>
+                </a:solidFill>
+                <a:latin typeface="Arial" pitchFamily="34" charset="0"/>
+                <a:ea typeface="Arial" pitchFamily="34" charset="-122"/>
+                <a:cs typeface="Arial" pitchFamily="34" charset="-120"/>
+              </a:rPr>
+              <a:t>얼마나 세게, 얼마나 빨리 움직이는가</a:t>
+            </a:r>
+            <a:endParaRPr lang="en-US" sz="1200" dirty="0"/>
+          </a:p>
+        </p:txBody>
+      </p:sp>
+      <p:graphicFrame>
+        <p:nvGraphicFramePr>
+          <p:cNvPr id="15" name="Table 0"/>
+          <p:cNvGraphicFramePr>
+            <a:graphicFrameLocks noGrp="1"/>
+          </p:cNvGraphicFramePr>
+          <p:nvPr>
+            <p:extLst>
+              <p:ext uri="{D42A27DB-BD31-4B8C-83A1-F6EECF244321}">
+                <p14:modId xmlns:p14="http://schemas.microsoft.com/office/powerpoint/2010/main" val="1579011935"/>
+              </p:ext>
+            </p:extLst>
+          </p:nvPr>
+        </p:nvGraphicFramePr>
+        <p:xfrm>
+          <a:off x="457200" y="1188720"/>
+          <a:ext cx="8229600" cy="914400"/>
+        </p:xfrm>
+        <a:graphic>
+          <a:graphicData uri="http://schemas.openxmlformats.org/drawingml/2006/table">
+            <a:tbl>
+              <a:tblPr/>
+              <a:tblGrid>
+                <a:gridCol w="1737360"/>
+                <a:gridCol w="2103120"/>
+                <a:gridCol w="2103120"/>
+                <a:gridCol w="2286000"/>
+              </a:tblGrid>
+              <a:tr h="566928">
+                <a:tc>
+                  <a:txBody>
+                    <a:bodyPr/>
+                    <a:lstStyle/>
+                    <a:p>
+                      <a:pPr indent="0" marL="0">
+                        <a:buNone/>
+                      </a:pPr>
+                      <a:r>
+                        <a:rPr lang="en-US" sz="850" b="1" dirty="0">
+                          <a:solidFill>
+                            <a:srgbClr val="FFFFFF"/>
+                          </a:solidFill>
+                          <a:latin typeface="Arial" pitchFamily="34" charset="0"/>
+                          <a:ea typeface="Arial" pitchFamily="34" charset="-122"/>
+                          <a:cs typeface="Arial" pitchFamily="34" charset="-120"/>
+                        </a:rPr>
+                        <a:t>패널 · 지표</a:t>
+                      </a:r>
+                      <a:endParaRPr lang="en-US" sz="850" dirty="0">
+                        <a:latin typeface="Arial" charset="0"/>
+                        <a:ea typeface="Arial" charset="0"/>
+                        <a:cs typeface="Arial" charset="0"/>
+                      </a:endParaRPr>
+                    </a:p>
+                  </a:txBody>
+                  <a:tcPr marL="45720" marR="45720" marT="45720" marB="45720" anchor="ctr">
+                    <a:lnL w="6350" cap="flat" cmpd="sng" algn="ctr">
+                      <a:solidFill>
+                        <a:srgbClr val="DDDDDD"/>
+                      </a:solidFill>
+                      <a:prstDash val="solid"/>
+                      <a:round/>
+                      <a:headEnd type="none" w="med" len="med"/>
+                      <a:tailEnd type="none" w="med" len="med"/>
+                    </a:lnL>
+                    <a:lnR w="6350" cap="flat" cmpd="sng" algn="ctr">
+                      <a:solidFill>
+                        <a:srgbClr val="DDDDDD"/>
+                      </a:solidFill>
+                      <a:prstDash val="solid"/>
+                      <a:round/>
+                      <a:headEnd type="none" w="med" len="med"/>
+                      <a:tailEnd type="none" w="med" len="med"/>
+                    </a:lnR>
+                    <a:lnT w="6350" cap="flat" cmpd="sng" algn="ctr">
+                      <a:solidFill>
+                        <a:srgbClr val="DDDDDD"/>
+                      </a:solidFill>
+                      <a:prstDash val="solid"/>
+                      <a:round/>
+                      <a:headEnd type="none" w="med" len="med"/>
+                      <a:tailEnd type="none" w="med" len="med"/>
+                    </a:lnT>
+                    <a:lnB w="6350" cap="flat" cmpd="sng" algn="ctr">
+                      <a:solidFill>
+                        <a:srgbClr val="DDDDDD"/>
+                      </a:solidFill>
+                      <a:prstDash val="solid"/>
+                      <a:round/>
+                      <a:headEnd type="none" w="med" len="med"/>
+                      <a:tailEnd type="none" w="med" len="med"/>
+                    </a:lnB>
+                    <a:solidFill>
+                      <a:srgbClr val="7A1F2B"/>
+                    </a:solidFill>
+                  </a:tcPr>
+                </a:tc>
+                <a:tc>
+                  <a:txBody>
+                    <a:bodyPr/>
+                    <a:lstStyle/>
+                    <a:p>
+                      <a:pPr indent="0" marL="0">
+                        <a:buNone/>
+                      </a:pPr>
+                      <a:r>
+                        <a:rPr lang="en-US" sz="850" b="1" dirty="0">
+                          <a:solidFill>
+                            <a:srgbClr val="FFFFFF"/>
+                          </a:solidFill>
+                          <a:latin typeface="Arial" pitchFamily="34" charset="0"/>
+                          <a:ea typeface="Arial" pitchFamily="34" charset="-122"/>
+                          <a:cs typeface="Arial" pitchFamily="34" charset="-120"/>
+                        </a:rPr>
+                        <a:t>무엇을 재나</a:t>
+                      </a:r>
+                      <a:endParaRPr lang="en-US" sz="850" dirty="0">
+                        <a:latin typeface="Arial" charset="0"/>
+                        <a:ea typeface="Arial" charset="0"/>
+                        <a:cs typeface="Arial" charset="0"/>
+                      </a:endParaRPr>
+                    </a:p>
+                  </a:txBody>
+                  <a:tcPr marL="45720" marR="45720" marT="45720" marB="45720" anchor="ctr">
+                    <a:lnL w="6350" cap="flat" cmpd="sng" algn="ctr">
+                      <a:solidFill>
+                        <a:srgbClr val="DDDDDD"/>
+                      </a:solidFill>
+                      <a:prstDash val="solid"/>
+                      <a:round/>
+                      <a:headEnd type="none" w="med" len="med"/>
+                      <a:tailEnd type="none" w="med" len="med"/>
+                    </a:lnL>
+                    <a:lnR w="6350" cap="flat" cmpd="sng" algn="ctr">
+                      <a:solidFill>
+                        <a:srgbClr val="DDDDDD"/>
+                      </a:solidFill>
+                      <a:prstDash val="solid"/>
+                      <a:round/>
+                      <a:headEnd type="none" w="med" len="med"/>
+                      <a:tailEnd type="none" w="med" len="med"/>
+                    </a:lnR>
+                    <a:lnT w="6350" cap="flat" cmpd="sng" algn="ctr">
+                      <a:solidFill>
+                        <a:srgbClr val="DDDDDD"/>
+                      </a:solidFill>
+                      <a:prstDash val="solid"/>
+                      <a:round/>
+                      <a:headEnd type="none" w="med" len="med"/>
+                      <a:tailEnd type="none" w="med" len="med"/>
+                    </a:lnT>
+                    <a:lnB w="6350" cap="flat" cmpd="sng" algn="ctr">
+                      <a:solidFill>
+                        <a:srgbClr val="DDDDDD"/>
+                      </a:solidFill>
+                      <a:prstDash val="solid"/>
+                      <a:round/>
+                      <a:headEnd type="none" w="med" len="med"/>
+                      <a:tailEnd type="none" w="med" len="med"/>
+                    </a:lnB>
+                    <a:solidFill>
+                      <a:srgbClr val="7A1F2B"/>
+                    </a:solidFill>
+                  </a:tcPr>
+                </a:tc>
+                <a:tc>
+                  <a:txBody>
+                    <a:bodyPr/>
+                    <a:lstStyle/>
+                    <a:p>
+                      <a:pPr indent="0" marL="0">
+                        <a:buNone/>
+                      </a:pPr>
+                      <a:r>
+                        <a:rPr lang="en-US" sz="850" b="1" dirty="0">
+                          <a:solidFill>
+                            <a:srgbClr val="FFFFFF"/>
+                          </a:solidFill>
+                          <a:latin typeface="Arial" pitchFamily="34" charset="0"/>
+                          <a:ea typeface="Arial" pitchFamily="34" charset="-122"/>
+                          <a:cs typeface="Arial" pitchFamily="34" charset="-120"/>
+                        </a:rPr>
+                        <a:t>값이 크면</a:t>
+                      </a:r>
+                      <a:endParaRPr lang="en-US" sz="850" dirty="0">
+                        <a:latin typeface="Arial" charset="0"/>
+                        <a:ea typeface="Arial" charset="0"/>
+                        <a:cs typeface="Arial" charset="0"/>
+                      </a:endParaRPr>
+                    </a:p>
+                  </a:txBody>
+                  <a:tcPr marL="45720" marR="45720" marT="45720" marB="45720" anchor="ctr">
+                    <a:lnL w="6350" cap="flat" cmpd="sng" algn="ctr">
+                      <a:solidFill>
+                        <a:srgbClr val="DDDDDD"/>
+                      </a:solidFill>
+                      <a:prstDash val="solid"/>
+                      <a:round/>
+                      <a:headEnd type="none" w="med" len="med"/>
+                      <a:tailEnd type="none" w="med" len="med"/>
+                    </a:lnL>
+                    <a:lnR w="6350" cap="flat" cmpd="sng" algn="ctr">
+                      <a:solidFill>
+                        <a:srgbClr val="DDDDDD"/>
+                      </a:solidFill>
+                      <a:prstDash val="solid"/>
+                      <a:round/>
+                      <a:headEnd type="none" w="med" len="med"/>
+                      <a:tailEnd type="none" w="med" len="med"/>
+                    </a:lnR>
+                    <a:lnT w="6350" cap="flat" cmpd="sng" algn="ctr">
+                      <a:solidFill>
+                        <a:srgbClr val="DDDDDD"/>
+                      </a:solidFill>
+                      <a:prstDash val="solid"/>
+                      <a:round/>
+                      <a:headEnd type="none" w="med" len="med"/>
+                      <a:tailEnd type="none" w="med" len="med"/>
+                    </a:lnT>
+                    <a:lnB w="6350" cap="flat" cmpd="sng" algn="ctr">
+                      <a:solidFill>
+                        <a:srgbClr val="DDDDDD"/>
+                      </a:solidFill>
+                      <a:prstDash val="solid"/>
+                      <a:round/>
+                      <a:headEnd type="none" w="med" len="med"/>
+                      <a:tailEnd type="none" w="med" len="med"/>
+                    </a:lnB>
+                    <a:solidFill>
+                      <a:srgbClr val="7A1F2B"/>
+                    </a:solidFill>
+                  </a:tcPr>
+                </a:tc>
+                <a:tc>
+                  <a:txBody>
+                    <a:bodyPr/>
+                    <a:lstStyle/>
+                    <a:p>
+                      <a:pPr indent="0" marL="0">
+                        <a:buNone/>
+                      </a:pPr>
+                      <a:r>
+                        <a:rPr lang="en-US" sz="850" b="1" dirty="0">
+                          <a:solidFill>
+                            <a:srgbClr val="FFFFFF"/>
+                          </a:solidFill>
+                          <a:latin typeface="Arial" pitchFamily="34" charset="0"/>
+                          <a:ea typeface="Arial" pitchFamily="34" charset="-122"/>
+                          <a:cs typeface="Arial" pitchFamily="34" charset="-120"/>
+                        </a:rPr>
+                        <a:t>이 데이터에서 (Vehicle → UT H)</a:t>
+                      </a:r>
+                      <a:endParaRPr lang="en-US" sz="850" dirty="0">
+                        <a:latin typeface="Arial" charset="0"/>
+                        <a:ea typeface="Arial" charset="0"/>
+                        <a:cs typeface="Arial" charset="0"/>
+                      </a:endParaRPr>
+                    </a:p>
+                  </a:txBody>
+                  <a:tcPr marL="45720" marR="45720" marT="45720" marB="45720" anchor="ctr">
+                    <a:lnL w="6350" cap="flat" cmpd="sng" algn="ctr">
+                      <a:solidFill>
+                        <a:srgbClr val="DDDDDD"/>
+                      </a:solidFill>
+                      <a:prstDash val="solid"/>
+                      <a:round/>
+                      <a:headEnd type="none" w="med" len="med"/>
+                      <a:tailEnd type="none" w="med" len="med"/>
+                    </a:lnL>
+                    <a:lnR w="6350" cap="flat" cmpd="sng" algn="ctr">
+                      <a:solidFill>
+                        <a:srgbClr val="DDDDDD"/>
+                      </a:solidFill>
+                      <a:prstDash val="solid"/>
+                      <a:round/>
+                      <a:headEnd type="none" w="med" len="med"/>
+                      <a:tailEnd type="none" w="med" len="med"/>
+                    </a:lnR>
+                    <a:lnT w="6350" cap="flat" cmpd="sng" algn="ctr">
+                      <a:solidFill>
+                        <a:srgbClr val="DDDDDD"/>
+                      </a:solidFill>
+                      <a:prstDash val="solid"/>
+                      <a:round/>
+                      <a:headEnd type="none" w="med" len="med"/>
+                      <a:tailEnd type="none" w="med" len="med"/>
+                    </a:lnT>
+                    <a:lnB w="6350" cap="flat" cmpd="sng" algn="ctr">
+                      <a:solidFill>
+                        <a:srgbClr val="DDDDDD"/>
+                      </a:solidFill>
+                      <a:prstDash val="solid"/>
+                      <a:round/>
+                      <a:headEnd type="none" w="med" len="med"/>
+                      <a:tailEnd type="none" w="med" len="med"/>
+                    </a:lnB>
+                    <a:solidFill>
+                      <a:srgbClr val="7A1F2B"/>
+                    </a:solidFill>
+                  </a:tcPr>
+                </a:tc>
+              </a:tr>
+              <a:tr h="566928">
+                <a:tc>
+                  <a:txBody>
+                    <a:bodyPr/>
+                    <a:lstStyle/>
+                    <a:p>
+                      <a:pPr indent="0" marL="0">
+                        <a:buNone/>
+                      </a:pPr>
+                      <a:r>
+                        <a:rPr lang="en-US" sz="850" b="1" dirty="0">
+                          <a:solidFill>
+                            <a:srgbClr val="1F2933"/>
+                          </a:solidFill>
+                          <a:latin typeface="Arial" pitchFamily="34" charset="0"/>
+                          <a:ea typeface="Arial" pitchFamily="34" charset="-122"/>
+                          <a:cs typeface="Arial" pitchFamily="34" charset="-120"/>
+                        </a:rPr>
+                        <a:t>K  Max. contraction speed (MCS)</a:t>
+                      </a:r>
+                      <a:endParaRPr lang="en-US" sz="850" dirty="0">
+                        <a:latin typeface="Arial" charset="0"/>
+                        <a:ea typeface="Arial" charset="0"/>
+                        <a:cs typeface="Arial" charset="0"/>
+                      </a:endParaRPr>
+                    </a:p>
+                  </a:txBody>
+                  <a:tcPr marL="45720" marR="45720" marT="45720" marB="45720" anchor="ctr">
+                    <a:lnL w="6350" cap="flat" cmpd="sng" algn="ctr">
+                      <a:solidFill>
+                        <a:srgbClr val="DDDDDD"/>
+                      </a:solidFill>
+                      <a:prstDash val="solid"/>
+                      <a:round/>
+                      <a:headEnd type="none" w="med" len="med"/>
+                      <a:tailEnd type="none" w="med" len="med"/>
+                    </a:lnL>
+                    <a:lnR w="6350" cap="flat" cmpd="sng" algn="ctr">
+                      <a:solidFill>
+                        <a:srgbClr val="DDDDDD"/>
+                      </a:solidFill>
+                      <a:prstDash val="solid"/>
+                      <a:round/>
+                      <a:headEnd type="none" w="med" len="med"/>
+                      <a:tailEnd type="none" w="med" len="med"/>
+                    </a:lnR>
+                    <a:lnT w="6350" cap="flat" cmpd="sng" algn="ctr">
+                      <a:solidFill>
+                        <a:srgbClr val="DDDDDD"/>
+                      </a:solidFill>
+                      <a:prstDash val="solid"/>
+                      <a:round/>
+                      <a:headEnd type="none" w="med" len="med"/>
+                      <a:tailEnd type="none" w="med" len="med"/>
+                    </a:lnT>
+                    <a:lnB w="6350" cap="flat" cmpd="sng" algn="ctr">
+                      <a:solidFill>
+                        <a:srgbClr val="DDDDDD"/>
+                      </a:solidFill>
+                      <a:prstDash val="solid"/>
+                      <a:round/>
+                      <a:headEnd type="none" w="med" len="med"/>
+                      <a:tailEnd type="none" w="med" len="med"/>
+                    </a:lnB>
+                    <a:solidFill>
+                      <a:srgbClr val="F3F4F6"/>
+                    </a:solidFill>
+                  </a:tcPr>
+                </a:tc>
+                <a:tc>
+                  <a:txBody>
+                    <a:bodyPr/>
+                    <a:lstStyle/>
+                    <a:p>
+                      <a:pPr indent="0" marL="0">
+                        <a:buNone/>
+                      </a:pPr>
+                      <a:r>
+                        <a:rPr lang="en-US" sz="850" dirty="0">
+                          <a:solidFill>
+                            <a:srgbClr val="1F2933"/>
+                          </a:solidFill>
+                          <a:latin typeface="Arial" pitchFamily="34" charset="0"/>
+                          <a:ea typeface="Arial" pitchFamily="34" charset="-122"/>
+                          <a:cs typeface="Arial" pitchFamily="34" charset="-120"/>
+                        </a:rPr>
+                        <a:t>수축파 봉우리 = 수축 중 가장 빠른 조직 속도 (박동 평균)</a:t>
+                      </a:r>
+                      <a:endParaRPr lang="en-US" sz="850" dirty="0">
+                        <a:latin typeface="Arial" charset="0"/>
+                        <a:ea typeface="Arial" charset="0"/>
+                        <a:cs typeface="Arial" charset="0"/>
+                      </a:endParaRPr>
+                    </a:p>
+                  </a:txBody>
+                  <a:tcPr marL="45720" marR="45720" marT="45720" marB="45720" anchor="ctr">
+                    <a:lnL w="6350" cap="flat" cmpd="sng" algn="ctr">
+                      <a:solidFill>
+                        <a:srgbClr val="DDDDDD"/>
+                      </a:solidFill>
+                      <a:prstDash val="solid"/>
+                      <a:round/>
+                      <a:headEnd type="none" w="med" len="med"/>
+                      <a:tailEnd type="none" w="med" len="med"/>
+                    </a:lnL>
+                    <a:lnR w="6350" cap="flat" cmpd="sng" algn="ctr">
+                      <a:solidFill>
+                        <a:srgbClr val="DDDDDD"/>
+                      </a:solidFill>
+                      <a:prstDash val="solid"/>
+                      <a:round/>
+                      <a:headEnd type="none" w="med" len="med"/>
+                      <a:tailEnd type="none" w="med" len="med"/>
+                    </a:lnR>
+                    <a:lnT w="6350" cap="flat" cmpd="sng" algn="ctr">
+                      <a:solidFill>
+                        <a:srgbClr val="DDDDDD"/>
+                      </a:solidFill>
+                      <a:prstDash val="solid"/>
+                      <a:round/>
+                      <a:headEnd type="none" w="med" len="med"/>
+                      <a:tailEnd type="none" w="med" len="med"/>
+                    </a:lnT>
+                    <a:lnB w="6350" cap="flat" cmpd="sng" algn="ctr">
+                      <a:solidFill>
+                        <a:srgbClr val="DDDDDD"/>
+                      </a:solidFill>
+                      <a:prstDash val="solid"/>
+                      <a:round/>
+                      <a:headEnd type="none" w="med" len="med"/>
+                      <a:tailEnd type="none" w="med" len="med"/>
+                    </a:lnB>
+                    <a:solidFill>
+                      <a:srgbClr val="F3F4F6"/>
+                    </a:solidFill>
+                  </a:tcPr>
+                </a:tc>
+                <a:tc>
+                  <a:txBody>
+                    <a:bodyPr/>
+                    <a:lstStyle/>
+                    <a:p>
+                      <a:pPr indent="0" marL="0">
+                        <a:buNone/>
+                      </a:pPr>
+                      <a:r>
+                        <a:rPr lang="en-US" sz="850" dirty="0">
+                          <a:solidFill>
+                            <a:srgbClr val="1F2933"/>
+                          </a:solidFill>
+                          <a:latin typeface="Arial" pitchFamily="34" charset="0"/>
+                          <a:ea typeface="Arial" pitchFamily="34" charset="-122"/>
+                          <a:cs typeface="Arial" pitchFamily="34" charset="-120"/>
+                        </a:rPr>
+                        <a:t>세고 빠른 수축 (양성 변력). 수축력의 대표 지표</a:t>
+                      </a:r>
+                      <a:endParaRPr lang="en-US" sz="850" dirty="0">
+                        <a:latin typeface="Arial" charset="0"/>
+                        <a:ea typeface="Arial" charset="0"/>
+                        <a:cs typeface="Arial" charset="0"/>
+                      </a:endParaRPr>
+                    </a:p>
+                  </a:txBody>
+                  <a:tcPr marL="45720" marR="45720" marT="45720" marB="45720" anchor="ctr">
+                    <a:lnL w="6350" cap="flat" cmpd="sng" algn="ctr">
+                      <a:solidFill>
+                        <a:srgbClr val="DDDDDD"/>
+                      </a:solidFill>
+                      <a:prstDash val="solid"/>
+                      <a:round/>
+                      <a:headEnd type="none" w="med" len="med"/>
+                      <a:tailEnd type="none" w="med" len="med"/>
+                    </a:lnL>
+                    <a:lnR w="6350" cap="flat" cmpd="sng" algn="ctr">
+                      <a:solidFill>
+                        <a:srgbClr val="DDDDDD"/>
+                      </a:solidFill>
+                      <a:prstDash val="solid"/>
+                      <a:round/>
+                      <a:headEnd type="none" w="med" len="med"/>
+                      <a:tailEnd type="none" w="med" len="med"/>
+                    </a:lnR>
+                    <a:lnT w="6350" cap="flat" cmpd="sng" algn="ctr">
+                      <a:solidFill>
+                        <a:srgbClr val="DDDDDD"/>
+                      </a:solidFill>
+                      <a:prstDash val="solid"/>
+                      <a:round/>
+                      <a:headEnd type="none" w="med" len="med"/>
+                      <a:tailEnd type="none" w="med" len="med"/>
+                    </a:lnT>
+                    <a:lnB w="6350" cap="flat" cmpd="sng" algn="ctr">
+                      <a:solidFill>
+                        <a:srgbClr val="DDDDDD"/>
+                      </a:solidFill>
+                      <a:prstDash val="solid"/>
+                      <a:round/>
+                      <a:headEnd type="none" w="med" len="med"/>
+                      <a:tailEnd type="none" w="med" len="med"/>
+                    </a:lnB>
+                    <a:solidFill>
+                      <a:srgbClr val="F3F4F6"/>
+                    </a:solidFill>
+                  </a:tcPr>
+                </a:tc>
+                <a:tc>
+                  <a:txBody>
+                    <a:bodyPr/>
+                    <a:lstStyle/>
+                    <a:p>
+                      <a:pPr indent="0" marL="0">
+                        <a:buNone/>
+                      </a:pPr>
+                      <a:r>
+                        <a:rPr lang="en-US" sz="850" dirty="0">
+                          <a:solidFill>
+                            <a:srgbClr val="1F2933"/>
+                          </a:solidFill>
+                          <a:latin typeface="Arial" pitchFamily="34" charset="0"/>
+                          <a:ea typeface="Arial" pitchFamily="34" charset="-122"/>
+                          <a:cs typeface="Arial" pitchFamily="34" charset="-120"/>
+                        </a:rPr>
+                        <a:t>C6 10.2 → 3.0, AR05 10.9 → 6.8 px/s. UT H에서 수축 속도 30–70 % 감소 → 수축력 저하</a:t>
+                      </a:r>
+                      <a:endParaRPr lang="en-US" sz="850" dirty="0">
+                        <a:latin typeface="Arial" charset="0"/>
+                        <a:ea typeface="Arial" charset="0"/>
+                        <a:cs typeface="Arial" charset="0"/>
+                      </a:endParaRPr>
+                    </a:p>
+                  </a:txBody>
+                  <a:tcPr marL="45720" marR="45720" marT="45720" marB="45720" anchor="ctr">
+                    <a:lnL w="6350" cap="flat" cmpd="sng" algn="ctr">
+                      <a:solidFill>
+                        <a:srgbClr val="DDDDDD"/>
+                      </a:solidFill>
+                      <a:prstDash val="solid"/>
+                      <a:round/>
+                      <a:headEnd type="none" w="med" len="med"/>
+                      <a:tailEnd type="none" w="med" len="med"/>
+                    </a:lnL>
+                    <a:lnR w="6350" cap="flat" cmpd="sng" algn="ctr">
+                      <a:solidFill>
+                        <a:srgbClr val="DDDDDD"/>
+                      </a:solidFill>
+                      <a:prstDash val="solid"/>
+                      <a:round/>
+                      <a:headEnd type="none" w="med" len="med"/>
+                      <a:tailEnd type="none" w="med" len="med"/>
+                    </a:lnR>
+                    <a:lnT w="6350" cap="flat" cmpd="sng" algn="ctr">
+                      <a:solidFill>
+                        <a:srgbClr val="DDDDDD"/>
+                      </a:solidFill>
+                      <a:prstDash val="solid"/>
+                      <a:round/>
+                      <a:headEnd type="none" w="med" len="med"/>
+                      <a:tailEnd type="none" w="med" len="med"/>
+                    </a:lnT>
+                    <a:lnB w="6350" cap="flat" cmpd="sng" algn="ctr">
+                      <a:solidFill>
+                        <a:srgbClr val="DDDDDD"/>
+                      </a:solidFill>
+                      <a:prstDash val="solid"/>
+                      <a:round/>
+                      <a:headEnd type="none" w="med" len="med"/>
+                      <a:tailEnd type="none" w="med" len="med"/>
+                    </a:lnB>
+                    <a:solidFill>
+                      <a:srgbClr val="F3F4F6"/>
+                    </a:solidFill>
+                  </a:tcPr>
+                </a:tc>
+              </a:tr>
+              <a:tr h="566928">
+                <a:tc>
+                  <a:txBody>
+                    <a:bodyPr/>
+                    <a:lstStyle/>
+                    <a:p>
+                      <a:pPr indent="0" marL="0">
+                        <a:buNone/>
+                      </a:pPr>
+                      <a:r>
+                        <a:rPr lang="en-US" sz="850" b="1" dirty="0">
+                          <a:solidFill>
+                            <a:srgbClr val="1F2933"/>
+                          </a:solidFill>
+                          <a:latin typeface="Arial" pitchFamily="34" charset="0"/>
+                          <a:ea typeface="Arial" pitchFamily="34" charset="-122"/>
+                          <a:cs typeface="Arial" pitchFamily="34" charset="-120"/>
+                        </a:rPr>
+                        <a:t>C  Peak MCS</a:t>
+                      </a:r>
+                      <a:endParaRPr lang="en-US" sz="850" dirty="0">
+                        <a:latin typeface="Arial" charset="0"/>
+                        <a:ea typeface="Arial" charset="0"/>
+                        <a:cs typeface="Arial" charset="0"/>
+                      </a:endParaRPr>
+                    </a:p>
+                  </a:txBody>
+                  <a:tcPr marL="45720" marR="45720" marT="45720" marB="45720" anchor="ctr">
+                    <a:lnL w="6350" cap="flat" cmpd="sng" algn="ctr">
+                      <a:solidFill>
+                        <a:srgbClr val="DDDDDD"/>
+                      </a:solidFill>
+                      <a:prstDash val="solid"/>
+                      <a:round/>
+                      <a:headEnd type="none" w="med" len="med"/>
+                      <a:tailEnd type="none" w="med" len="med"/>
+                    </a:lnL>
+                    <a:lnR w="6350" cap="flat" cmpd="sng" algn="ctr">
+                      <a:solidFill>
+                        <a:srgbClr val="DDDDDD"/>
+                      </a:solidFill>
+                      <a:prstDash val="solid"/>
+                      <a:round/>
+                      <a:headEnd type="none" w="med" len="med"/>
+                      <a:tailEnd type="none" w="med" len="med"/>
+                    </a:lnR>
+                    <a:lnT w="6350" cap="flat" cmpd="sng" algn="ctr">
+                      <a:solidFill>
+                        <a:srgbClr val="DDDDDD"/>
+                      </a:solidFill>
+                      <a:prstDash val="solid"/>
+                      <a:round/>
+                      <a:headEnd type="none" w="med" len="med"/>
+                      <a:tailEnd type="none" w="med" len="med"/>
+                    </a:lnT>
+                    <a:lnB w="6350" cap="flat" cmpd="sng" algn="ctr">
+                      <a:solidFill>
+                        <a:srgbClr val="DDDDDD"/>
+                      </a:solidFill>
+                      <a:prstDash val="solid"/>
+                      <a:round/>
+                      <a:headEnd type="none" w="med" len="med"/>
+                      <a:tailEnd type="none" w="med" len="med"/>
+                    </a:lnB>
+                    <a:solidFill>
+                      <a:srgbClr val="FFFFFF"/>
+                    </a:solidFill>
+                  </a:tcPr>
+                </a:tc>
+                <a:tc>
+                  <a:txBody>
+                    <a:bodyPr/>
+                    <a:lstStyle/>
+                    <a:p>
+                      <a:pPr indent="0" marL="0">
+                        <a:buNone/>
+                      </a:pPr>
+                      <a:r>
+                        <a:rPr lang="en-US" sz="850" dirty="0">
+                          <a:solidFill>
+                            <a:srgbClr val="1F2933"/>
+                          </a:solidFill>
+                          <a:latin typeface="Arial" pitchFamily="34" charset="0"/>
+                          <a:ea typeface="Arial" pitchFamily="34" charset="-122"/>
+                          <a:cs typeface="Arial" pitchFamily="34" charset="-120"/>
+                        </a:rPr>
+                        <a:t>영상 안 박동 중 가장 큰 MCS 하나 (최댓값)</a:t>
+                      </a:r>
+                      <a:endParaRPr lang="en-US" sz="850" dirty="0">
+                        <a:latin typeface="Arial" charset="0"/>
+                        <a:ea typeface="Arial" charset="0"/>
+                        <a:cs typeface="Arial" charset="0"/>
+                      </a:endParaRPr>
+                    </a:p>
+                  </a:txBody>
+                  <a:tcPr marL="45720" marR="45720" marT="45720" marB="45720" anchor="ctr">
+                    <a:lnL w="6350" cap="flat" cmpd="sng" algn="ctr">
+                      <a:solidFill>
+                        <a:srgbClr val="DDDDDD"/>
+                      </a:solidFill>
+                      <a:prstDash val="solid"/>
+                      <a:round/>
+                      <a:headEnd type="none" w="med" len="med"/>
+                      <a:tailEnd type="none" w="med" len="med"/>
+                    </a:lnL>
+                    <a:lnR w="6350" cap="flat" cmpd="sng" algn="ctr">
+                      <a:solidFill>
+                        <a:srgbClr val="DDDDDD"/>
+                      </a:solidFill>
+                      <a:prstDash val="solid"/>
+                      <a:round/>
+                      <a:headEnd type="none" w="med" len="med"/>
+                      <a:tailEnd type="none" w="med" len="med"/>
+                    </a:lnR>
+                    <a:lnT w="6350" cap="flat" cmpd="sng" algn="ctr">
+                      <a:solidFill>
+                        <a:srgbClr val="DDDDDD"/>
+                      </a:solidFill>
+                      <a:prstDash val="solid"/>
+                      <a:round/>
+                      <a:headEnd type="none" w="med" len="med"/>
+                      <a:tailEnd type="none" w="med" len="med"/>
+                    </a:lnT>
+                    <a:lnB w="6350" cap="flat" cmpd="sng" algn="ctr">
+                      <a:solidFill>
+                        <a:srgbClr val="DDDDDD"/>
+                      </a:solidFill>
+                      <a:prstDash val="solid"/>
+                      <a:round/>
+                      <a:headEnd type="none" w="med" len="med"/>
+                      <a:tailEnd type="none" w="med" len="med"/>
+                    </a:lnB>
+                    <a:solidFill>
+                      <a:srgbClr val="FFFFFF"/>
+                    </a:solidFill>
+                  </a:tcPr>
+                </a:tc>
+                <a:tc>
+                  <a:txBody>
+                    <a:bodyPr/>
+                    <a:lstStyle/>
+                    <a:p>
+                      <a:pPr indent="0" marL="0">
+                        <a:buNone/>
+                      </a:pPr>
+                      <a:r>
+                        <a:rPr lang="en-US" sz="850" dirty="0">
+                          <a:solidFill>
+                            <a:srgbClr val="1F2933"/>
+                          </a:solidFill>
+                          <a:latin typeface="Arial" pitchFamily="34" charset="0"/>
+                          <a:ea typeface="Arial" pitchFamily="34" charset="-122"/>
+                          <a:cs typeface="Arial" pitchFamily="34" charset="-120"/>
+                        </a:rPr>
+                        <a:t>K와 같은 방향. 평균보다 이상치에 민감</a:t>
+                      </a:r>
+                      <a:endParaRPr lang="en-US" sz="850" dirty="0">
+                        <a:latin typeface="Arial" charset="0"/>
+                        <a:ea typeface="Arial" charset="0"/>
+                        <a:cs typeface="Arial" charset="0"/>
+                      </a:endParaRPr>
+                    </a:p>
+                  </a:txBody>
+                  <a:tcPr marL="45720" marR="45720" marT="45720" marB="45720" anchor="ctr">
+                    <a:lnL w="6350" cap="flat" cmpd="sng" algn="ctr">
+                      <a:solidFill>
+                        <a:srgbClr val="DDDDDD"/>
+                      </a:solidFill>
+                      <a:prstDash val="solid"/>
+                      <a:round/>
+                      <a:headEnd type="none" w="med" len="med"/>
+                      <a:tailEnd type="none" w="med" len="med"/>
+                    </a:lnL>
+                    <a:lnR w="6350" cap="flat" cmpd="sng" algn="ctr">
+                      <a:solidFill>
+                        <a:srgbClr val="DDDDDD"/>
+                      </a:solidFill>
+                      <a:prstDash val="solid"/>
+                      <a:round/>
+                      <a:headEnd type="none" w="med" len="med"/>
+                      <a:tailEnd type="none" w="med" len="med"/>
+                    </a:lnR>
+                    <a:lnT w="6350" cap="flat" cmpd="sng" algn="ctr">
+                      <a:solidFill>
+                        <a:srgbClr val="DDDDDD"/>
+                      </a:solidFill>
+                      <a:prstDash val="solid"/>
+                      <a:round/>
+                      <a:headEnd type="none" w="med" len="med"/>
+                      <a:tailEnd type="none" w="med" len="med"/>
+                    </a:lnT>
+                    <a:lnB w="6350" cap="flat" cmpd="sng" algn="ctr">
+                      <a:solidFill>
+                        <a:srgbClr val="DDDDDD"/>
+                      </a:solidFill>
+                      <a:prstDash val="solid"/>
+                      <a:round/>
+                      <a:headEnd type="none" w="med" len="med"/>
+                      <a:tailEnd type="none" w="med" len="med"/>
+                    </a:lnB>
+                    <a:solidFill>
+                      <a:srgbClr val="FFFFFF"/>
+                    </a:solidFill>
+                  </a:tcPr>
+                </a:tc>
+                <a:tc>
+                  <a:txBody>
+                    <a:bodyPr/>
+                    <a:lstStyle/>
+                    <a:p>
+                      <a:pPr indent="0" marL="0">
+                        <a:buNone/>
+                      </a:pPr>
+                      <a:r>
+                        <a:rPr lang="en-US" sz="850" dirty="0">
+                          <a:solidFill>
+                            <a:srgbClr val="1F2933"/>
+                          </a:solidFill>
+                          <a:latin typeface="Arial" pitchFamily="34" charset="0"/>
+                          <a:ea typeface="Arial" pitchFamily="34" charset="-122"/>
+                          <a:cs typeface="Arial" pitchFamily="34" charset="-120"/>
+                        </a:rPr>
+                        <a:t>C6 13 → 5.7, AR05 12 → 8.2. K와 같은 결론 (재확인용)</a:t>
+                      </a:r>
+                      <a:endParaRPr lang="en-US" sz="850" dirty="0">
+                        <a:latin typeface="Arial" charset="0"/>
+                        <a:ea typeface="Arial" charset="0"/>
+                        <a:cs typeface="Arial" charset="0"/>
+                      </a:endParaRPr>
+                    </a:p>
+                  </a:txBody>
+                  <a:tcPr marL="45720" marR="45720" marT="45720" marB="45720" anchor="ctr">
+                    <a:lnL w="6350" cap="flat" cmpd="sng" algn="ctr">
+                      <a:solidFill>
+                        <a:srgbClr val="DDDDDD"/>
+                      </a:solidFill>
+                      <a:prstDash val="solid"/>
+                      <a:round/>
+                      <a:headEnd type="none" w="med" len="med"/>
+                      <a:tailEnd type="none" w="med" len="med"/>
+                    </a:lnL>
+                    <a:lnR w="6350" cap="flat" cmpd="sng" algn="ctr">
+                      <a:solidFill>
+                        <a:srgbClr val="DDDDDD"/>
+                      </a:solidFill>
+                      <a:prstDash val="solid"/>
+                      <a:round/>
+                      <a:headEnd type="none" w="med" len="med"/>
+                      <a:tailEnd type="none" w="med" len="med"/>
+                    </a:lnR>
+                    <a:lnT w="6350" cap="flat" cmpd="sng" algn="ctr">
+                      <a:solidFill>
+                        <a:srgbClr val="DDDDDD"/>
+                      </a:solidFill>
+                      <a:prstDash val="solid"/>
+                      <a:round/>
+                      <a:headEnd type="none" w="med" len="med"/>
+                      <a:tailEnd type="none" w="med" len="med"/>
+                    </a:lnT>
+                    <a:lnB w="6350" cap="flat" cmpd="sng" algn="ctr">
+                      <a:solidFill>
+                        <a:srgbClr val="DDDDDD"/>
+                      </a:solidFill>
+                      <a:prstDash val="solid"/>
+                      <a:round/>
+                      <a:headEnd type="none" w="med" len="med"/>
+                      <a:tailEnd type="none" w="med" len="med"/>
+                    </a:lnB>
+                    <a:solidFill>
+                      <a:srgbClr val="FFFFFF"/>
+                    </a:solidFill>
+                  </a:tcPr>
+                </a:tc>
+              </a:tr>
+              <a:tr h="566928">
+                <a:tc>
+                  <a:txBody>
+                    <a:bodyPr/>
+                    <a:lstStyle/>
+                    <a:p>
+                      <a:pPr indent="0" marL="0">
+                        <a:buNone/>
+                      </a:pPr>
+                      <a:r>
+                        <a:rPr lang="en-US" sz="850" b="1" dirty="0">
+                          <a:solidFill>
+                            <a:srgbClr val="1F2933"/>
+                          </a:solidFill>
+                          <a:latin typeface="Arial" pitchFamily="34" charset="0"/>
+                          <a:ea typeface="Arial" pitchFamily="34" charset="-122"/>
+                          <a:cs typeface="Arial" pitchFamily="34" charset="-120"/>
+                        </a:rPr>
+                        <a:t>L  Max. relaxation speed (MRS)</a:t>
+                      </a:r>
+                      <a:endParaRPr lang="en-US" sz="850" dirty="0">
+                        <a:latin typeface="Arial" charset="0"/>
+                        <a:ea typeface="Arial" charset="0"/>
+                        <a:cs typeface="Arial" charset="0"/>
+                      </a:endParaRPr>
+                    </a:p>
+                  </a:txBody>
+                  <a:tcPr marL="45720" marR="45720" marT="45720" marB="45720" anchor="ctr">
+                    <a:lnL w="6350" cap="flat" cmpd="sng" algn="ctr">
+                      <a:solidFill>
+                        <a:srgbClr val="DDDDDD"/>
+                      </a:solidFill>
+                      <a:prstDash val="solid"/>
+                      <a:round/>
+                      <a:headEnd type="none" w="med" len="med"/>
+                      <a:tailEnd type="none" w="med" len="med"/>
+                    </a:lnL>
+                    <a:lnR w="6350" cap="flat" cmpd="sng" algn="ctr">
+                      <a:solidFill>
+                        <a:srgbClr val="DDDDDD"/>
+                      </a:solidFill>
+                      <a:prstDash val="solid"/>
+                      <a:round/>
+                      <a:headEnd type="none" w="med" len="med"/>
+                      <a:tailEnd type="none" w="med" len="med"/>
+                    </a:lnR>
+                    <a:lnT w="6350" cap="flat" cmpd="sng" algn="ctr">
+                      <a:solidFill>
+                        <a:srgbClr val="DDDDDD"/>
+                      </a:solidFill>
+                      <a:prstDash val="solid"/>
+                      <a:round/>
+                      <a:headEnd type="none" w="med" len="med"/>
+                      <a:tailEnd type="none" w="med" len="med"/>
+                    </a:lnT>
+                    <a:lnB w="6350" cap="flat" cmpd="sng" algn="ctr">
+                      <a:solidFill>
+                        <a:srgbClr val="DDDDDD"/>
+                      </a:solidFill>
+                      <a:prstDash val="solid"/>
+                      <a:round/>
+                      <a:headEnd type="none" w="med" len="med"/>
+                      <a:tailEnd type="none" w="med" len="med"/>
+                    </a:lnB>
+                    <a:solidFill>
+                      <a:srgbClr val="F3F4F6"/>
+                    </a:solidFill>
+                  </a:tcPr>
+                </a:tc>
+                <a:tc>
+                  <a:txBody>
+                    <a:bodyPr/>
+                    <a:lstStyle/>
+                    <a:p>
+                      <a:pPr indent="0" marL="0">
+                        <a:buNone/>
+                      </a:pPr>
+                      <a:r>
+                        <a:rPr lang="en-US" sz="850" dirty="0">
+                          <a:solidFill>
+                            <a:srgbClr val="1F2933"/>
+                          </a:solidFill>
+                          <a:latin typeface="Arial" pitchFamily="34" charset="0"/>
+                          <a:ea typeface="Arial" pitchFamily="34" charset="-122"/>
+                          <a:cs typeface="Arial" pitchFamily="34" charset="-120"/>
+                        </a:rPr>
+                        <a:t>이완파 봉우리 = 이완 중 가장 빠른 속도</a:t>
+                      </a:r>
+                      <a:endParaRPr lang="en-US" sz="850" dirty="0">
+                        <a:latin typeface="Arial" charset="0"/>
+                        <a:ea typeface="Arial" charset="0"/>
+                        <a:cs typeface="Arial" charset="0"/>
+                      </a:endParaRPr>
+                    </a:p>
+                  </a:txBody>
+                  <a:tcPr marL="45720" marR="45720" marT="45720" marB="45720" anchor="ctr">
+                    <a:lnL w="6350" cap="flat" cmpd="sng" algn="ctr">
+                      <a:solidFill>
+                        <a:srgbClr val="DDDDDD"/>
+                      </a:solidFill>
+                      <a:prstDash val="solid"/>
+                      <a:round/>
+                      <a:headEnd type="none" w="med" len="med"/>
+                      <a:tailEnd type="none" w="med" len="med"/>
+                    </a:lnL>
+                    <a:lnR w="6350" cap="flat" cmpd="sng" algn="ctr">
+                      <a:solidFill>
+                        <a:srgbClr val="DDDDDD"/>
+                      </a:solidFill>
+                      <a:prstDash val="solid"/>
+                      <a:round/>
+                      <a:headEnd type="none" w="med" len="med"/>
+                      <a:tailEnd type="none" w="med" len="med"/>
+                    </a:lnR>
+                    <a:lnT w="6350" cap="flat" cmpd="sng" algn="ctr">
+                      <a:solidFill>
+                        <a:srgbClr val="DDDDDD"/>
+                      </a:solidFill>
+                      <a:prstDash val="solid"/>
+                      <a:round/>
+                      <a:headEnd type="none" w="med" len="med"/>
+                      <a:tailEnd type="none" w="med" len="med"/>
+                    </a:lnT>
+                    <a:lnB w="6350" cap="flat" cmpd="sng" algn="ctr">
+                      <a:solidFill>
+                        <a:srgbClr val="DDDDDD"/>
+                      </a:solidFill>
+                      <a:prstDash val="solid"/>
+                      <a:round/>
+                      <a:headEnd type="none" w="med" len="med"/>
+                      <a:tailEnd type="none" w="med" len="med"/>
+                    </a:lnB>
+                    <a:solidFill>
+                      <a:srgbClr val="F3F4F6"/>
+                    </a:solidFill>
+                  </a:tcPr>
+                </a:tc>
+                <a:tc>
+                  <a:txBody>
+                    <a:bodyPr/>
+                    <a:lstStyle/>
+                    <a:p>
+                      <a:pPr indent="0" marL="0">
+                        <a:buNone/>
+                      </a:pPr>
+                      <a:r>
+                        <a:rPr lang="en-US" sz="850" dirty="0">
+                          <a:solidFill>
+                            <a:srgbClr val="1F2933"/>
+                          </a:solidFill>
+                          <a:latin typeface="Arial" pitchFamily="34" charset="0"/>
+                          <a:ea typeface="Arial" pitchFamily="34" charset="-122"/>
+                          <a:cs typeface="Arial" pitchFamily="34" charset="-120"/>
+                        </a:rPr>
+                        <a:t>빠른 이완 (SERCA·칼슘 제거가 원활). MCS만 떨어지면 수축, MRS만 떨어지면 이완 문제</a:t>
+                      </a:r>
+                      <a:endParaRPr lang="en-US" sz="850" dirty="0">
+                        <a:latin typeface="Arial" charset="0"/>
+                        <a:ea typeface="Arial" charset="0"/>
+                        <a:cs typeface="Arial" charset="0"/>
+                      </a:endParaRPr>
+                    </a:p>
+                  </a:txBody>
+                  <a:tcPr marL="45720" marR="45720" marT="45720" marB="45720" anchor="ctr">
+                    <a:lnL w="6350" cap="flat" cmpd="sng" algn="ctr">
+                      <a:solidFill>
+                        <a:srgbClr val="DDDDDD"/>
+                      </a:solidFill>
+                      <a:prstDash val="solid"/>
+                      <a:round/>
+                      <a:headEnd type="none" w="med" len="med"/>
+                      <a:tailEnd type="none" w="med" len="med"/>
+                    </a:lnL>
+                    <a:lnR w="6350" cap="flat" cmpd="sng" algn="ctr">
+                      <a:solidFill>
+                        <a:srgbClr val="DDDDDD"/>
+                      </a:solidFill>
+                      <a:prstDash val="solid"/>
+                      <a:round/>
+                      <a:headEnd type="none" w="med" len="med"/>
+                      <a:tailEnd type="none" w="med" len="med"/>
+                    </a:lnR>
+                    <a:lnT w="6350" cap="flat" cmpd="sng" algn="ctr">
+                      <a:solidFill>
+                        <a:srgbClr val="DDDDDD"/>
+                      </a:solidFill>
+                      <a:prstDash val="solid"/>
+                      <a:round/>
+                      <a:headEnd type="none" w="med" len="med"/>
+                      <a:tailEnd type="none" w="med" len="med"/>
+                    </a:lnT>
+                    <a:lnB w="6350" cap="flat" cmpd="sng" algn="ctr">
+                      <a:solidFill>
+                        <a:srgbClr val="DDDDDD"/>
+                      </a:solidFill>
+                      <a:prstDash val="solid"/>
+                      <a:round/>
+                      <a:headEnd type="none" w="med" len="med"/>
+                      <a:tailEnd type="none" w="med" len="med"/>
+                    </a:lnB>
+                    <a:solidFill>
+                      <a:srgbClr val="F3F4F6"/>
+                    </a:solidFill>
+                  </a:tcPr>
+                </a:tc>
+                <a:tc>
+                  <a:txBody>
+                    <a:bodyPr/>
+                    <a:lstStyle/>
+                    <a:p>
+                      <a:pPr indent="0" marL="0">
+                        <a:buNone/>
+                      </a:pPr>
+                      <a:r>
+                        <a:rPr lang="en-US" sz="850" dirty="0">
+                          <a:solidFill>
+                            <a:srgbClr val="1F2933"/>
+                          </a:solidFill>
+                          <a:latin typeface="Arial" pitchFamily="34" charset="0"/>
+                          <a:ea typeface="Arial" pitchFamily="34" charset="-122"/>
+                          <a:cs typeface="Arial" pitchFamily="34" charset="-120"/>
+                        </a:rPr>
+                        <a:t>C6 9.5 → 2.3, AR05 7.7 → 2.9 px/s. 이완도 크게 느려짐 → 수축·이완 모두 억제</a:t>
+                      </a:r>
+                      <a:endParaRPr lang="en-US" sz="850" dirty="0">
+                        <a:latin typeface="Arial" charset="0"/>
+                        <a:ea typeface="Arial" charset="0"/>
+                        <a:cs typeface="Arial" charset="0"/>
+                      </a:endParaRPr>
+                    </a:p>
+                  </a:txBody>
+                  <a:tcPr marL="45720" marR="45720" marT="45720" marB="45720" anchor="ctr">
+                    <a:lnL w="6350" cap="flat" cmpd="sng" algn="ctr">
+                      <a:solidFill>
+                        <a:srgbClr val="DDDDDD"/>
+                      </a:solidFill>
+                      <a:prstDash val="solid"/>
+                      <a:round/>
+                      <a:headEnd type="none" w="med" len="med"/>
+                      <a:tailEnd type="none" w="med" len="med"/>
+                    </a:lnL>
+                    <a:lnR w="6350" cap="flat" cmpd="sng" algn="ctr">
+                      <a:solidFill>
+                        <a:srgbClr val="DDDDDD"/>
+                      </a:solidFill>
+                      <a:prstDash val="solid"/>
+                      <a:round/>
+                      <a:headEnd type="none" w="med" len="med"/>
+                      <a:tailEnd type="none" w="med" len="med"/>
+                    </a:lnR>
+                    <a:lnT w="6350" cap="flat" cmpd="sng" algn="ctr">
+                      <a:solidFill>
+                        <a:srgbClr val="DDDDDD"/>
+                      </a:solidFill>
+                      <a:prstDash val="solid"/>
+                      <a:round/>
+                      <a:headEnd type="none" w="med" len="med"/>
+                      <a:tailEnd type="none" w="med" len="med"/>
+                    </a:lnT>
+                    <a:lnB w="6350" cap="flat" cmpd="sng" algn="ctr">
+                      <a:solidFill>
+                        <a:srgbClr val="DDDDDD"/>
+                      </a:solidFill>
+                      <a:prstDash val="solid"/>
+                      <a:round/>
+                      <a:headEnd type="none" w="med" len="med"/>
+                      <a:tailEnd type="none" w="med" len="med"/>
+                    </a:lnB>
+                    <a:solidFill>
+                      <a:srgbClr val="F3F4F6"/>
+                    </a:solidFill>
+                  </a:tcPr>
+                </a:tc>
+              </a:tr>
+              <a:tr h="566928">
+                <a:tc>
+                  <a:txBody>
+                    <a:bodyPr/>
+                    <a:lstStyle/>
+                    <a:p>
+                      <a:pPr indent="0" marL="0">
+                        <a:buNone/>
+                      </a:pPr>
+                      <a:r>
+                        <a:rPr lang="en-US" sz="850" b="1" dirty="0">
+                          <a:solidFill>
+                            <a:srgbClr val="1F2933"/>
+                          </a:solidFill>
+                          <a:latin typeface="Arial" pitchFamily="34" charset="0"/>
+                          <a:ea typeface="Arial" pitchFamily="34" charset="-122"/>
+                          <a:cs typeface="Arial" pitchFamily="34" charset="-120"/>
+                        </a:rPr>
+                        <a:t>F  Contraction–relaxation area (CRA)</a:t>
+                      </a:r>
+                      <a:endParaRPr lang="en-US" sz="850" dirty="0">
+                        <a:latin typeface="Arial" charset="0"/>
+                        <a:ea typeface="Arial" charset="0"/>
+                        <a:cs typeface="Arial" charset="0"/>
+                      </a:endParaRPr>
+                    </a:p>
+                  </a:txBody>
+                  <a:tcPr marL="45720" marR="45720" marT="45720" marB="45720" anchor="ctr">
+                    <a:lnL w="6350" cap="flat" cmpd="sng" algn="ctr">
+                      <a:solidFill>
+                        <a:srgbClr val="DDDDDD"/>
+                      </a:solidFill>
+                      <a:prstDash val="solid"/>
+                      <a:round/>
+                      <a:headEnd type="none" w="med" len="med"/>
+                      <a:tailEnd type="none" w="med" len="med"/>
+                    </a:lnL>
+                    <a:lnR w="6350" cap="flat" cmpd="sng" algn="ctr">
+                      <a:solidFill>
+                        <a:srgbClr val="DDDDDD"/>
+                      </a:solidFill>
+                      <a:prstDash val="solid"/>
+                      <a:round/>
+                      <a:headEnd type="none" w="med" len="med"/>
+                      <a:tailEnd type="none" w="med" len="med"/>
+                    </a:lnR>
+                    <a:lnT w="6350" cap="flat" cmpd="sng" algn="ctr">
+                      <a:solidFill>
+                        <a:srgbClr val="DDDDDD"/>
+                      </a:solidFill>
+                      <a:prstDash val="solid"/>
+                      <a:round/>
+                      <a:headEnd type="none" w="med" len="med"/>
+                      <a:tailEnd type="none" w="med" len="med"/>
+                    </a:lnT>
+                    <a:lnB w="6350" cap="flat" cmpd="sng" algn="ctr">
+                      <a:solidFill>
+                        <a:srgbClr val="DDDDDD"/>
+                      </a:solidFill>
+                      <a:prstDash val="solid"/>
+                      <a:round/>
+                      <a:headEnd type="none" w="med" len="med"/>
+                      <a:tailEnd type="none" w="med" len="med"/>
+                    </a:lnB>
+                    <a:solidFill>
+                      <a:srgbClr val="FFFFFF"/>
+                    </a:solidFill>
+                  </a:tcPr>
+                </a:tc>
+                <a:tc>
+                  <a:txBody>
+                    <a:bodyPr/>
+                    <a:lstStyle/>
+                    <a:p>
+                      <a:pPr indent="0" marL="0">
+                        <a:buNone/>
+                      </a:pPr>
+                      <a:r>
+                        <a:rPr lang="en-US" sz="850" dirty="0">
+                          <a:solidFill>
+                            <a:srgbClr val="1F2933"/>
+                          </a:solidFill>
+                          <a:latin typeface="Arial" pitchFamily="34" charset="0"/>
+                          <a:ea typeface="Arial" pitchFamily="34" charset="-122"/>
+                          <a:cs typeface="Arial" pitchFamily="34" charset="-120"/>
+                        </a:rPr>
+                        <a:t>한 박동 동안 속도 곡선 아래 면적 = 총 이동 경로 길이</a:t>
+                      </a:r>
+                      <a:endParaRPr lang="en-US" sz="850" dirty="0">
+                        <a:latin typeface="Arial" charset="0"/>
+                        <a:ea typeface="Arial" charset="0"/>
+                        <a:cs typeface="Arial" charset="0"/>
+                      </a:endParaRPr>
+                    </a:p>
+                  </a:txBody>
+                  <a:tcPr marL="45720" marR="45720" marT="45720" marB="45720" anchor="ctr">
+                    <a:lnL w="6350" cap="flat" cmpd="sng" algn="ctr">
+                      <a:solidFill>
+                        <a:srgbClr val="DDDDDD"/>
+                      </a:solidFill>
+                      <a:prstDash val="solid"/>
+                      <a:round/>
+                      <a:headEnd type="none" w="med" len="med"/>
+                      <a:tailEnd type="none" w="med" len="med"/>
+                    </a:lnL>
+                    <a:lnR w="6350" cap="flat" cmpd="sng" algn="ctr">
+                      <a:solidFill>
+                        <a:srgbClr val="DDDDDD"/>
+                      </a:solidFill>
+                      <a:prstDash val="solid"/>
+                      <a:round/>
+                      <a:headEnd type="none" w="med" len="med"/>
+                      <a:tailEnd type="none" w="med" len="med"/>
+                    </a:lnR>
+                    <a:lnT w="6350" cap="flat" cmpd="sng" algn="ctr">
+                      <a:solidFill>
+                        <a:srgbClr val="DDDDDD"/>
+                      </a:solidFill>
+                      <a:prstDash val="solid"/>
+                      <a:round/>
+                      <a:headEnd type="none" w="med" len="med"/>
+                      <a:tailEnd type="none" w="med" len="med"/>
+                    </a:lnT>
+                    <a:lnB w="6350" cap="flat" cmpd="sng" algn="ctr">
+                      <a:solidFill>
+                        <a:srgbClr val="DDDDDD"/>
+                      </a:solidFill>
+                      <a:prstDash val="solid"/>
+                      <a:round/>
+                      <a:headEnd type="none" w="med" len="med"/>
+                      <a:tailEnd type="none" w="med" len="med"/>
+                    </a:lnB>
+                    <a:solidFill>
+                      <a:srgbClr val="FFFFFF"/>
+                    </a:solidFill>
+                  </a:tcPr>
+                </a:tc>
+                <a:tc>
+                  <a:txBody>
+                    <a:bodyPr/>
+                    <a:lstStyle/>
+                    <a:p>
+                      <a:pPr indent="0" marL="0">
+                        <a:buNone/>
+                      </a:pPr>
+                      <a:r>
+                        <a:rPr lang="en-US" sz="850" dirty="0">
+                          <a:solidFill>
+                            <a:srgbClr val="1F2933"/>
+                          </a:solidFill>
+                          <a:latin typeface="Arial" pitchFamily="34" charset="0"/>
+                          <a:ea typeface="Arial" pitchFamily="34" charset="-122"/>
+                          <a:cs typeface="Arial" pitchFamily="34" charset="-120"/>
+                        </a:rPr>
+                        <a:t>한 박동에 조직이 많이 움직임 (변위·진폭에 해당). 노이즈에 덜 민감</a:t>
+                      </a:r>
+                      <a:endParaRPr lang="en-US" sz="850" dirty="0">
+                        <a:latin typeface="Arial" charset="0"/>
+                        <a:ea typeface="Arial" charset="0"/>
+                        <a:cs typeface="Arial" charset="0"/>
+                      </a:endParaRPr>
+                    </a:p>
+                  </a:txBody>
+                  <a:tcPr marL="45720" marR="45720" marT="45720" marB="45720" anchor="ctr">
+                    <a:lnL w="6350" cap="flat" cmpd="sng" algn="ctr">
+                      <a:solidFill>
+                        <a:srgbClr val="DDDDDD"/>
+                      </a:solidFill>
+                      <a:prstDash val="solid"/>
+                      <a:round/>
+                      <a:headEnd type="none" w="med" len="med"/>
+                      <a:tailEnd type="none" w="med" len="med"/>
+                    </a:lnL>
+                    <a:lnR w="6350" cap="flat" cmpd="sng" algn="ctr">
+                      <a:solidFill>
+                        <a:srgbClr val="DDDDDD"/>
+                      </a:solidFill>
+                      <a:prstDash val="solid"/>
+                      <a:round/>
+                      <a:headEnd type="none" w="med" len="med"/>
+                      <a:tailEnd type="none" w="med" len="med"/>
+                    </a:lnR>
+                    <a:lnT w="6350" cap="flat" cmpd="sng" algn="ctr">
+                      <a:solidFill>
+                        <a:srgbClr val="DDDDDD"/>
+                      </a:solidFill>
+                      <a:prstDash val="solid"/>
+                      <a:round/>
+                      <a:headEnd type="none" w="med" len="med"/>
+                      <a:tailEnd type="none" w="med" len="med"/>
+                    </a:lnT>
+                    <a:lnB w="6350" cap="flat" cmpd="sng" algn="ctr">
+                      <a:solidFill>
+                        <a:srgbClr val="DDDDDD"/>
+                      </a:solidFill>
+                      <a:prstDash val="solid"/>
+                      <a:round/>
+                      <a:headEnd type="none" w="med" len="med"/>
+                      <a:tailEnd type="none" w="med" len="med"/>
+                    </a:lnB>
+                    <a:solidFill>
+                      <a:srgbClr val="FFFFFF"/>
+                    </a:solidFill>
+                  </a:tcPr>
+                </a:tc>
+                <a:tc>
+                  <a:txBody>
+                    <a:bodyPr/>
+                    <a:lstStyle/>
+                    <a:p>
+                      <a:pPr indent="0" marL="0">
+                        <a:buNone/>
+                      </a:pPr>
+                      <a:r>
+                        <a:rPr lang="en-US" sz="850" dirty="0">
+                          <a:solidFill>
+                            <a:srgbClr val="1F2933"/>
+                          </a:solidFill>
+                          <a:latin typeface="Arial" pitchFamily="34" charset="0"/>
+                          <a:ea typeface="Arial" pitchFamily="34" charset="-122"/>
+                          <a:cs typeface="Arial" pitchFamily="34" charset="-120"/>
+                        </a:rPr>
+                        <a:t>C6 1.1 → 1.2, AR05 3.7 → 3.3. 총 이동량은 비슷 → '움직이는 양은 유지되나 느리게' = 속도 저하가 핵심</a:t>
+                      </a:r>
+                      <a:endParaRPr lang="en-US" sz="850" dirty="0">
+                        <a:latin typeface="Arial" charset="0"/>
+                        <a:ea typeface="Arial" charset="0"/>
+                        <a:cs typeface="Arial" charset="0"/>
+                      </a:endParaRPr>
+                    </a:p>
+                  </a:txBody>
+                  <a:tcPr marL="45720" marR="45720" marT="45720" marB="45720" anchor="ctr">
+                    <a:lnL w="6350" cap="flat" cmpd="sng" algn="ctr">
+                      <a:solidFill>
+                        <a:srgbClr val="DDDDDD"/>
+                      </a:solidFill>
+                      <a:prstDash val="solid"/>
+                      <a:round/>
+                      <a:headEnd type="none" w="med" len="med"/>
+                      <a:tailEnd type="none" w="med" len="med"/>
+                    </a:lnL>
+                    <a:lnR w="6350" cap="flat" cmpd="sng" algn="ctr">
+                      <a:solidFill>
+                        <a:srgbClr val="DDDDDD"/>
+                      </a:solidFill>
+                      <a:prstDash val="solid"/>
+                      <a:round/>
+                      <a:headEnd type="none" w="med" len="med"/>
+                      <a:tailEnd type="none" w="med" len="med"/>
+                    </a:lnR>
+                    <a:lnT w="6350" cap="flat" cmpd="sng" algn="ctr">
+                      <a:solidFill>
+                        <a:srgbClr val="DDDDDD"/>
+                      </a:solidFill>
+                      <a:prstDash val="solid"/>
+                      <a:round/>
+                      <a:headEnd type="none" w="med" len="med"/>
+                      <a:tailEnd type="none" w="med" len="med"/>
+                    </a:lnT>
+                    <a:lnB w="6350" cap="flat" cmpd="sng" algn="ctr">
+                      <a:solidFill>
+                        <a:srgbClr val="DDDDDD"/>
+                      </a:solidFill>
+                      <a:prstDash val="solid"/>
+                      <a:round/>
+                      <a:headEnd type="none" w="med" len="med"/>
+                      <a:tailEnd type="none" w="med" len="med"/>
+                    </a:lnB>
+                    <a:solidFill>
+                      <a:srgbClr val="FFFFFF"/>
+                    </a:solidFill>
+                  </a:tcPr>
+                </a:tc>
+              </a:tr>
+            </a:tbl>
+          </a:graphicData>
+        </a:graphic>
+      </p:graphicFrame>
+      <p:sp>
+        <p:nvSpPr>
+          <p:cNvPr id="5" name="Text 2"/>
+          <p:cNvSpPr txBox="1"/>
+          <p:nvPr/>
+        </p:nvSpPr>
+        <p:spPr>
+          <a:xfrm>
+            <a:off x="457200" y="4114800"/>
+            <a:ext cx="8229600" cy="594360"/>
+          </a:xfrm>
+          <a:prstGeom prst="rect">
+            <a:avLst/>
+          </a:prstGeom>
+          <a:noFill/>
+          <a:ln/>
+        </p:spPr>
+        <p:txBody>
+          <a:bodyPr wrap="square" lIns="0" tIns="0" rIns="0" bIns="0" rtlCol="0" anchor="ctr"/>
+          <a:lstStyle/>
+          <a:p>
+            <a:pPr indent="0" marL="0">
+              <a:buNone/>
+            </a:pPr>
+            <a:r>
+              <a:rPr lang="en-US" sz="1050" b="1" dirty="0">
+                <a:solidFill>
+                  <a:srgbClr val="1F2933"/>
+                </a:solidFill>
+                <a:latin typeface="Arial" pitchFamily="34" charset="0"/>
+                <a:ea typeface="Arial" pitchFamily="34" charset="-122"/>
+                <a:cs typeface="Arial" pitchFamily="34" charset="-120"/>
+              </a:rPr>
+              <a:t>해석 팁: MCS↓ + CRA 유지 = 같은 거리를 더 천천히 (동역학 저하). MCS↓ + CRA↓ = 덜, 그리고 천천히 (수축력 자체 저하). AR05가 C6보다 CRA가 3배 큰 것은 조직이 더 크거나 시야·배율 차이일 수 있으니 같은 배율에서만 비교하세요.</a:t>
+            </a:r>
+            <a:endParaRPr lang="en-US" sz="1050" dirty="0"/>
+          </a:p>
+        </p:txBody>
+      </p:sp>
+      <p:sp>
+        <p:nvSpPr>
+          <p:cNvPr id="6" name="Text 3"/>
+          <p:cNvSpPr txBox="1"/>
+          <p:nvPr/>
+        </p:nvSpPr>
+        <p:spPr>
+          <a:xfrm>
+            <a:off x="457200" y="4800600"/>
+            <a:ext cx="8229600" cy="228600"/>
+          </a:xfrm>
+          <a:prstGeom prst="rect">
+            <a:avLst/>
+          </a:prstGeom>
+          <a:noFill/>
+          <a:ln/>
+        </p:spPr>
+        <p:txBody>
+          <a:bodyPr wrap="square" lIns="0" tIns="0" rIns="0" bIns="0" rtlCol="0" anchor="ctr"/>
+          <a:lstStyle/>
+          <a:p>
+            <a:pPr algn="r" indent="0" marL="0">
+              <a:buNone/>
+            </a:pPr>
+            <a:r>
+              <a:rPr lang="en-US" sz="800" dirty="0">
+                <a:solidFill>
+                  <a:srgbClr val="6B7280"/>
+                </a:solidFill>
+                <a:latin typeface="Arial" pitchFamily="34" charset="0"/>
+                <a:ea typeface="Arial" pitchFamily="34" charset="-122"/>
+                <a:cs typeface="Arial" pitchFamily="34" charset="-120"/>
+              </a:rPr>
+              <a:t>Cardiomyocyte Analyzer · 분석 프로토콜  14</a:t>
+            </a:r>
+            <a:endParaRPr lang="en-US" sz="800" dirty="0"/>
+          </a:p>
+        </p:txBody>
+      </p:sp>
+    </p:spTree>
+  </p:cSld>
+  <p:clrMapOvr>
+    <a:masterClrMapping/>
+  </p:clrMapOvr>
+</p:sld>
+</file>
+
+<file path=ppt/slides/slide15.xml><?xml version="1.0" encoding="utf-8"?>
+<p:sld xmlns:a="http://schemas.openxmlformats.org/drawingml/2006/main" xmlns:r="http://schemas.openxmlformats.org/officeDocument/2006/relationships" xmlns:p="http://schemas.openxmlformats.org/presentationml/2006/main">
+  <p:cSld name="Slide 15">
+    <p:bg>
+      <p:bgPr>
+        <a:solidFill>
+          <a:srgbClr val="FFFFFF"/>
+        </a:solidFill>
+      </p:bgPr>
+    </p:bg>
+    <p:spTree>
+      <p:nvGrpSpPr>
+        <p:cNvPr id="1" name=""/>
+        <p:cNvGrpSpPr/>
+        <p:nvPr/>
+      </p:nvGrpSpPr>
+      <p:grpSpPr>
+        <a:xfrm>
+          <a:off x="0" y="0"/>
+          <a:ext cx="0" cy="0"/>
+          <a:chOff x="0" y="0"/>
+          <a:chExt cx="0" cy="0"/>
+        </a:xfrm>
+      </p:grpSpPr>
+      <p:sp>
+        <p:nvSpPr>
+          <p:cNvPr id="2" name="Text 0"/>
+          <p:cNvSpPr txBox="1"/>
+          <p:nvPr/>
+        </p:nvSpPr>
+        <p:spPr>
+          <a:xfrm>
+            <a:off x="457200" y="274320"/>
+            <a:ext cx="8229600" cy="548640"/>
+          </a:xfrm>
+          <a:prstGeom prst="rect">
+            <a:avLst/>
+          </a:prstGeom>
+          <a:noFill/>
+          <a:ln/>
+        </p:spPr>
+        <p:txBody>
+          <a:bodyPr wrap="square" lIns="0" tIns="0" rIns="0" bIns="0" rtlCol="0" anchor="ctr"/>
+          <a:lstStyle/>
+          <a:p>
+            <a:pPr indent="0" marL="0">
+              <a:buNone/>
+            </a:pPr>
+            <a:r>
+              <a:rPr lang="en-US" sz="2600" b="1" dirty="0">
+                <a:solidFill>
+                  <a:srgbClr val="1F2933"/>
+                </a:solidFill>
+                <a:latin typeface="Arial" pitchFamily="34" charset="0"/>
+                <a:ea typeface="Arial" pitchFamily="34" charset="-122"/>
+                <a:cs typeface="Arial" pitchFamily="34" charset="-120"/>
+              </a:rPr>
+              <a:t>패널별 해석 ③ 수축·이완 시간 (I, E, H, G)</a:t>
+            </a:r>
+            <a:endParaRPr lang="en-US" sz="2600" dirty="0"/>
+          </a:p>
+        </p:txBody>
+      </p:sp>
+      <p:sp>
+        <p:nvSpPr>
+          <p:cNvPr id="3" name="Text 1"/>
+          <p:cNvSpPr txBox="1"/>
+          <p:nvPr/>
+        </p:nvSpPr>
+        <p:spPr>
+          <a:xfrm>
+            <a:off x="457200" y="804672"/>
+            <a:ext cx="8229600" cy="320040"/>
+          </a:xfrm>
+          <a:prstGeom prst="rect">
+            <a:avLst/>
+          </a:prstGeom>
+          <a:noFill/>
+          <a:ln/>
+        </p:spPr>
+        <p:txBody>
+          <a:bodyPr wrap="square" lIns="0" tIns="0" rIns="0" bIns="0" rtlCol="0" anchor="ctr"/>
+          <a:lstStyle/>
+          <a:p>
+            <a:pPr indent="0" marL="0">
+              <a:buNone/>
+            </a:pPr>
+            <a:r>
+              <a:rPr lang="en-US" sz="1200" dirty="0">
+                <a:solidFill>
+                  <a:srgbClr val="6B7280"/>
+                </a:solidFill>
+                <a:latin typeface="Arial" pitchFamily="34" charset="0"/>
+                <a:ea typeface="Arial" pitchFamily="34" charset="-122"/>
+                <a:cs typeface="Arial" pitchFamily="34" charset="-120"/>
+              </a:rPr>
+              <a:t>한 박동의 각 단계가 얼마나 오래 걸리는가 (ContractionWave 정의)</a:t>
+            </a:r>
+            <a:endParaRPr lang="en-US" sz="1200" dirty="0"/>
+          </a:p>
+        </p:txBody>
+      </p:sp>
+      <p:graphicFrame>
+        <p:nvGraphicFramePr>
+          <p:cNvPr id="16" name="Table 0"/>
+          <p:cNvGraphicFramePr>
+            <a:graphicFrameLocks noGrp="1"/>
+          </p:cNvGraphicFramePr>
+          <p:nvPr>
+            <p:extLst>
+              <p:ext uri="{D42A27DB-BD31-4B8C-83A1-F6EECF244321}">
+                <p14:modId xmlns:p14="http://schemas.microsoft.com/office/powerpoint/2010/main" val="1579011935"/>
+              </p:ext>
+            </p:extLst>
+          </p:nvPr>
+        </p:nvGraphicFramePr>
+        <p:xfrm>
+          <a:off x="457200" y="1188720"/>
+          <a:ext cx="8229600" cy="914400"/>
+        </p:xfrm>
+        <a:graphic>
+          <a:graphicData uri="http://schemas.openxmlformats.org/drawingml/2006/table">
+            <a:tbl>
+              <a:tblPr/>
+              <a:tblGrid>
+                <a:gridCol w="1737360"/>
+                <a:gridCol w="2103120"/>
+                <a:gridCol w="2103120"/>
+                <a:gridCol w="2286000"/>
+              </a:tblGrid>
+              <a:tr h="566928">
+                <a:tc>
+                  <a:txBody>
+                    <a:bodyPr/>
+                    <a:lstStyle/>
+                    <a:p>
+                      <a:pPr indent="0" marL="0">
+                        <a:buNone/>
+                      </a:pPr>
+                      <a:r>
+                        <a:rPr lang="en-US" sz="850" b="1" dirty="0">
+                          <a:solidFill>
+                            <a:srgbClr val="FFFFFF"/>
+                          </a:solidFill>
+                          <a:latin typeface="Arial" pitchFamily="34" charset="0"/>
+                          <a:ea typeface="Arial" pitchFamily="34" charset="-122"/>
+                          <a:cs typeface="Arial" pitchFamily="34" charset="-120"/>
+                        </a:rPr>
+                        <a:t>패널 · 지표</a:t>
+                      </a:r>
+                      <a:endParaRPr lang="en-US" sz="850" dirty="0">
+                        <a:latin typeface="Arial" charset="0"/>
+                        <a:ea typeface="Arial" charset="0"/>
+                        <a:cs typeface="Arial" charset="0"/>
+                      </a:endParaRPr>
+                    </a:p>
+                  </a:txBody>
+                  <a:tcPr marL="45720" marR="45720" marT="45720" marB="45720" anchor="ctr">
+                    <a:lnL w="6350" cap="flat" cmpd="sng" algn="ctr">
+                      <a:solidFill>
+                        <a:srgbClr val="DDDDDD"/>
+                      </a:solidFill>
+                      <a:prstDash val="solid"/>
+                      <a:round/>
+                      <a:headEnd type="none" w="med" len="med"/>
+                      <a:tailEnd type="none" w="med" len="med"/>
+                    </a:lnL>
+                    <a:lnR w="6350" cap="flat" cmpd="sng" algn="ctr">
+                      <a:solidFill>
+                        <a:srgbClr val="DDDDDD"/>
+                      </a:solidFill>
+                      <a:prstDash val="solid"/>
+                      <a:round/>
+                      <a:headEnd type="none" w="med" len="med"/>
+                      <a:tailEnd type="none" w="med" len="med"/>
+                    </a:lnR>
+                    <a:lnT w="6350" cap="flat" cmpd="sng" algn="ctr">
+                      <a:solidFill>
+                        <a:srgbClr val="DDDDDD"/>
+                      </a:solidFill>
+                      <a:prstDash val="solid"/>
+                      <a:round/>
+                      <a:headEnd type="none" w="med" len="med"/>
+                      <a:tailEnd type="none" w="med" len="med"/>
+                    </a:lnT>
+                    <a:lnB w="6350" cap="flat" cmpd="sng" algn="ctr">
+                      <a:solidFill>
+                        <a:srgbClr val="DDDDDD"/>
+                      </a:solidFill>
+                      <a:prstDash val="solid"/>
+                      <a:round/>
+                      <a:headEnd type="none" w="med" len="med"/>
+                      <a:tailEnd type="none" w="med" len="med"/>
+                    </a:lnB>
+                    <a:solidFill>
+                      <a:srgbClr val="7A1F2B"/>
+                    </a:solidFill>
+                  </a:tcPr>
+                </a:tc>
+                <a:tc>
+                  <a:txBody>
+                    <a:bodyPr/>
+                    <a:lstStyle/>
+                    <a:p>
+                      <a:pPr indent="0" marL="0">
+                        <a:buNone/>
+                      </a:pPr>
+                      <a:r>
+                        <a:rPr lang="en-US" sz="850" b="1" dirty="0">
+                          <a:solidFill>
+                            <a:srgbClr val="FFFFFF"/>
+                          </a:solidFill>
+                          <a:latin typeface="Arial" pitchFamily="34" charset="0"/>
+                          <a:ea typeface="Arial" pitchFamily="34" charset="-122"/>
+                          <a:cs typeface="Arial" pitchFamily="34" charset="-120"/>
+                        </a:rPr>
+                        <a:t>무엇을 재나</a:t>
+                      </a:r>
+                      <a:endParaRPr lang="en-US" sz="850" dirty="0">
+                        <a:latin typeface="Arial" charset="0"/>
+                        <a:ea typeface="Arial" charset="0"/>
+                        <a:cs typeface="Arial" charset="0"/>
+                      </a:endParaRPr>
+                    </a:p>
+                  </a:txBody>
+                  <a:tcPr marL="45720" marR="45720" marT="45720" marB="45720" anchor="ctr">
+                    <a:lnL w="6350" cap="flat" cmpd="sng" algn="ctr">
+                      <a:solidFill>
+                        <a:srgbClr val="DDDDDD"/>
+                      </a:solidFill>
+                      <a:prstDash val="solid"/>
+                      <a:round/>
+                      <a:headEnd type="none" w="med" len="med"/>
+                      <a:tailEnd type="none" w="med" len="med"/>
+                    </a:lnL>
+                    <a:lnR w="6350" cap="flat" cmpd="sng" algn="ctr">
+                      <a:solidFill>
+                        <a:srgbClr val="DDDDDD"/>
+                      </a:solidFill>
+                      <a:prstDash val="solid"/>
+                      <a:round/>
+                      <a:headEnd type="none" w="med" len="med"/>
+                      <a:tailEnd type="none" w="med" len="med"/>
+                    </a:lnR>
+                    <a:lnT w="6350" cap="flat" cmpd="sng" algn="ctr">
+                      <a:solidFill>
+                        <a:srgbClr val="DDDDDD"/>
+                      </a:solidFill>
+                      <a:prstDash val="solid"/>
+                      <a:round/>
+                      <a:headEnd type="none" w="med" len="med"/>
+                      <a:tailEnd type="none" w="med" len="med"/>
+                    </a:lnT>
+                    <a:lnB w="6350" cap="flat" cmpd="sng" algn="ctr">
+                      <a:solidFill>
+                        <a:srgbClr val="DDDDDD"/>
+                      </a:solidFill>
+                      <a:prstDash val="solid"/>
+                      <a:round/>
+                      <a:headEnd type="none" w="med" len="med"/>
+                      <a:tailEnd type="none" w="med" len="med"/>
+                    </a:lnB>
+                    <a:solidFill>
+                      <a:srgbClr val="7A1F2B"/>
+                    </a:solidFill>
+                  </a:tcPr>
+                </a:tc>
+                <a:tc>
+                  <a:txBody>
+                    <a:bodyPr/>
+                    <a:lstStyle/>
+                    <a:p>
+                      <a:pPr indent="0" marL="0">
+                        <a:buNone/>
+                      </a:pPr>
+                      <a:r>
+                        <a:rPr lang="en-US" sz="850" b="1" dirty="0">
+                          <a:solidFill>
+                            <a:srgbClr val="FFFFFF"/>
+                          </a:solidFill>
+                          <a:latin typeface="Arial" pitchFamily="34" charset="0"/>
+                          <a:ea typeface="Arial" pitchFamily="34" charset="-122"/>
+                          <a:cs typeface="Arial" pitchFamily="34" charset="-120"/>
+                        </a:rPr>
+                        <a:t>값이 크면</a:t>
+                      </a:r>
+                      <a:endParaRPr lang="en-US" sz="850" dirty="0">
+                        <a:latin typeface="Arial" charset="0"/>
+                        <a:ea typeface="Arial" charset="0"/>
+                        <a:cs typeface="Arial" charset="0"/>
+                      </a:endParaRPr>
+                    </a:p>
+                  </a:txBody>
+                  <a:tcPr marL="45720" marR="45720" marT="45720" marB="45720" anchor="ctr">
+                    <a:lnL w="6350" cap="flat" cmpd="sng" algn="ctr">
+                      <a:solidFill>
+                        <a:srgbClr val="DDDDDD"/>
+                      </a:solidFill>
+                      <a:prstDash val="solid"/>
+                      <a:round/>
+                      <a:headEnd type="none" w="med" len="med"/>
+                      <a:tailEnd type="none" w="med" len="med"/>
+                    </a:lnL>
+                    <a:lnR w="6350" cap="flat" cmpd="sng" algn="ctr">
+                      <a:solidFill>
+                        <a:srgbClr val="DDDDDD"/>
+                      </a:solidFill>
+                      <a:prstDash val="solid"/>
+                      <a:round/>
+                      <a:headEnd type="none" w="med" len="med"/>
+                      <a:tailEnd type="none" w="med" len="med"/>
+                    </a:lnR>
+                    <a:lnT w="6350" cap="flat" cmpd="sng" algn="ctr">
+                      <a:solidFill>
+                        <a:srgbClr val="DDDDDD"/>
+                      </a:solidFill>
+                      <a:prstDash val="solid"/>
+                      <a:round/>
+                      <a:headEnd type="none" w="med" len="med"/>
+                      <a:tailEnd type="none" w="med" len="med"/>
+                    </a:lnT>
+                    <a:lnB w="6350" cap="flat" cmpd="sng" algn="ctr">
+                      <a:solidFill>
+                        <a:srgbClr val="DDDDDD"/>
+                      </a:solidFill>
+                      <a:prstDash val="solid"/>
+                      <a:round/>
+                      <a:headEnd type="none" w="med" len="med"/>
+                      <a:tailEnd type="none" w="med" len="med"/>
+                    </a:lnB>
+                    <a:solidFill>
+                      <a:srgbClr val="7A1F2B"/>
+                    </a:solidFill>
+                  </a:tcPr>
+                </a:tc>
+                <a:tc>
+                  <a:txBody>
+                    <a:bodyPr/>
+                    <a:lstStyle/>
+                    <a:p>
+                      <a:pPr indent="0" marL="0">
+                        <a:buNone/>
+                      </a:pPr>
+                      <a:r>
+                        <a:rPr lang="en-US" sz="850" b="1" dirty="0">
+                          <a:solidFill>
+                            <a:srgbClr val="FFFFFF"/>
+                          </a:solidFill>
+                          <a:latin typeface="Arial" pitchFamily="34" charset="0"/>
+                          <a:ea typeface="Arial" pitchFamily="34" charset="-122"/>
+                          <a:cs typeface="Arial" pitchFamily="34" charset="-120"/>
+                        </a:rPr>
+                        <a:t>이 데이터에서 (Vehicle → UT H)</a:t>
+                      </a:r>
+                      <a:endParaRPr lang="en-US" sz="850" dirty="0">
+                        <a:latin typeface="Arial" charset="0"/>
+                        <a:ea typeface="Arial" charset="0"/>
+                        <a:cs typeface="Arial" charset="0"/>
+                      </a:endParaRPr>
+                    </a:p>
+                  </a:txBody>
+                  <a:tcPr marL="45720" marR="45720" marT="45720" marB="45720" anchor="ctr">
+                    <a:lnL w="6350" cap="flat" cmpd="sng" algn="ctr">
+                      <a:solidFill>
+                        <a:srgbClr val="DDDDDD"/>
+                      </a:solidFill>
+                      <a:prstDash val="solid"/>
+                      <a:round/>
+                      <a:headEnd type="none" w="med" len="med"/>
+                      <a:tailEnd type="none" w="med" len="med"/>
+                    </a:lnL>
+                    <a:lnR w="6350" cap="flat" cmpd="sng" algn="ctr">
+                      <a:solidFill>
+                        <a:srgbClr val="DDDDDD"/>
+                      </a:solidFill>
+                      <a:prstDash val="solid"/>
+                      <a:round/>
+                      <a:headEnd type="none" w="med" len="med"/>
+                      <a:tailEnd type="none" w="med" len="med"/>
+                    </a:lnR>
+                    <a:lnT w="6350" cap="flat" cmpd="sng" algn="ctr">
+                      <a:solidFill>
+                        <a:srgbClr val="DDDDDD"/>
+                      </a:solidFill>
+                      <a:prstDash val="solid"/>
+                      <a:round/>
+                      <a:headEnd type="none" w="med" len="med"/>
+                      <a:tailEnd type="none" w="med" len="med"/>
+                    </a:lnT>
+                    <a:lnB w="6350" cap="flat" cmpd="sng" algn="ctr">
+                      <a:solidFill>
+                        <a:srgbClr val="DDDDDD"/>
+                      </a:solidFill>
+                      <a:prstDash val="solid"/>
+                      <a:round/>
+                      <a:headEnd type="none" w="med" len="med"/>
+                      <a:tailEnd type="none" w="med" len="med"/>
+                    </a:lnB>
+                    <a:solidFill>
+                      <a:srgbClr val="7A1F2B"/>
+                    </a:solidFill>
+                  </a:tcPr>
+                </a:tc>
+              </a:tr>
+              <a:tr h="566928">
+                <a:tc>
+                  <a:txBody>
+                    <a:bodyPr/>
+                    <a:lstStyle/>
+                    <a:p>
+                      <a:pPr indent="0" marL="0">
+                        <a:buNone/>
+                      </a:pPr>
+                      <a:r>
+                        <a:rPr lang="en-US" sz="850" b="1" dirty="0">
+                          <a:solidFill>
+                            <a:srgbClr val="1F2933"/>
+                          </a:solidFill>
+                          <a:latin typeface="Arial" pitchFamily="34" charset="0"/>
+                          <a:ea typeface="Arial" pitchFamily="34" charset="-122"/>
+                          <a:cs typeface="Arial" pitchFamily="34" charset="-120"/>
+                        </a:rPr>
+                        <a:t>I  Contraction time-to-peak (CTP)</a:t>
+                      </a:r>
+                      <a:endParaRPr lang="en-US" sz="850" dirty="0">
+                        <a:latin typeface="Arial" charset="0"/>
+                        <a:ea typeface="Arial" charset="0"/>
+                        <a:cs typeface="Arial" charset="0"/>
+                      </a:endParaRPr>
+                    </a:p>
+                  </a:txBody>
+                  <a:tcPr marL="45720" marR="45720" marT="45720" marB="45720" anchor="ctr">
+                    <a:lnL w="6350" cap="flat" cmpd="sng" algn="ctr">
+                      <a:solidFill>
+                        <a:srgbClr val="DDDDDD"/>
+                      </a:solidFill>
+                      <a:prstDash val="solid"/>
+                      <a:round/>
+                      <a:headEnd type="none" w="med" len="med"/>
+                      <a:tailEnd type="none" w="med" len="med"/>
+                    </a:lnL>
+                    <a:lnR w="6350" cap="flat" cmpd="sng" algn="ctr">
+                      <a:solidFill>
+                        <a:srgbClr val="DDDDDD"/>
+                      </a:solidFill>
+                      <a:prstDash val="solid"/>
+                      <a:round/>
+                      <a:headEnd type="none" w="med" len="med"/>
+                      <a:tailEnd type="none" w="med" len="med"/>
+                    </a:lnR>
+                    <a:lnT w="6350" cap="flat" cmpd="sng" algn="ctr">
+                      <a:solidFill>
+                        <a:srgbClr val="DDDDDD"/>
+                      </a:solidFill>
+                      <a:prstDash val="solid"/>
+                      <a:round/>
+                      <a:headEnd type="none" w="med" len="med"/>
+                      <a:tailEnd type="none" w="med" len="med"/>
+                    </a:lnT>
+                    <a:lnB w="6350" cap="flat" cmpd="sng" algn="ctr">
+                      <a:solidFill>
+                        <a:srgbClr val="DDDDDD"/>
+                      </a:solidFill>
+                      <a:prstDash val="solid"/>
+                      <a:round/>
+                      <a:headEnd type="none" w="med" len="med"/>
+                      <a:tailEnd type="none" w="med" len="med"/>
+                    </a:lnB>
+                    <a:solidFill>
+                      <a:srgbClr val="F3F4F6"/>
+                    </a:solidFill>
+                  </a:tcPr>
+                </a:tc>
+                <a:tc>
+                  <a:txBody>
+                    <a:bodyPr/>
+                    <a:lstStyle/>
+                    <a:p>
+                      <a:pPr indent="0" marL="0">
+                        <a:buNone/>
+                      </a:pPr>
+                      <a:r>
+                        <a:rPr lang="en-US" sz="850" dirty="0">
+                          <a:solidFill>
+                            <a:srgbClr val="1F2933"/>
+                          </a:solidFill>
+                          <a:latin typeface="Arial" pitchFamily="34" charset="0"/>
+                          <a:ea typeface="Arial" pitchFamily="34" charset="-122"/>
+                          <a:cs typeface="Arial" pitchFamily="34" charset="-120"/>
+                        </a:rPr>
+                        <a:t>파형 시작 → 최대 수축 속도(MCS)까지</a:t>
+                      </a:r>
+                      <a:endParaRPr lang="en-US" sz="850" dirty="0">
+                        <a:latin typeface="Arial" charset="0"/>
+                        <a:ea typeface="Arial" charset="0"/>
+                        <a:cs typeface="Arial" charset="0"/>
+                      </a:endParaRPr>
+                    </a:p>
+                  </a:txBody>
+                  <a:tcPr marL="45720" marR="45720" marT="45720" marB="45720" anchor="ctr">
+                    <a:lnL w="6350" cap="flat" cmpd="sng" algn="ctr">
+                      <a:solidFill>
+                        <a:srgbClr val="DDDDDD"/>
+                      </a:solidFill>
+                      <a:prstDash val="solid"/>
+                      <a:round/>
+                      <a:headEnd type="none" w="med" len="med"/>
+                      <a:tailEnd type="none" w="med" len="med"/>
+                    </a:lnL>
+                    <a:lnR w="6350" cap="flat" cmpd="sng" algn="ctr">
+                      <a:solidFill>
+                        <a:srgbClr val="DDDDDD"/>
+                      </a:solidFill>
+                      <a:prstDash val="solid"/>
+                      <a:round/>
+                      <a:headEnd type="none" w="med" len="med"/>
+                      <a:tailEnd type="none" w="med" len="med"/>
+                    </a:lnR>
+                    <a:lnT w="6350" cap="flat" cmpd="sng" algn="ctr">
+                      <a:solidFill>
+                        <a:srgbClr val="DDDDDD"/>
+                      </a:solidFill>
+                      <a:prstDash val="solid"/>
+                      <a:round/>
+                      <a:headEnd type="none" w="med" len="med"/>
+                      <a:tailEnd type="none" w="med" len="med"/>
+                    </a:lnT>
+                    <a:lnB w="6350" cap="flat" cmpd="sng" algn="ctr">
+                      <a:solidFill>
+                        <a:srgbClr val="DDDDDD"/>
+                      </a:solidFill>
+                      <a:prstDash val="solid"/>
+                      <a:round/>
+                      <a:headEnd type="none" w="med" len="med"/>
+                      <a:tailEnd type="none" w="med" len="med"/>
+                    </a:lnB>
+                    <a:solidFill>
+                      <a:srgbClr val="F3F4F6"/>
+                    </a:solidFill>
+                  </a:tcPr>
+                </a:tc>
+                <a:tc>
+                  <a:txBody>
+                    <a:bodyPr/>
+                    <a:lstStyle/>
+                    <a:p>
+                      <a:pPr indent="0" marL="0">
+                        <a:buNone/>
+                      </a:pPr>
+                      <a:r>
+                        <a:rPr lang="en-US" sz="850" dirty="0">
+                          <a:solidFill>
+                            <a:srgbClr val="1F2933"/>
+                          </a:solidFill>
+                          <a:latin typeface="Arial" pitchFamily="34" charset="0"/>
+                          <a:ea typeface="Arial" pitchFamily="34" charset="-122"/>
+                          <a:cs typeface="Arial" pitchFamily="34" charset="-120"/>
+                        </a:rPr>
+                        <a:t>수축이 천천히 가속 (흥분-수축 연결 지연)</a:t>
+                      </a:r>
+                      <a:endParaRPr lang="en-US" sz="850" dirty="0">
+                        <a:latin typeface="Arial" charset="0"/>
+                        <a:ea typeface="Arial" charset="0"/>
+                        <a:cs typeface="Arial" charset="0"/>
+                      </a:endParaRPr>
+                    </a:p>
+                  </a:txBody>
+                  <a:tcPr marL="45720" marR="45720" marT="45720" marB="45720" anchor="ctr">
+                    <a:lnL w="6350" cap="flat" cmpd="sng" algn="ctr">
+                      <a:solidFill>
+                        <a:srgbClr val="DDDDDD"/>
+                      </a:solidFill>
+                      <a:prstDash val="solid"/>
+                      <a:round/>
+                      <a:headEnd type="none" w="med" len="med"/>
+                      <a:tailEnd type="none" w="med" len="med"/>
+                    </a:lnL>
+                    <a:lnR w="6350" cap="flat" cmpd="sng" algn="ctr">
+                      <a:solidFill>
+                        <a:srgbClr val="DDDDDD"/>
+                      </a:solidFill>
+                      <a:prstDash val="solid"/>
+                      <a:round/>
+                      <a:headEnd type="none" w="med" len="med"/>
+                      <a:tailEnd type="none" w="med" len="med"/>
+                    </a:lnR>
+                    <a:lnT w="6350" cap="flat" cmpd="sng" algn="ctr">
+                      <a:solidFill>
+                        <a:srgbClr val="DDDDDD"/>
+                      </a:solidFill>
+                      <a:prstDash val="solid"/>
+                      <a:round/>
+                      <a:headEnd type="none" w="med" len="med"/>
+                      <a:tailEnd type="none" w="med" len="med"/>
+                    </a:lnT>
+                    <a:lnB w="6350" cap="flat" cmpd="sng" algn="ctr">
+                      <a:solidFill>
+                        <a:srgbClr val="DDDDDD"/>
+                      </a:solidFill>
+                      <a:prstDash val="solid"/>
+                      <a:round/>
+                      <a:headEnd type="none" w="med" len="med"/>
+                      <a:tailEnd type="none" w="med" len="med"/>
+                    </a:lnB>
+                    <a:solidFill>
+                      <a:srgbClr val="F3F4F6"/>
+                    </a:solidFill>
+                  </a:tcPr>
+                </a:tc>
+                <a:tc>
+                  <a:txBody>
+                    <a:bodyPr/>
+                    <a:lstStyle/>
+                    <a:p>
+                      <a:pPr indent="0" marL="0">
+                        <a:buNone/>
+                      </a:pPr>
+                      <a:r>
+                        <a:rPr lang="en-US" sz="850" dirty="0">
+                          <a:solidFill>
+                            <a:srgbClr val="1F2933"/>
+                          </a:solidFill>
+                          <a:latin typeface="Arial" pitchFamily="34" charset="0"/>
+                          <a:ea typeface="Arial" pitchFamily="34" charset="-122"/>
+                          <a:cs typeface="Arial" pitchFamily="34" charset="-120"/>
+                        </a:rPr>
+                        <a:t>C6 0.05 → 0.12, AR05 0.09 → 0.21 s. 두 배 이상 느려짐</a:t>
+                      </a:r>
+                      <a:endParaRPr lang="en-US" sz="850" dirty="0">
+                        <a:latin typeface="Arial" charset="0"/>
+                        <a:ea typeface="Arial" charset="0"/>
+                        <a:cs typeface="Arial" charset="0"/>
+                      </a:endParaRPr>
+                    </a:p>
+                  </a:txBody>
+                  <a:tcPr marL="45720" marR="45720" marT="45720" marB="45720" anchor="ctr">
+                    <a:lnL w="6350" cap="flat" cmpd="sng" algn="ctr">
+                      <a:solidFill>
+                        <a:srgbClr val="DDDDDD"/>
+                      </a:solidFill>
+                      <a:prstDash val="solid"/>
+                      <a:round/>
+                      <a:headEnd type="none" w="med" len="med"/>
+                      <a:tailEnd type="none" w="med" len="med"/>
+                    </a:lnL>
+                    <a:lnR w="6350" cap="flat" cmpd="sng" algn="ctr">
+                      <a:solidFill>
+                        <a:srgbClr val="DDDDDD"/>
+                      </a:solidFill>
+                      <a:prstDash val="solid"/>
+                      <a:round/>
+                      <a:headEnd type="none" w="med" len="med"/>
+                      <a:tailEnd type="none" w="med" len="med"/>
+                    </a:lnR>
+                    <a:lnT w="6350" cap="flat" cmpd="sng" algn="ctr">
+                      <a:solidFill>
+                        <a:srgbClr val="DDDDDD"/>
+                      </a:solidFill>
+                      <a:prstDash val="solid"/>
+                      <a:round/>
+                      <a:headEnd type="none" w="med" len="med"/>
+                      <a:tailEnd type="none" w="med" len="med"/>
+                    </a:lnT>
+                    <a:lnB w="6350" cap="flat" cmpd="sng" algn="ctr">
+                      <a:solidFill>
+                        <a:srgbClr val="DDDDDD"/>
+                      </a:solidFill>
+                      <a:prstDash val="solid"/>
+                      <a:round/>
+                      <a:headEnd type="none" w="med" len="med"/>
+                      <a:tailEnd type="none" w="med" len="med"/>
+                    </a:lnB>
+                    <a:solidFill>
+                      <a:srgbClr val="F3F4F6"/>
+                    </a:solidFill>
+                  </a:tcPr>
+                </a:tc>
+              </a:tr>
+              <a:tr h="566928">
+                <a:tc>
+                  <a:txBody>
+                    <a:bodyPr/>
+                    <a:lstStyle/>
+                    <a:p>
+                      <a:pPr indent="0" marL="0">
+                        <a:buNone/>
+                      </a:pPr>
+                      <a:r>
+                        <a:rPr lang="en-US" sz="850" b="1" dirty="0">
+                          <a:solidFill>
+                            <a:srgbClr val="1F2933"/>
+                          </a:solidFill>
+                          <a:latin typeface="Arial" pitchFamily="34" charset="0"/>
+                          <a:ea typeface="Arial" pitchFamily="34" charset="-122"/>
+                          <a:cs typeface="Arial" pitchFamily="34" charset="-120"/>
+                        </a:rPr>
+                        <a:t>E  Contraction peak → min. speed (CTPMS)</a:t>
+                      </a:r>
+                      <a:endParaRPr lang="en-US" sz="850" dirty="0">
+                        <a:latin typeface="Arial" charset="0"/>
+                        <a:ea typeface="Arial" charset="0"/>
+                        <a:cs typeface="Arial" charset="0"/>
+                      </a:endParaRPr>
+                    </a:p>
+                  </a:txBody>
+                  <a:tcPr marL="45720" marR="45720" marT="45720" marB="45720" anchor="ctr">
+                    <a:lnL w="6350" cap="flat" cmpd="sng" algn="ctr">
+                      <a:solidFill>
+                        <a:srgbClr val="DDDDDD"/>
+                      </a:solidFill>
+                      <a:prstDash val="solid"/>
+                      <a:round/>
+                      <a:headEnd type="none" w="med" len="med"/>
+                      <a:tailEnd type="none" w="med" len="med"/>
+                    </a:lnL>
+                    <a:lnR w="6350" cap="flat" cmpd="sng" algn="ctr">
+                      <a:solidFill>
+                        <a:srgbClr val="DDDDDD"/>
+                      </a:solidFill>
+                      <a:prstDash val="solid"/>
+                      <a:round/>
+                      <a:headEnd type="none" w="med" len="med"/>
+                      <a:tailEnd type="none" w="med" len="med"/>
+                    </a:lnR>
+                    <a:lnT w="6350" cap="flat" cmpd="sng" algn="ctr">
+                      <a:solidFill>
+                        <a:srgbClr val="DDDDDD"/>
+                      </a:solidFill>
+                      <a:prstDash val="solid"/>
+                      <a:round/>
+                      <a:headEnd type="none" w="med" len="med"/>
+                      <a:tailEnd type="none" w="med" len="med"/>
+                    </a:lnT>
+                    <a:lnB w="6350" cap="flat" cmpd="sng" algn="ctr">
+                      <a:solidFill>
+                        <a:srgbClr val="DDDDDD"/>
+                      </a:solidFill>
+                      <a:prstDash val="solid"/>
+                      <a:round/>
+                      <a:headEnd type="none" w="med" len="med"/>
+                      <a:tailEnd type="none" w="med" len="med"/>
+                    </a:lnB>
+                    <a:solidFill>
+                      <a:srgbClr val="FFFFFF"/>
+                    </a:solidFill>
+                  </a:tcPr>
+                </a:tc>
+                <a:tc>
+                  <a:txBody>
+                    <a:bodyPr/>
+                    <a:lstStyle/>
+                    <a:p>
+                      <a:pPr indent="0" marL="0">
+                        <a:buNone/>
+                      </a:pPr>
+                      <a:r>
+                        <a:rPr lang="en-US" sz="850" dirty="0">
+                          <a:solidFill>
+                            <a:srgbClr val="1F2933"/>
+                          </a:solidFill>
+                          <a:latin typeface="Arial" pitchFamily="34" charset="0"/>
+                          <a:ea typeface="Arial" pitchFamily="34" charset="-122"/>
+                          <a:cs typeface="Arial" pitchFamily="34" charset="-120"/>
+                        </a:rPr>
+                        <a:t>MCS → 두 봉우리 사이 최소 속도(수축 끝, 잠깐 멈춤)까지</a:t>
+                      </a:r>
+                      <a:endParaRPr lang="en-US" sz="850" dirty="0">
+                        <a:latin typeface="Arial" charset="0"/>
+                        <a:ea typeface="Arial" charset="0"/>
+                        <a:cs typeface="Arial" charset="0"/>
+                      </a:endParaRPr>
+                    </a:p>
+                  </a:txBody>
+                  <a:tcPr marL="45720" marR="45720" marT="45720" marB="45720" anchor="ctr">
+                    <a:lnL w="6350" cap="flat" cmpd="sng" algn="ctr">
+                      <a:solidFill>
+                        <a:srgbClr val="DDDDDD"/>
+                      </a:solidFill>
+                      <a:prstDash val="solid"/>
+                      <a:round/>
+                      <a:headEnd type="none" w="med" len="med"/>
+                      <a:tailEnd type="none" w="med" len="med"/>
+                    </a:lnL>
+                    <a:lnR w="6350" cap="flat" cmpd="sng" algn="ctr">
+                      <a:solidFill>
+                        <a:srgbClr val="DDDDDD"/>
+                      </a:solidFill>
+                      <a:prstDash val="solid"/>
+                      <a:round/>
+                      <a:headEnd type="none" w="med" len="med"/>
+                      <a:tailEnd type="none" w="med" len="med"/>
+                    </a:lnR>
+                    <a:lnT w="6350" cap="flat" cmpd="sng" algn="ctr">
+                      <a:solidFill>
+                        <a:srgbClr val="DDDDDD"/>
+                      </a:solidFill>
+                      <a:prstDash val="solid"/>
+                      <a:round/>
+                      <a:headEnd type="none" w="med" len="med"/>
+                      <a:tailEnd type="none" w="med" len="med"/>
+                    </a:lnT>
+                    <a:lnB w="6350" cap="flat" cmpd="sng" algn="ctr">
+                      <a:solidFill>
+                        <a:srgbClr val="DDDDDD"/>
+                      </a:solidFill>
+                      <a:prstDash val="solid"/>
+                      <a:round/>
+                      <a:headEnd type="none" w="med" len="med"/>
+                      <a:tailEnd type="none" w="med" len="med"/>
+                    </a:lnB>
+                    <a:solidFill>
+                      <a:srgbClr val="FFFFFF"/>
+                    </a:solidFill>
+                  </a:tcPr>
+                </a:tc>
+                <a:tc>
+                  <a:txBody>
+                    <a:bodyPr/>
+                    <a:lstStyle/>
+                    <a:p>
+                      <a:pPr indent="0" marL="0">
+                        <a:buNone/>
+                      </a:pPr>
+                      <a:r>
+                        <a:rPr lang="en-US" sz="850" dirty="0">
+                          <a:solidFill>
+                            <a:srgbClr val="1F2933"/>
+                          </a:solidFill>
+                          <a:latin typeface="Arial" pitchFamily="34" charset="0"/>
+                          <a:ea typeface="Arial" pitchFamily="34" charset="-122"/>
+                          <a:cs typeface="Arial" pitchFamily="34" charset="-120"/>
+                        </a:rPr>
+                        <a:t>수축 후반이 길게 끌림 / 수축 상태 유지</a:t>
+                      </a:r>
+                      <a:endParaRPr lang="en-US" sz="850" dirty="0">
+                        <a:latin typeface="Arial" charset="0"/>
+                        <a:ea typeface="Arial" charset="0"/>
+                        <a:cs typeface="Arial" charset="0"/>
+                      </a:endParaRPr>
+                    </a:p>
+                  </a:txBody>
+                  <a:tcPr marL="45720" marR="45720" marT="45720" marB="45720" anchor="ctr">
+                    <a:lnL w="6350" cap="flat" cmpd="sng" algn="ctr">
+                      <a:solidFill>
+                        <a:srgbClr val="DDDDDD"/>
+                      </a:solidFill>
+                      <a:prstDash val="solid"/>
+                      <a:round/>
+                      <a:headEnd type="none" w="med" len="med"/>
+                      <a:tailEnd type="none" w="med" len="med"/>
+                    </a:lnL>
+                    <a:lnR w="6350" cap="flat" cmpd="sng" algn="ctr">
+                      <a:solidFill>
+                        <a:srgbClr val="DDDDDD"/>
+                      </a:solidFill>
+                      <a:prstDash val="solid"/>
+                      <a:round/>
+                      <a:headEnd type="none" w="med" len="med"/>
+                      <a:tailEnd type="none" w="med" len="med"/>
+                    </a:lnR>
+                    <a:lnT w="6350" cap="flat" cmpd="sng" algn="ctr">
+                      <a:solidFill>
+                        <a:srgbClr val="DDDDDD"/>
+                      </a:solidFill>
+                      <a:prstDash val="solid"/>
+                      <a:round/>
+                      <a:headEnd type="none" w="med" len="med"/>
+                      <a:tailEnd type="none" w="med" len="med"/>
+                    </a:lnT>
+                    <a:lnB w="6350" cap="flat" cmpd="sng" algn="ctr">
+                      <a:solidFill>
+                        <a:srgbClr val="DDDDDD"/>
+                      </a:solidFill>
+                      <a:prstDash val="solid"/>
+                      <a:round/>
+                      <a:headEnd type="none" w="med" len="med"/>
+                      <a:tailEnd type="none" w="med" len="med"/>
+                    </a:lnB>
+                    <a:solidFill>
+                      <a:srgbClr val="FFFFFF"/>
+                    </a:solidFill>
+                  </a:tcPr>
+                </a:tc>
+                <a:tc>
+                  <a:txBody>
+                    <a:bodyPr/>
+                    <a:lstStyle/>
+                    <a:p>
+                      <a:pPr indent="0" marL="0">
+                        <a:buNone/>
+                      </a:pPr>
+                      <a:r>
+                        <a:rPr lang="en-US" sz="850" dirty="0">
+                          <a:solidFill>
+                            <a:srgbClr val="1F2933"/>
+                          </a:solidFill>
+                          <a:latin typeface="Arial" pitchFamily="34" charset="0"/>
+                          <a:ea typeface="Arial" pitchFamily="34" charset="-122"/>
+                          <a:cs typeface="Arial" pitchFamily="34" charset="-120"/>
+                        </a:rPr>
+                        <a:t>C6 0.04 → 0.40, AR05 0.25 → 0.46 s. 가장 크게 늘어난 구간 → 수축 상태가 오래 지속</a:t>
+                      </a:r>
+                      <a:endParaRPr lang="en-US" sz="850" dirty="0">
+                        <a:latin typeface="Arial" charset="0"/>
+                        <a:ea typeface="Arial" charset="0"/>
+                        <a:cs typeface="Arial" charset="0"/>
+                      </a:endParaRPr>
+                    </a:p>
+                  </a:txBody>
+                  <a:tcPr marL="45720" marR="45720" marT="45720" marB="45720" anchor="ctr">
+                    <a:lnL w="6350" cap="flat" cmpd="sng" algn="ctr">
+                      <a:solidFill>
+                        <a:srgbClr val="DDDDDD"/>
+                      </a:solidFill>
+                      <a:prstDash val="solid"/>
+                      <a:round/>
+                      <a:headEnd type="none" w="med" len="med"/>
+                      <a:tailEnd type="none" w="med" len="med"/>
+                    </a:lnL>
+                    <a:lnR w="6350" cap="flat" cmpd="sng" algn="ctr">
+                      <a:solidFill>
+                        <a:srgbClr val="DDDDDD"/>
+                      </a:solidFill>
+                      <a:prstDash val="solid"/>
+                      <a:round/>
+                      <a:headEnd type="none" w="med" len="med"/>
+                      <a:tailEnd type="none" w="med" len="med"/>
+                    </a:lnR>
+                    <a:lnT w="6350" cap="flat" cmpd="sng" algn="ctr">
+                      <a:solidFill>
+                        <a:srgbClr val="DDDDDD"/>
+                      </a:solidFill>
+                      <a:prstDash val="solid"/>
+                      <a:round/>
+                      <a:headEnd type="none" w="med" len="med"/>
+                      <a:tailEnd type="none" w="med" len="med"/>
+                    </a:lnT>
+                    <a:lnB w="6350" cap="flat" cmpd="sng" algn="ctr">
+                      <a:solidFill>
+                        <a:srgbClr val="DDDDDD"/>
+                      </a:solidFill>
+                      <a:prstDash val="solid"/>
+                      <a:round/>
+                      <a:headEnd type="none" w="med" len="med"/>
+                      <a:tailEnd type="none" w="med" len="med"/>
+                    </a:lnB>
+                    <a:solidFill>
+                      <a:srgbClr val="FFFFFF"/>
+                    </a:solidFill>
+                  </a:tcPr>
+                </a:tc>
+              </a:tr>
+              <a:tr h="566928">
+                <a:tc>
+                  <a:txBody>
+                    <a:bodyPr/>
+                    <a:lstStyle/>
+                    <a:p>
+                      <a:pPr indent="0" marL="0">
+                        <a:buNone/>
+                      </a:pPr>
+                      <a:r>
+                        <a:rPr lang="en-US" sz="850" b="1" dirty="0">
+                          <a:solidFill>
+                            <a:srgbClr val="1F2933"/>
+                          </a:solidFill>
+                          <a:latin typeface="Arial" pitchFamily="34" charset="0"/>
+                          <a:ea typeface="Arial" pitchFamily="34" charset="-122"/>
+                          <a:cs typeface="Arial" pitchFamily="34" charset="-120"/>
+                        </a:rPr>
+                        <a:t>H  Contraction time (CT = CTP + CTPMS)</a:t>
+                      </a:r>
+                      <a:endParaRPr lang="en-US" sz="850" dirty="0">
+                        <a:latin typeface="Arial" charset="0"/>
+                        <a:ea typeface="Arial" charset="0"/>
+                        <a:cs typeface="Arial" charset="0"/>
+                      </a:endParaRPr>
+                    </a:p>
+                  </a:txBody>
+                  <a:tcPr marL="45720" marR="45720" marT="45720" marB="45720" anchor="ctr">
+                    <a:lnL w="6350" cap="flat" cmpd="sng" algn="ctr">
+                      <a:solidFill>
+                        <a:srgbClr val="DDDDDD"/>
+                      </a:solidFill>
+                      <a:prstDash val="solid"/>
+                      <a:round/>
+                      <a:headEnd type="none" w="med" len="med"/>
+                      <a:tailEnd type="none" w="med" len="med"/>
+                    </a:lnL>
+                    <a:lnR w="6350" cap="flat" cmpd="sng" algn="ctr">
+                      <a:solidFill>
+                        <a:srgbClr val="DDDDDD"/>
+                      </a:solidFill>
+                      <a:prstDash val="solid"/>
+                      <a:round/>
+                      <a:headEnd type="none" w="med" len="med"/>
+                      <a:tailEnd type="none" w="med" len="med"/>
+                    </a:lnR>
+                    <a:lnT w="6350" cap="flat" cmpd="sng" algn="ctr">
+                      <a:solidFill>
+                        <a:srgbClr val="DDDDDD"/>
+                      </a:solidFill>
+                      <a:prstDash val="solid"/>
+                      <a:round/>
+                      <a:headEnd type="none" w="med" len="med"/>
+                      <a:tailEnd type="none" w="med" len="med"/>
+                    </a:lnT>
+                    <a:lnB w="6350" cap="flat" cmpd="sng" algn="ctr">
+                      <a:solidFill>
+                        <a:srgbClr val="DDDDDD"/>
+                      </a:solidFill>
+                      <a:prstDash val="solid"/>
+                      <a:round/>
+                      <a:headEnd type="none" w="med" len="med"/>
+                      <a:tailEnd type="none" w="med" len="med"/>
+                    </a:lnB>
+                    <a:solidFill>
+                      <a:srgbClr val="F3F4F6"/>
+                    </a:solidFill>
+                  </a:tcPr>
+                </a:tc>
+                <a:tc>
+                  <a:txBody>
+                    <a:bodyPr/>
+                    <a:lstStyle/>
+                    <a:p>
+                      <a:pPr indent="0" marL="0">
+                        <a:buNone/>
+                      </a:pPr>
+                      <a:r>
+                        <a:rPr lang="en-US" sz="850" dirty="0">
+                          <a:solidFill>
+                            <a:srgbClr val="1F2933"/>
+                          </a:solidFill>
+                          <a:latin typeface="Arial" pitchFamily="34" charset="0"/>
+                          <a:ea typeface="Arial" pitchFamily="34" charset="-122"/>
+                          <a:cs typeface="Arial" pitchFamily="34" charset="-120"/>
+                        </a:rPr>
+                        <a:t>파형 시작 → 수축 끝</a:t>
+                      </a:r>
+                      <a:endParaRPr lang="en-US" sz="850" dirty="0">
+                        <a:latin typeface="Arial" charset="0"/>
+                        <a:ea typeface="Arial" charset="0"/>
+                        <a:cs typeface="Arial" charset="0"/>
+                      </a:endParaRPr>
+                    </a:p>
+                  </a:txBody>
+                  <a:tcPr marL="45720" marR="45720" marT="45720" marB="45720" anchor="ctr">
+                    <a:lnL w="6350" cap="flat" cmpd="sng" algn="ctr">
+                      <a:solidFill>
+                        <a:srgbClr val="DDDDDD"/>
+                      </a:solidFill>
+                      <a:prstDash val="solid"/>
+                      <a:round/>
+                      <a:headEnd type="none" w="med" len="med"/>
+                      <a:tailEnd type="none" w="med" len="med"/>
+                    </a:lnL>
+                    <a:lnR w="6350" cap="flat" cmpd="sng" algn="ctr">
+                      <a:solidFill>
+                        <a:srgbClr val="DDDDDD"/>
+                      </a:solidFill>
+                      <a:prstDash val="solid"/>
+                      <a:round/>
+                      <a:headEnd type="none" w="med" len="med"/>
+                      <a:tailEnd type="none" w="med" len="med"/>
+                    </a:lnR>
+                    <a:lnT w="6350" cap="flat" cmpd="sng" algn="ctr">
+                      <a:solidFill>
+                        <a:srgbClr val="DDDDDD"/>
+                      </a:solidFill>
+                      <a:prstDash val="solid"/>
+                      <a:round/>
+                      <a:headEnd type="none" w="med" len="med"/>
+                      <a:tailEnd type="none" w="med" len="med"/>
+                    </a:lnT>
+                    <a:lnB w="6350" cap="flat" cmpd="sng" algn="ctr">
+                      <a:solidFill>
+                        <a:srgbClr val="DDDDDD"/>
+                      </a:solidFill>
+                      <a:prstDash val="solid"/>
+                      <a:round/>
+                      <a:headEnd type="none" w="med" len="med"/>
+                      <a:tailEnd type="none" w="med" len="med"/>
+                    </a:lnB>
+                    <a:solidFill>
+                      <a:srgbClr val="F3F4F6"/>
+                    </a:solidFill>
+                  </a:tcPr>
+                </a:tc>
+                <a:tc>
+                  <a:txBody>
+                    <a:bodyPr/>
+                    <a:lstStyle/>
+                    <a:p>
+                      <a:pPr indent="0" marL="0">
+                        <a:buNone/>
+                      </a:pPr>
+                      <a:r>
+                        <a:rPr lang="en-US" sz="850" dirty="0">
+                          <a:solidFill>
+                            <a:srgbClr val="1F2933"/>
+                          </a:solidFill>
+                          <a:latin typeface="Arial" pitchFamily="34" charset="0"/>
+                          <a:ea typeface="Arial" pitchFamily="34" charset="-122"/>
+                          <a:cs typeface="Arial" pitchFamily="34" charset="-120"/>
+                        </a:rPr>
+                        <a:t>수축 전체가 느림</a:t>
+                      </a:r>
+                      <a:endParaRPr lang="en-US" sz="850" dirty="0">
+                        <a:latin typeface="Arial" charset="0"/>
+                        <a:ea typeface="Arial" charset="0"/>
+                        <a:cs typeface="Arial" charset="0"/>
+                      </a:endParaRPr>
+                    </a:p>
+                  </a:txBody>
+                  <a:tcPr marL="45720" marR="45720" marT="45720" marB="45720" anchor="ctr">
+                    <a:lnL w="6350" cap="flat" cmpd="sng" algn="ctr">
+                      <a:solidFill>
+                        <a:srgbClr val="DDDDDD"/>
+                      </a:solidFill>
+                      <a:prstDash val="solid"/>
+                      <a:round/>
+                      <a:headEnd type="none" w="med" len="med"/>
+                      <a:tailEnd type="none" w="med" len="med"/>
+                    </a:lnL>
+                    <a:lnR w="6350" cap="flat" cmpd="sng" algn="ctr">
+                      <a:solidFill>
+                        <a:srgbClr val="DDDDDD"/>
+                      </a:solidFill>
+                      <a:prstDash val="solid"/>
+                      <a:round/>
+                      <a:headEnd type="none" w="med" len="med"/>
+                      <a:tailEnd type="none" w="med" len="med"/>
+                    </a:lnR>
+                    <a:lnT w="6350" cap="flat" cmpd="sng" algn="ctr">
+                      <a:solidFill>
+                        <a:srgbClr val="DDDDDD"/>
+                      </a:solidFill>
+                      <a:prstDash val="solid"/>
+                      <a:round/>
+                      <a:headEnd type="none" w="med" len="med"/>
+                      <a:tailEnd type="none" w="med" len="med"/>
+                    </a:lnT>
+                    <a:lnB w="6350" cap="flat" cmpd="sng" algn="ctr">
+                      <a:solidFill>
+                        <a:srgbClr val="DDDDDD"/>
+                      </a:solidFill>
+                      <a:prstDash val="solid"/>
+                      <a:round/>
+                      <a:headEnd type="none" w="med" len="med"/>
+                      <a:tailEnd type="none" w="med" len="med"/>
+                    </a:lnB>
+                    <a:solidFill>
+                      <a:srgbClr val="F3F4F6"/>
+                    </a:solidFill>
+                  </a:tcPr>
+                </a:tc>
+                <a:tc>
+                  <a:txBody>
+                    <a:bodyPr/>
+                    <a:lstStyle/>
+                    <a:p>
+                      <a:pPr indent="0" marL="0">
+                        <a:buNone/>
+                      </a:pPr>
+                      <a:r>
+                        <a:rPr lang="en-US" sz="850" dirty="0">
+                          <a:solidFill>
+                            <a:srgbClr val="1F2933"/>
+                          </a:solidFill>
+                          <a:latin typeface="Arial" pitchFamily="34" charset="0"/>
+                          <a:ea typeface="Arial" pitchFamily="34" charset="-122"/>
+                          <a:cs typeface="Arial" pitchFamily="34" charset="-120"/>
+                        </a:rPr>
+                        <a:t>C6 0.09 → 0.50, AR05 0.34 → 0.69 s</a:t>
+                      </a:r>
+                      <a:endParaRPr lang="en-US" sz="850" dirty="0">
+                        <a:latin typeface="Arial" charset="0"/>
+                        <a:ea typeface="Arial" charset="0"/>
+                        <a:cs typeface="Arial" charset="0"/>
+                      </a:endParaRPr>
+                    </a:p>
+                  </a:txBody>
+                  <a:tcPr marL="45720" marR="45720" marT="45720" marB="45720" anchor="ctr">
+                    <a:lnL w="6350" cap="flat" cmpd="sng" algn="ctr">
+                      <a:solidFill>
+                        <a:srgbClr val="DDDDDD"/>
+                      </a:solidFill>
+                      <a:prstDash val="solid"/>
+                      <a:round/>
+                      <a:headEnd type="none" w="med" len="med"/>
+                      <a:tailEnd type="none" w="med" len="med"/>
+                    </a:lnL>
+                    <a:lnR w="6350" cap="flat" cmpd="sng" algn="ctr">
+                      <a:solidFill>
+                        <a:srgbClr val="DDDDDD"/>
+                      </a:solidFill>
+                      <a:prstDash val="solid"/>
+                      <a:round/>
+                      <a:headEnd type="none" w="med" len="med"/>
+                      <a:tailEnd type="none" w="med" len="med"/>
+                    </a:lnR>
+                    <a:lnT w="6350" cap="flat" cmpd="sng" algn="ctr">
+                      <a:solidFill>
+                        <a:srgbClr val="DDDDDD"/>
+                      </a:solidFill>
+                      <a:prstDash val="solid"/>
+                      <a:round/>
+                      <a:headEnd type="none" w="med" len="med"/>
+                      <a:tailEnd type="none" w="med" len="med"/>
+                    </a:lnT>
+                    <a:lnB w="6350" cap="flat" cmpd="sng" algn="ctr">
+                      <a:solidFill>
+                        <a:srgbClr val="DDDDDD"/>
+                      </a:solidFill>
+                      <a:prstDash val="solid"/>
+                      <a:round/>
+                      <a:headEnd type="none" w="med" len="med"/>
+                      <a:tailEnd type="none" w="med" len="med"/>
+                    </a:lnB>
+                    <a:solidFill>
+                      <a:srgbClr val="F3F4F6"/>
+                    </a:solidFill>
+                  </a:tcPr>
+                </a:tc>
+              </a:tr>
+              <a:tr h="566928">
+                <a:tc>
+                  <a:txBody>
+                    <a:bodyPr/>
+                    <a:lstStyle/>
+                    <a:p>
+                      <a:pPr indent="0" marL="0">
+                        <a:buNone/>
+                      </a:pPr>
+                      <a:r>
+                        <a:rPr lang="en-US" sz="850" b="1" dirty="0">
+                          <a:solidFill>
+                            <a:srgbClr val="1F2933"/>
+                          </a:solidFill>
+                          <a:latin typeface="Arial" pitchFamily="34" charset="0"/>
+                          <a:ea typeface="Arial" pitchFamily="34" charset="-122"/>
+                          <a:cs typeface="Arial" pitchFamily="34" charset="-120"/>
+                        </a:rPr>
+                        <a:t>G  Contraction–relaxation time (CRT = CT + RT)</a:t>
+                      </a:r>
+                      <a:endParaRPr lang="en-US" sz="850" dirty="0">
+                        <a:latin typeface="Arial" charset="0"/>
+                        <a:ea typeface="Arial" charset="0"/>
+                        <a:cs typeface="Arial" charset="0"/>
+                      </a:endParaRPr>
+                    </a:p>
+                  </a:txBody>
+                  <a:tcPr marL="45720" marR="45720" marT="45720" marB="45720" anchor="ctr">
+                    <a:lnL w="6350" cap="flat" cmpd="sng" algn="ctr">
+                      <a:solidFill>
+                        <a:srgbClr val="DDDDDD"/>
+                      </a:solidFill>
+                      <a:prstDash val="solid"/>
+                      <a:round/>
+                      <a:headEnd type="none" w="med" len="med"/>
+                      <a:tailEnd type="none" w="med" len="med"/>
+                    </a:lnL>
+                    <a:lnR w="6350" cap="flat" cmpd="sng" algn="ctr">
+                      <a:solidFill>
+                        <a:srgbClr val="DDDDDD"/>
+                      </a:solidFill>
+                      <a:prstDash val="solid"/>
+                      <a:round/>
+                      <a:headEnd type="none" w="med" len="med"/>
+                      <a:tailEnd type="none" w="med" len="med"/>
+                    </a:lnR>
+                    <a:lnT w="6350" cap="flat" cmpd="sng" algn="ctr">
+                      <a:solidFill>
+                        <a:srgbClr val="DDDDDD"/>
+                      </a:solidFill>
+                      <a:prstDash val="solid"/>
+                      <a:round/>
+                      <a:headEnd type="none" w="med" len="med"/>
+                      <a:tailEnd type="none" w="med" len="med"/>
+                    </a:lnT>
+                    <a:lnB w="6350" cap="flat" cmpd="sng" algn="ctr">
+                      <a:solidFill>
+                        <a:srgbClr val="DDDDDD"/>
+                      </a:solidFill>
+                      <a:prstDash val="solid"/>
+                      <a:round/>
+                      <a:headEnd type="none" w="med" len="med"/>
+                      <a:tailEnd type="none" w="med" len="med"/>
+                    </a:lnB>
+                    <a:solidFill>
+                      <a:srgbClr val="FFFFFF"/>
+                    </a:solidFill>
+                  </a:tcPr>
+                </a:tc>
+                <a:tc>
+                  <a:txBody>
+                    <a:bodyPr/>
+                    <a:lstStyle/>
+                    <a:p>
+                      <a:pPr indent="0" marL="0">
+                        <a:buNone/>
+                      </a:pPr>
+                      <a:r>
+                        <a:rPr lang="en-US" sz="850" dirty="0">
+                          <a:solidFill>
+                            <a:srgbClr val="1F2933"/>
+                          </a:solidFill>
+                          <a:latin typeface="Arial" pitchFamily="34" charset="0"/>
+                          <a:ea typeface="Arial" pitchFamily="34" charset="-122"/>
+                          <a:cs typeface="Arial" pitchFamily="34" charset="-120"/>
+                        </a:rPr>
+                        <a:t>파형 시작 → 이완 끝 (한 박동의 전체 길이)</a:t>
+                      </a:r>
+                      <a:endParaRPr lang="en-US" sz="850" dirty="0">
+                        <a:latin typeface="Arial" charset="0"/>
+                        <a:ea typeface="Arial" charset="0"/>
+                        <a:cs typeface="Arial" charset="0"/>
+                      </a:endParaRPr>
+                    </a:p>
+                  </a:txBody>
+                  <a:tcPr marL="45720" marR="45720" marT="45720" marB="45720" anchor="ctr">
+                    <a:lnL w="6350" cap="flat" cmpd="sng" algn="ctr">
+                      <a:solidFill>
+                        <a:srgbClr val="DDDDDD"/>
+                      </a:solidFill>
+                      <a:prstDash val="solid"/>
+                      <a:round/>
+                      <a:headEnd type="none" w="med" len="med"/>
+                      <a:tailEnd type="none" w="med" len="med"/>
+                    </a:lnL>
+                    <a:lnR w="6350" cap="flat" cmpd="sng" algn="ctr">
+                      <a:solidFill>
+                        <a:srgbClr val="DDDDDD"/>
+                      </a:solidFill>
+                      <a:prstDash val="solid"/>
+                      <a:round/>
+                      <a:headEnd type="none" w="med" len="med"/>
+                      <a:tailEnd type="none" w="med" len="med"/>
+                    </a:lnR>
+                    <a:lnT w="6350" cap="flat" cmpd="sng" algn="ctr">
+                      <a:solidFill>
+                        <a:srgbClr val="DDDDDD"/>
+                      </a:solidFill>
+                      <a:prstDash val="solid"/>
+                      <a:round/>
+                      <a:headEnd type="none" w="med" len="med"/>
+                      <a:tailEnd type="none" w="med" len="med"/>
+                    </a:lnT>
+                    <a:lnB w="6350" cap="flat" cmpd="sng" algn="ctr">
+                      <a:solidFill>
+                        <a:srgbClr val="DDDDDD"/>
+                      </a:solidFill>
+                      <a:prstDash val="solid"/>
+                      <a:round/>
+                      <a:headEnd type="none" w="med" len="med"/>
+                      <a:tailEnd type="none" w="med" len="med"/>
+                    </a:lnB>
+                    <a:solidFill>
+                      <a:srgbClr val="FFFFFF"/>
+                    </a:solidFill>
+                  </a:tcPr>
+                </a:tc>
+                <a:tc>
+                  <a:txBody>
+                    <a:bodyPr/>
+                    <a:lstStyle/>
+                    <a:p>
+                      <a:pPr indent="0" marL="0">
+                        <a:buNone/>
+                      </a:pPr>
+                      <a:r>
+                        <a:rPr lang="en-US" sz="850" dirty="0">
+                          <a:solidFill>
+                            <a:srgbClr val="1F2933"/>
+                          </a:solidFill>
+                          <a:latin typeface="Arial" pitchFamily="34" charset="0"/>
+                          <a:ea typeface="Arial" pitchFamily="34" charset="-122"/>
+                          <a:cs typeface="Arial" pitchFamily="34" charset="-120"/>
+                        </a:rPr>
+                        <a:t>박동 하나가 오래 걸림. 활동전위 지속시간 연장과 대응</a:t>
+                      </a:r>
+                      <a:endParaRPr lang="en-US" sz="850" dirty="0">
+                        <a:latin typeface="Arial" charset="0"/>
+                        <a:ea typeface="Arial" charset="0"/>
+                        <a:cs typeface="Arial" charset="0"/>
+                      </a:endParaRPr>
+                    </a:p>
+                  </a:txBody>
+                  <a:tcPr marL="45720" marR="45720" marT="45720" marB="45720" anchor="ctr">
+                    <a:lnL w="6350" cap="flat" cmpd="sng" algn="ctr">
+                      <a:solidFill>
+                        <a:srgbClr val="DDDDDD"/>
+                      </a:solidFill>
+                      <a:prstDash val="solid"/>
+                      <a:round/>
+                      <a:headEnd type="none" w="med" len="med"/>
+                      <a:tailEnd type="none" w="med" len="med"/>
+                    </a:lnL>
+                    <a:lnR w="6350" cap="flat" cmpd="sng" algn="ctr">
+                      <a:solidFill>
+                        <a:srgbClr val="DDDDDD"/>
+                      </a:solidFill>
+                      <a:prstDash val="solid"/>
+                      <a:round/>
+                      <a:headEnd type="none" w="med" len="med"/>
+                      <a:tailEnd type="none" w="med" len="med"/>
+                    </a:lnR>
+                    <a:lnT w="6350" cap="flat" cmpd="sng" algn="ctr">
+                      <a:solidFill>
+                        <a:srgbClr val="DDDDDD"/>
+                      </a:solidFill>
+                      <a:prstDash val="solid"/>
+                      <a:round/>
+                      <a:headEnd type="none" w="med" len="med"/>
+                      <a:tailEnd type="none" w="med" len="med"/>
+                    </a:lnT>
+                    <a:lnB w="6350" cap="flat" cmpd="sng" algn="ctr">
+                      <a:solidFill>
+                        <a:srgbClr val="DDDDDD"/>
+                      </a:solidFill>
+                      <a:prstDash val="solid"/>
+                      <a:round/>
+                      <a:headEnd type="none" w="med" len="med"/>
+                      <a:tailEnd type="none" w="med" len="med"/>
+                    </a:lnB>
+                    <a:solidFill>
+                      <a:srgbClr val="FFFFFF"/>
+                    </a:solidFill>
+                  </a:tcPr>
+                </a:tc>
+                <a:tc>
+                  <a:txBody>
+                    <a:bodyPr/>
+                    <a:lstStyle/>
+                    <a:p>
+                      <a:pPr indent="0" marL="0">
+                        <a:buNone/>
+                      </a:pPr>
+                      <a:r>
+                        <a:rPr lang="en-US" sz="850" dirty="0">
+                          <a:solidFill>
+                            <a:srgbClr val="1F2933"/>
+                          </a:solidFill>
+                          <a:latin typeface="Arial" pitchFamily="34" charset="0"/>
+                          <a:ea typeface="Arial" pitchFamily="34" charset="-122"/>
+                          <a:cs typeface="Arial" pitchFamily="34" charset="-120"/>
+                        </a:rPr>
+                        <a:t>C6 0.19 → 0.78, AR05 0.71 → 1.37 s. 박동 길이 2–4배 증가</a:t>
+                      </a:r>
+                      <a:endParaRPr lang="en-US" sz="850" dirty="0">
+                        <a:latin typeface="Arial" charset="0"/>
+                        <a:ea typeface="Arial" charset="0"/>
+                        <a:cs typeface="Arial" charset="0"/>
+                      </a:endParaRPr>
+                    </a:p>
+                  </a:txBody>
+                  <a:tcPr marL="45720" marR="45720" marT="45720" marB="45720" anchor="ctr">
+                    <a:lnL w="6350" cap="flat" cmpd="sng" algn="ctr">
+                      <a:solidFill>
+                        <a:srgbClr val="DDDDDD"/>
+                      </a:solidFill>
+                      <a:prstDash val="solid"/>
+                      <a:round/>
+                      <a:headEnd type="none" w="med" len="med"/>
+                      <a:tailEnd type="none" w="med" len="med"/>
+                    </a:lnL>
+                    <a:lnR w="6350" cap="flat" cmpd="sng" algn="ctr">
+                      <a:solidFill>
+                        <a:srgbClr val="DDDDDD"/>
+                      </a:solidFill>
+                      <a:prstDash val="solid"/>
+                      <a:round/>
+                      <a:headEnd type="none" w="med" len="med"/>
+                      <a:tailEnd type="none" w="med" len="med"/>
+                    </a:lnR>
+                    <a:lnT w="6350" cap="flat" cmpd="sng" algn="ctr">
+                      <a:solidFill>
+                        <a:srgbClr val="DDDDDD"/>
+                      </a:solidFill>
+                      <a:prstDash val="solid"/>
+                      <a:round/>
+                      <a:headEnd type="none" w="med" len="med"/>
+                      <a:tailEnd type="none" w="med" len="med"/>
+                    </a:lnT>
+                    <a:lnB w="6350" cap="flat" cmpd="sng" algn="ctr">
+                      <a:solidFill>
+                        <a:srgbClr val="DDDDDD"/>
+                      </a:solidFill>
+                      <a:prstDash val="solid"/>
+                      <a:round/>
+                      <a:headEnd type="none" w="med" len="med"/>
+                      <a:tailEnd type="none" w="med" len="med"/>
+                    </a:lnB>
+                    <a:solidFill>
+                      <a:srgbClr val="FFFFFF"/>
+                    </a:solidFill>
+                  </a:tcPr>
+                </a:tc>
+              </a:tr>
+            </a:tbl>
+          </a:graphicData>
+        </a:graphic>
+      </p:graphicFrame>
+      <p:sp>
+        <p:nvSpPr>
+          <p:cNvPr id="5" name="Text 2"/>
+          <p:cNvSpPr txBox="1"/>
+          <p:nvPr/>
+        </p:nvSpPr>
+        <p:spPr>
+          <a:xfrm>
+            <a:off x="457200" y="4114800"/>
+            <a:ext cx="8229600" cy="594360"/>
+          </a:xfrm>
+          <a:prstGeom prst="rect">
+            <a:avLst/>
+          </a:prstGeom>
+          <a:noFill/>
+          <a:ln/>
+        </p:spPr>
+        <p:txBody>
+          <a:bodyPr wrap="square" lIns="0" tIns="0" rIns="0" bIns="0" rtlCol="0" anchor="ctr"/>
+          <a:lstStyle/>
+          <a:p>
+            <a:pPr indent="0" marL="0">
+              <a:buNone/>
+            </a:pPr>
+            <a:r>
+              <a:rPr lang="en-US" sz="1050" b="1" dirty="0">
+                <a:solidFill>
+                  <a:srgbClr val="1F2933"/>
+                </a:solidFill>
+                <a:latin typeface="Arial" pitchFamily="34" charset="0"/>
+                <a:ea typeface="Arial" pitchFamily="34" charset="-122"/>
+                <a:cs typeface="Arial" pitchFamily="34" charset="-120"/>
+              </a:rPr>
+              <a:t>주의: 박동수가 느려지면 이 시간들은 자연히 길어집니다. '약물이 수축 동역학을 늦췄다'고 말하려면 (1) 박동수가 비슷한 조건끼리 비교하거나 (2) pacing으로 박동수를 고정하거나 (3) CRT ÷ 박동 간격(수축이 차지하는 비율)로 정규화해서 보세요.</a:t>
+            </a:r>
+            <a:endParaRPr lang="en-US" sz="1050" dirty="0"/>
+          </a:p>
+        </p:txBody>
+      </p:sp>
+      <p:sp>
+        <p:nvSpPr>
+          <p:cNvPr id="6" name="Text 3"/>
+          <p:cNvSpPr txBox="1"/>
+          <p:nvPr/>
+        </p:nvSpPr>
+        <p:spPr>
+          <a:xfrm>
+            <a:off x="457200" y="4800600"/>
+            <a:ext cx="8229600" cy="228600"/>
+          </a:xfrm>
+          <a:prstGeom prst="rect">
+            <a:avLst/>
+          </a:prstGeom>
+          <a:noFill/>
+          <a:ln/>
+        </p:spPr>
+        <p:txBody>
+          <a:bodyPr wrap="square" lIns="0" tIns="0" rIns="0" bIns="0" rtlCol="0" anchor="ctr"/>
+          <a:lstStyle/>
+          <a:p>
+            <a:pPr algn="r" indent="0" marL="0">
+              <a:buNone/>
+            </a:pPr>
+            <a:r>
+              <a:rPr lang="en-US" sz="800" dirty="0">
+                <a:solidFill>
+                  <a:srgbClr val="6B7280"/>
+                </a:solidFill>
+                <a:latin typeface="Arial" pitchFamily="34" charset="0"/>
+                <a:ea typeface="Arial" pitchFamily="34" charset="-122"/>
+                <a:cs typeface="Arial" pitchFamily="34" charset="-120"/>
+              </a:rPr>
+              <a:t>Cardiomyocyte Analyzer · 분석 프로토콜  15</a:t>
+            </a:r>
+            <a:endParaRPr lang="en-US" sz="800" dirty="0"/>
+          </a:p>
+        </p:txBody>
+      </p:sp>
+    </p:spTree>
+  </p:cSld>
+  <p:clrMapOvr>
+    <a:masterClrMapping/>
+  </p:clrMapOvr>
+</p:sld>
+</file>
+
+<file path=ppt/slides/slide16.xml><?xml version="1.0" encoding="utf-8"?>
+<p:sld xmlns:a="http://schemas.openxmlformats.org/drawingml/2006/main" xmlns:r="http://schemas.openxmlformats.org/officeDocument/2006/relationships" xmlns:p="http://schemas.openxmlformats.org/presentationml/2006/main">
+  <p:cSld name="Slide 16">
+    <p:bg>
+      <p:bgPr>
+        <a:solidFill>
+          <a:srgbClr val="FFFFFF"/>
+        </a:solidFill>
+      </p:bgPr>
+    </p:bg>
+    <p:spTree>
+      <p:nvGrpSpPr>
+        <p:cNvPr id="1" name=""/>
+        <p:cNvGrpSpPr/>
+        <p:nvPr/>
+      </p:nvGrpSpPr>
+      <p:grpSpPr>
+        <a:xfrm>
+          <a:off x="0" y="0"/>
+          <a:ext cx="0" cy="0"/>
+          <a:chOff x="0" y="0"/>
+          <a:chExt cx="0" cy="0"/>
+        </a:xfrm>
+      </p:grpSpPr>
+      <p:sp>
+        <p:nvSpPr>
+          <p:cNvPr id="2" name="Text 0"/>
+          <p:cNvSpPr txBox="1"/>
+          <p:nvPr/>
+        </p:nvSpPr>
+        <p:spPr>
+          <a:xfrm>
+            <a:off x="457200" y="274320"/>
+            <a:ext cx="8229600" cy="548640"/>
+          </a:xfrm>
+          <a:prstGeom prst="rect">
+            <a:avLst/>
+          </a:prstGeom>
+          <a:noFill/>
+          <a:ln/>
+        </p:spPr>
+        <p:txBody>
+          <a:bodyPr wrap="square" lIns="0" tIns="0" rIns="0" bIns="0" rtlCol="0" anchor="ctr"/>
+          <a:lstStyle/>
+          <a:p>
+            <a:pPr indent="0" marL="0">
+              <a:buNone/>
+            </a:pPr>
+            <a:r>
+              <a:rPr lang="en-US" sz="2600" b="1" dirty="0">
+                <a:solidFill>
+                  <a:srgbClr val="1F2933"/>
+                </a:solidFill>
+                <a:latin typeface="Arial" pitchFamily="34" charset="0"/>
+                <a:ea typeface="Arial" pitchFamily="34" charset="-122"/>
+                <a:cs typeface="Arial" pitchFamily="34" charset="-120"/>
+              </a:rPr>
+              <a:t>이 데이터의 종합 해석과 다음 단계</a:t>
+            </a:r>
+            <a:endParaRPr lang="en-US" sz="2600" dirty="0"/>
+          </a:p>
+        </p:txBody>
+      </p:sp>
+      <p:sp>
+        <p:nvSpPr>
+          <p:cNvPr id="3" name="Shape 1"/>
+          <p:cNvSpPr/>
+          <p:nvPr/>
+        </p:nvSpPr>
+        <p:spPr>
+          <a:xfrm>
+            <a:off x="457200" y="1188720"/>
+            <a:ext cx="4023360" cy="1920240"/>
+          </a:xfrm>
+          <a:prstGeom prst="roundRect">
+            <a:avLst>
+              <a:gd name="adj" fmla="val 3810"/>
+            </a:avLst>
+          </a:prstGeom>
+          <a:solidFill>
+            <a:srgbClr val="F3F4F6"/>
+          </a:solidFill>
+          <a:ln w="12700">
+            <a:solidFill>
+              <a:srgbClr val="F3F4F6"/>
+            </a:solidFill>
+            <a:prstDash val="solid"/>
+          </a:ln>
+        </p:spPr>
+      </p:sp>
+      <p:sp>
+        <p:nvSpPr>
+          <p:cNvPr id="4" name="Text 2"/>
+          <p:cNvSpPr txBox="1"/>
+          <p:nvPr/>
+        </p:nvSpPr>
+        <p:spPr>
+          <a:xfrm>
+            <a:off x="621792" y="1298448"/>
+            <a:ext cx="3694176" cy="292608"/>
+          </a:xfrm>
+          <a:prstGeom prst="rect">
+            <a:avLst/>
+          </a:prstGeom>
+          <a:noFill/>
+          <a:ln/>
+        </p:spPr>
+        <p:txBody>
+          <a:bodyPr wrap="square" lIns="0" tIns="0" rIns="0" bIns="0" rtlCol="0" anchor="ctr"/>
+          <a:lstStyle/>
+          <a:p>
+            <a:pPr indent="0" marL="0">
+              <a:buNone/>
+            </a:pPr>
+            <a:r>
+              <a:rPr lang="en-US" sz="1300" b="1" dirty="0">
+                <a:solidFill>
+                  <a:srgbClr val="7A1F2B"/>
+                </a:solidFill>
+                <a:latin typeface="Arial" pitchFamily="34" charset="0"/>
+                <a:ea typeface="Arial" pitchFamily="34" charset="-122"/>
+                <a:cs typeface="Arial" pitchFamily="34" charset="-120"/>
+              </a:rPr>
+              <a:t>한 문장 요약 (경향)</a:t>
+            </a:r>
+            <a:endParaRPr lang="en-US" sz="1300" dirty="0"/>
+          </a:p>
+        </p:txBody>
+      </p:sp>
+      <p:sp>
+        <p:nvSpPr>
+          <p:cNvPr id="5" name="Text 3"/>
+          <p:cNvSpPr txBox="1"/>
+          <p:nvPr/>
+        </p:nvSpPr>
+        <p:spPr>
+          <a:xfrm>
+            <a:off x="621792" y="1609344"/>
+            <a:ext cx="3694176" cy="1408176"/>
+          </a:xfrm>
+          <a:prstGeom prst="rect">
+            <a:avLst/>
+          </a:prstGeom>
+          <a:noFill/>
+          <a:ln/>
+        </p:spPr>
+        <p:txBody>
+          <a:bodyPr wrap="square" lIns="0" tIns="0" rIns="0" bIns="0" rtlCol="0" anchor="t"/>
+          <a:lstStyle/>
+          <a:p>
+            <a:pPr indent="0" marL="0">
+              <a:spcAft>
+                <a:spcPts val="300"/>
+              </a:spcAft>
+              <a:buNone/>
+            </a:pPr>
+            <a:r>
+              <a:rPr lang="en-US" sz="1100" dirty="0">
+                <a:solidFill>
+                  <a:srgbClr val="1F2933"/>
+                </a:solidFill>
+                <a:latin typeface="Arial" pitchFamily="34" charset="0"/>
+                <a:ea typeface="Arial" pitchFamily="34" charset="-122"/>
+                <a:cs typeface="Arial" pitchFamily="34" charset="-120"/>
+              </a:rPr>
+              <a:t>UT H 처치는 C6·AR05 두 세포주 모두에서 박동을 느리고 불규칙하게 만들고, 수축·이완 속도를 크게 떨어뜨리며, 한 박동의 수축·이완 단계를 길게 늘였다. 총 이동량(CRA)은 유지되어 '덜 움직임'보다 '느리게 움직임'이 핵심 변화다.</a:t>
+            </a:r>
+            <a:endParaRPr lang="en-US" sz="1100" dirty="0"/>
+          </a:p>
+        </p:txBody>
+      </p:sp>
+      <p:sp>
+        <p:nvSpPr>
+          <p:cNvPr id="6" name="Shape 4"/>
+          <p:cNvSpPr/>
+          <p:nvPr/>
+        </p:nvSpPr>
+        <p:spPr>
+          <a:xfrm>
+            <a:off x="4663440" y="1188720"/>
+            <a:ext cx="4023360" cy="1920240"/>
+          </a:xfrm>
+          <a:prstGeom prst="roundRect">
+            <a:avLst>
+              <a:gd name="adj" fmla="val 3810"/>
+            </a:avLst>
+          </a:prstGeom>
+          <a:solidFill>
+            <a:srgbClr val="F3F4F6"/>
+          </a:solidFill>
+          <a:ln w="12700">
+            <a:solidFill>
+              <a:srgbClr val="F3F4F6"/>
+            </a:solidFill>
+            <a:prstDash val="solid"/>
+          </a:ln>
+        </p:spPr>
+      </p:sp>
+      <p:sp>
+        <p:nvSpPr>
+          <p:cNvPr id="7" name="Text 5"/>
+          <p:cNvSpPr txBox="1"/>
+          <p:nvPr/>
+        </p:nvSpPr>
+        <p:spPr>
+          <a:xfrm>
+            <a:off x="4828032" y="1298448"/>
+            <a:ext cx="3694176" cy="292608"/>
+          </a:xfrm>
+          <a:prstGeom prst="rect">
+            <a:avLst/>
+          </a:prstGeom>
+          <a:noFill/>
+          <a:ln/>
+        </p:spPr>
+        <p:txBody>
+          <a:bodyPr wrap="square" lIns="0" tIns="0" rIns="0" bIns="0" rtlCol="0" anchor="ctr"/>
+          <a:lstStyle/>
+          <a:p>
+            <a:pPr indent="0" marL="0">
+              <a:buNone/>
+            </a:pPr>
+            <a:r>
+              <a:rPr lang="en-US" sz="1300" b="1" dirty="0">
+                <a:solidFill>
+                  <a:srgbClr val="2A9D8F"/>
+                </a:solidFill>
+                <a:latin typeface="Arial" pitchFamily="34" charset="0"/>
+                <a:ea typeface="Arial" pitchFamily="34" charset="-122"/>
+                <a:cs typeface="Arial" pitchFamily="34" charset="-120"/>
+              </a:rPr>
+              <a:t>세포주 차이 (Vehicle끼리)</a:t>
+            </a:r>
+            <a:endParaRPr lang="en-US" sz="1300" dirty="0"/>
+          </a:p>
+        </p:txBody>
+      </p:sp>
+      <p:sp>
+        <p:nvSpPr>
+          <p:cNvPr id="8" name="Text 6"/>
+          <p:cNvSpPr txBox="1"/>
+          <p:nvPr/>
+        </p:nvSpPr>
+        <p:spPr>
+          <a:xfrm>
+            <a:off x="4828032" y="1609344"/>
+            <a:ext cx="3694176" cy="1408176"/>
+          </a:xfrm>
+          <a:prstGeom prst="rect">
+            <a:avLst/>
+          </a:prstGeom>
+          <a:noFill/>
+          <a:ln/>
+        </p:spPr>
+        <p:txBody>
+          <a:bodyPr wrap="square" lIns="0" tIns="0" rIns="0" bIns="0" rtlCol="0" anchor="t"/>
+          <a:lstStyle/>
+          <a:p>
+            <a:pPr indent="0" marL="0">
+              <a:spcAft>
+                <a:spcPts val="300"/>
+              </a:spcAft>
+              <a:buNone/>
+            </a:pPr>
+            <a:r>
+              <a:rPr lang="en-US" sz="1100" dirty="0">
+                <a:solidFill>
+                  <a:srgbClr val="1F2933"/>
+                </a:solidFill>
+                <a:latin typeface="Arial" pitchFamily="34" charset="0"/>
+                <a:ea typeface="Arial" pitchFamily="34" charset="-122"/>
+                <a:cs typeface="Arial" pitchFamily="34" charset="-120"/>
+              </a:rPr>
+              <a:t>AR05는 C6보다 느리고(57 vs 183 BPM) 규칙적이며(IBI CV 6 vs 31 %) 박동당 이동량이 크다(CRA 3.7 vs 1.1). 더 성숙한 수축 패턴일 수 있으나 n=1이라 단정 불가. C6 Vehicle 183 BPM은 영상 10초를 눈으로 세어 확인.</a:t>
+            </a:r>
+            <a:endParaRPr lang="en-US" sz="1100" dirty="0"/>
+          </a:p>
+        </p:txBody>
+      </p:sp>
+      <p:sp>
+        <p:nvSpPr>
+          <p:cNvPr id="9" name="Text 7"/>
+          <p:cNvSpPr txBox="1"/>
+          <p:nvPr/>
+        </p:nvSpPr>
+        <p:spPr>
+          <a:xfrm>
+            <a:off x="457200" y="3291840"/>
+            <a:ext cx="4572000" cy="274320"/>
+          </a:xfrm>
+          <a:prstGeom prst="rect">
+            <a:avLst/>
+          </a:prstGeom>
+          <a:noFill/>
+          <a:ln/>
+        </p:spPr>
+        <p:txBody>
+          <a:bodyPr wrap="square" lIns="0" tIns="0" rIns="0" bIns="0" rtlCol="0" anchor="ctr"/>
+          <a:lstStyle/>
+          <a:p>
+            <a:pPr indent="0" marL="0">
+              <a:buNone/>
+            </a:pPr>
+            <a:r>
+              <a:rPr lang="en-US" sz="1300" b="1" dirty="0">
+                <a:solidFill>
+                  <a:srgbClr val="7A1F2B"/>
+                </a:solidFill>
+                <a:latin typeface="Arial" pitchFamily="34" charset="0"/>
+                <a:ea typeface="Arial" pitchFamily="34" charset="-122"/>
+                <a:cs typeface="Arial" pitchFamily="34" charset="-120"/>
+              </a:rPr>
+              <a:t>논문에 쓰려면</a:t>
+            </a:r>
+            <a:endParaRPr lang="en-US" sz="1300" dirty="0"/>
+          </a:p>
+        </p:txBody>
+      </p:sp>
+      <p:sp>
+        <p:nvSpPr>
+          <p:cNvPr id="10" name="Text 8"/>
+          <p:cNvSpPr txBox="1"/>
+          <p:nvPr/>
+        </p:nvSpPr>
+        <p:spPr>
+          <a:xfrm>
+            <a:off x="457200" y="3566160"/>
+            <a:ext cx="8229600" cy="1188720"/>
+          </a:xfrm>
+          <a:prstGeom prst="rect">
+            <a:avLst/>
+          </a:prstGeom>
+          <a:noFill/>
+          <a:ln/>
+        </p:spPr>
+        <p:txBody>
+          <a:bodyPr wrap="square" lIns="0" tIns="0" rIns="0" bIns="0" rtlCol="0" anchor="t"/>
+          <a:lstStyle/>
+          <a:p>
+            <a:pPr marL="342900" indent="-342900">
+              <a:spcAft>
+                <a:spcPts val="500"/>
+              </a:spcAft>
+              <a:buSzPct val="100000"/>
+              <a:buChar char="•"/>
+            </a:pPr>
+            <a:r>
+              <a:rPr lang="en-US" sz="1100" dirty="0">
+                <a:solidFill>
+                  <a:srgbClr val="1F2933"/>
+                </a:solidFill>
+                <a:latin typeface="Arial" pitchFamily="34" charset="0"/>
+                <a:ea typeface="Arial" pitchFamily="34" charset="-122"/>
+                <a:cs typeface="Arial" pitchFamily="34" charset="-120"/>
+              </a:rPr>
+              <a:t>그룹당 영상 3개 이상(가능하면 5–6)으로 다시 분석 → p-value와 two-way ANOVA(세포주 × 처치, 상호작용)가 나옵니다.</a:t>
+            </a:r>
+            <a:endParaRPr lang="en-US" sz="1100" dirty="0"/>
+          </a:p>
+          <a:p>
+            <a:pPr marL="342900" indent="-342900">
+              <a:spcAft>
+                <a:spcPts val="500"/>
+              </a:spcAft>
+              <a:buSzPct val="100000"/>
+              <a:buChar char="•"/>
+            </a:pPr>
+            <a:r>
+              <a:rPr lang="en-US" sz="1100" dirty="0">
+                <a:solidFill>
+                  <a:srgbClr val="1F2933"/>
+                </a:solidFill>
+                <a:latin typeface="Arial" pitchFamily="34" charset="0"/>
+                <a:ea typeface="Arial" pitchFamily="34" charset="-122"/>
+                <a:cs typeface="Arial" pitchFamily="34" charset="-120"/>
+              </a:rPr>
+              <a:t>같은 분화 일수(D+n)·같은 배율·같은 온도에서 촬영하고, µm/px를 넣어 속도를 µm/s로 보고.</a:t>
+            </a:r>
+            <a:endParaRPr lang="en-US" sz="1100" dirty="0"/>
+          </a:p>
+          <a:p>
+            <a:pPr marL="342900" indent="-342900">
+              <a:spcAft>
+                <a:spcPts val="500"/>
+              </a:spcAft>
+              <a:buSzPct val="100000"/>
+              <a:buChar char="•"/>
+            </a:pPr>
+            <a:r>
+              <a:rPr lang="en-US" sz="1100" dirty="0">
+                <a:solidFill>
+                  <a:srgbClr val="1F2933"/>
+                </a:solidFill>
+                <a:latin typeface="Arial" pitchFamily="34" charset="0"/>
+                <a:ea typeface="Arial" pitchFamily="34" charset="-122"/>
+                <a:cs typeface="Arial" pitchFamily="34" charset="-120"/>
+              </a:rPr>
+              <a:t>같은 웰의 반복 촬영은 배치 라벨로 묶어 LMM p-value를 함께 제시.</a:t>
+            </a:r>
+            <a:endParaRPr lang="en-US" sz="1100" dirty="0"/>
+          </a:p>
+          <a:p>
+            <a:pPr marL="342900" indent="-342900">
+              <a:spcAft>
+                <a:spcPts val="500"/>
+              </a:spcAft>
+              <a:buSzPct val="100000"/>
+              <a:buChar char="•"/>
+            </a:pPr>
+            <a:r>
+              <a:rPr lang="en-US" sz="1100" dirty="0">
+                <a:solidFill>
+                  <a:srgbClr val="1F2933"/>
+                </a:solidFill>
+                <a:latin typeface="Arial" pitchFamily="34" charset="0"/>
+                <a:ea typeface="Arial" pitchFamily="34" charset="-122"/>
+                <a:cs typeface="Arial" pitchFamily="34" charset="-120"/>
+              </a:rPr>
+              <a:t>박동수 의존성이 있는 시간 지표는 박동수와 나란히 보고하거나 정규화.</a:t>
+            </a:r>
+            <a:endParaRPr lang="en-US" sz="1100" dirty="0"/>
+          </a:p>
+        </p:txBody>
+      </p:sp>
+      <p:sp>
+        <p:nvSpPr>
+          <p:cNvPr id="11" name="Text 9"/>
+          <p:cNvSpPr txBox="1"/>
+          <p:nvPr/>
+        </p:nvSpPr>
+        <p:spPr>
+          <a:xfrm>
+            <a:off x="457200" y="4800600"/>
+            <a:ext cx="8229600" cy="228600"/>
+          </a:xfrm>
+          <a:prstGeom prst="rect">
+            <a:avLst/>
+          </a:prstGeom>
+          <a:noFill/>
+          <a:ln/>
+        </p:spPr>
+        <p:txBody>
+          <a:bodyPr wrap="square" lIns="0" tIns="0" rIns="0" bIns="0" rtlCol="0" anchor="ctr"/>
+          <a:lstStyle/>
+          <a:p>
+            <a:pPr algn="r" indent="0" marL="0">
+              <a:buNone/>
+            </a:pPr>
+            <a:r>
+              <a:rPr lang="en-US" sz="800" dirty="0">
+                <a:solidFill>
+                  <a:srgbClr val="6B7280"/>
+                </a:solidFill>
+                <a:latin typeface="Arial" pitchFamily="34" charset="0"/>
+                <a:ea typeface="Arial" pitchFamily="34" charset="-122"/>
+                <a:cs typeface="Arial" pitchFamily="34" charset="-120"/>
+              </a:rPr>
+              <a:t>Cardiomyocyte Analyzer · 분석 프로토콜  16</a:t>
+            </a:r>
+            <a:endParaRPr lang="en-US" sz="800" dirty="0"/>
+          </a:p>
+        </p:txBody>
+      </p:sp>
+    </p:spTree>
+  </p:cSld>
+  <p:clrMapOvr>
+    <a:masterClrMapping/>
+  </p:clrMapOvr>
+</p:sld>
+</file>
+
+<file path=ppt/slides/slide17.xml><?xml version="1.0" encoding="utf-8"?>
+<p:sld xmlns:a="http://schemas.openxmlformats.org/drawingml/2006/main" xmlns:r="http://schemas.openxmlformats.org/officeDocument/2006/relationships" xmlns:p="http://schemas.openxmlformats.org/presentationml/2006/main">
+  <p:cSld name="Slide 17">
+    <p:bg>
+      <p:bgPr>
+        <a:solidFill>
+          <a:srgbClr val="FFFFFF"/>
+        </a:solidFill>
+      </p:bgPr>
+    </p:bg>
+    <p:spTree>
+      <p:nvGrpSpPr>
+        <p:cNvPr id="1" name=""/>
+        <p:cNvGrpSpPr/>
+        <p:nvPr/>
+      </p:nvGrpSpPr>
+      <p:grpSpPr>
+        <a:xfrm>
+          <a:off x="0" y="0"/>
+          <a:ext cx="0" cy="0"/>
+          <a:chOff x="0" y="0"/>
+          <a:chExt cx="0" cy="0"/>
+        </a:xfrm>
+      </p:grpSpPr>
+      <p:sp>
+        <p:nvSpPr>
+          <p:cNvPr id="2" name="Text 0"/>
+          <p:cNvSpPr txBox="1"/>
+          <p:nvPr/>
+        </p:nvSpPr>
+        <p:spPr>
+          <a:xfrm>
+            <a:off x="457200" y="274320"/>
+            <a:ext cx="8229600" cy="548640"/>
+          </a:xfrm>
+          <a:prstGeom prst="rect">
+            <a:avLst/>
+          </a:prstGeom>
+          <a:noFill/>
+          <a:ln/>
+        </p:spPr>
+        <p:txBody>
+          <a:bodyPr wrap="square" lIns="0" tIns="0" rIns="0" bIns="0" rtlCol="0" anchor="ctr"/>
+          <a:lstStyle/>
+          <a:p>
+            <a:pPr indent="0" marL="0">
+              <a:buNone/>
+            </a:pPr>
+            <a:r>
+              <a:rPr lang="en-US" sz="2600" b="1" dirty="0">
+                <a:solidFill>
+                  <a:srgbClr val="1F2933"/>
+                </a:solidFill>
+                <a:latin typeface="Arial" pitchFamily="34" charset="0"/>
+                <a:ea typeface="Arial" pitchFamily="34" charset="-122"/>
+                <a:cs typeface="Arial" pitchFamily="34" charset="-120"/>
+              </a:rPr>
+              <a:t>결과 파일과 해석 체크리스트</a:t>
+            </a:r>
+            <a:endParaRPr lang="en-US" sz="2600" dirty="0"/>
+          </a:p>
+        </p:txBody>
+      </p:sp>
+      <p:sp>
+        <p:nvSpPr>
+          <p:cNvPr id="3" name="Shape 1"/>
+          <p:cNvSpPr/>
+          <p:nvPr/>
+        </p:nvSpPr>
+        <p:spPr>
+          <a:xfrm>
+            <a:off x="457200" y="1188720"/>
+            <a:ext cx="2651760" cy="1463040"/>
+          </a:xfrm>
+          <a:prstGeom prst="roundRect">
+            <a:avLst>
+              <a:gd name="adj" fmla="val 5000"/>
+            </a:avLst>
+          </a:prstGeom>
+          <a:solidFill>
+            <a:srgbClr val="F3F4F6"/>
+          </a:solidFill>
+          <a:ln w="12700">
+            <a:solidFill>
+              <a:srgbClr val="F3F4F6"/>
+            </a:solidFill>
+            <a:prstDash val="solid"/>
+          </a:ln>
+        </p:spPr>
+      </p:sp>
+      <p:sp>
+        <p:nvSpPr>
+          <p:cNvPr id="4" name="Text 2"/>
+          <p:cNvSpPr txBox="1"/>
+          <p:nvPr/>
+        </p:nvSpPr>
+        <p:spPr>
+          <a:xfrm>
+            <a:off x="621792" y="1298448"/>
+            <a:ext cx="2322576" cy="292608"/>
+          </a:xfrm>
+          <a:prstGeom prst="rect">
+            <a:avLst/>
+          </a:prstGeom>
+          <a:noFill/>
+          <a:ln/>
+        </p:spPr>
+        <p:txBody>
+          <a:bodyPr wrap="square" lIns="0" tIns="0" rIns="0" bIns="0" rtlCol="0" anchor="ctr"/>
+          <a:lstStyle/>
+          <a:p>
+            <a:pPr indent="0" marL="0">
+              <a:buNone/>
+            </a:pPr>
+            <a:r>
+              <a:rPr lang="en-US" sz="1300" b="1" dirty="0">
+                <a:solidFill>
+                  <a:srgbClr val="7A1F2B"/>
+                </a:solidFill>
+                <a:latin typeface="Arial" pitchFamily="34" charset="0"/>
+                <a:ea typeface="Arial" pitchFamily="34" charset="-122"/>
+                <a:cs typeface="Arial" pitchFamily="34" charset="-120"/>
+              </a:rPr>
+              <a:t>plot.png / plot.svg</a:t>
+            </a:r>
+            <a:endParaRPr lang="en-US" sz="1300" dirty="0"/>
+          </a:p>
+        </p:txBody>
+      </p:sp>
+      <p:sp>
+        <p:nvSpPr>
+          <p:cNvPr id="5" name="Text 3"/>
+          <p:cNvSpPr txBox="1"/>
+          <p:nvPr/>
+        </p:nvSpPr>
+        <p:spPr>
+          <a:xfrm>
+            <a:off x="621792" y="1609344"/>
+            <a:ext cx="2322576" cy="950976"/>
+          </a:xfrm>
+          <a:prstGeom prst="rect">
+            <a:avLst/>
+          </a:prstGeom>
+          <a:noFill/>
+          <a:ln/>
+        </p:spPr>
+        <p:txBody>
+          <a:bodyPr wrap="square" lIns="0" tIns="0" rIns="0" bIns="0" rtlCol="0" anchor="t"/>
+          <a:lstStyle/>
+          <a:p>
+            <a:pPr indent="0" marL="0">
+              <a:spcAft>
+                <a:spcPts val="300"/>
+              </a:spcAft>
+              <a:buNone/>
+            </a:pPr>
+            <a:r>
+              <a:rPr lang="en-US" sz="1000" dirty="0">
+                <a:solidFill>
+                  <a:srgbClr val="1F2933"/>
+                </a:solidFill>
+                <a:latin typeface="Arial" pitchFamily="34" charset="0"/>
+                <a:ea typeface="Arial" pitchFamily="34" charset="-122"/>
+                <a:cs typeface="Arial" pitchFamily="34" charset="-120"/>
+              </a:rPr>
+              <a:t>신호 트레이스 + 검출된 봉우리(·), 기준선(▼). PIV/광류는 벡터장 패널 추가. 그룹 비교는 논문형 다중 패널.</a:t>
+            </a:r>
+            <a:endParaRPr lang="en-US" sz="1000" dirty="0"/>
+          </a:p>
+        </p:txBody>
+      </p:sp>
+      <p:sp>
+        <p:nvSpPr>
+          <p:cNvPr id="6" name="Shape 4"/>
+          <p:cNvSpPr/>
+          <p:nvPr/>
+        </p:nvSpPr>
+        <p:spPr>
+          <a:xfrm>
+            <a:off x="3246120" y="1188720"/>
+            <a:ext cx="2651760" cy="1463040"/>
+          </a:xfrm>
+          <a:prstGeom prst="roundRect">
+            <a:avLst>
+              <a:gd name="adj" fmla="val 5000"/>
+            </a:avLst>
+          </a:prstGeom>
+          <a:solidFill>
+            <a:srgbClr val="F3F4F6"/>
+          </a:solidFill>
+          <a:ln w="12700">
+            <a:solidFill>
+              <a:srgbClr val="F3F4F6"/>
+            </a:solidFill>
+            <a:prstDash val="solid"/>
+          </a:ln>
+        </p:spPr>
+      </p:sp>
+      <p:sp>
+        <p:nvSpPr>
+          <p:cNvPr id="7" name="Text 5"/>
+          <p:cNvSpPr txBox="1"/>
+          <p:nvPr/>
+        </p:nvSpPr>
+        <p:spPr>
+          <a:xfrm>
+            <a:off x="3410712" y="1298448"/>
+            <a:ext cx="2322576" cy="292608"/>
+          </a:xfrm>
+          <a:prstGeom prst="rect">
+            <a:avLst/>
+          </a:prstGeom>
+          <a:noFill/>
+          <a:ln/>
+        </p:spPr>
+        <p:txBody>
+          <a:bodyPr wrap="square" lIns="0" tIns="0" rIns="0" bIns="0" rtlCol="0" anchor="ctr"/>
+          <a:lstStyle/>
+          <a:p>
+            <a:pPr indent="0" marL="0">
+              <a:buNone/>
+            </a:pPr>
+            <a:r>
+              <a:rPr lang="en-US" sz="1300" b="1" dirty="0">
+                <a:solidFill>
+                  <a:srgbClr val="7A1F2B"/>
+                </a:solidFill>
+                <a:latin typeface="Arial" pitchFamily="34" charset="0"/>
+                <a:ea typeface="Arial" pitchFamily="34" charset="-122"/>
+                <a:cs typeface="Arial" pitchFamily="34" charset="-120"/>
+              </a:rPr>
+              <a:t>data.csv</a:t>
+            </a:r>
+            <a:endParaRPr lang="en-US" sz="1300" dirty="0"/>
+          </a:p>
+        </p:txBody>
+      </p:sp>
+      <p:sp>
+        <p:nvSpPr>
+          <p:cNvPr id="8" name="Text 6"/>
+          <p:cNvSpPr txBox="1"/>
+          <p:nvPr/>
+        </p:nvSpPr>
+        <p:spPr>
+          <a:xfrm>
+            <a:off x="3410712" y="1609344"/>
+            <a:ext cx="2322576" cy="950976"/>
+          </a:xfrm>
+          <a:prstGeom prst="rect">
+            <a:avLst/>
+          </a:prstGeom>
+          <a:noFill/>
+          <a:ln/>
+        </p:spPr>
+        <p:txBody>
+          <a:bodyPr wrap="square" lIns="0" tIns="0" rIns="0" bIns="0" rtlCol="0" anchor="t"/>
+          <a:lstStyle/>
+          <a:p>
+            <a:pPr indent="0" marL="0">
+              <a:spcAft>
+                <a:spcPts val="300"/>
+              </a:spcAft>
+              <a:buNone/>
+            </a:pPr>
+            <a:r>
+              <a:rPr lang="en-US" sz="1000" dirty="0">
+                <a:solidFill>
+                  <a:srgbClr val="1F2933"/>
+                </a:solidFill>
+                <a:latin typeface="Arial" pitchFamily="34" charset="0"/>
+                <a:ea typeface="Arial" pitchFamily="34" charset="-122"/>
+                <a:cs typeface="Arial" pitchFamily="34" charset="-120"/>
+              </a:rPr>
+              <a:t>박동별(또는 트랜지언트별·객체별) 한 줄씩. Prism/Excel로 바로 가져가기. 그룹 비교는 영상별 요약 + 그룹 열.</a:t>
+            </a:r>
+            <a:endParaRPr lang="en-US" sz="1000" dirty="0"/>
+          </a:p>
+        </p:txBody>
+      </p:sp>
+      <p:sp>
+        <p:nvSpPr>
+          <p:cNvPr id="9" name="Shape 7"/>
+          <p:cNvSpPr/>
+          <p:nvPr/>
+        </p:nvSpPr>
+        <p:spPr>
+          <a:xfrm>
+            <a:off x="6035040" y="1188720"/>
+            <a:ext cx="2651760" cy="1463040"/>
+          </a:xfrm>
+          <a:prstGeom prst="roundRect">
+            <a:avLst>
+              <a:gd name="adj" fmla="val 5000"/>
+            </a:avLst>
+          </a:prstGeom>
+          <a:solidFill>
+            <a:srgbClr val="F3F4F6"/>
+          </a:solidFill>
+          <a:ln w="12700">
+            <a:solidFill>
+              <a:srgbClr val="F3F4F6"/>
+            </a:solidFill>
+            <a:prstDash val="solid"/>
+          </a:ln>
+        </p:spPr>
+      </p:sp>
+      <p:sp>
+        <p:nvSpPr>
+          <p:cNvPr id="10" name="Text 8"/>
+          <p:cNvSpPr txBox="1"/>
+          <p:nvPr/>
+        </p:nvSpPr>
+        <p:spPr>
+          <a:xfrm>
+            <a:off x="6199632" y="1298448"/>
+            <a:ext cx="2322576" cy="292608"/>
+          </a:xfrm>
+          <a:prstGeom prst="rect">
+            <a:avLst/>
+          </a:prstGeom>
+          <a:noFill/>
+          <a:ln/>
+        </p:spPr>
+        <p:txBody>
+          <a:bodyPr wrap="square" lIns="0" tIns="0" rIns="0" bIns="0" rtlCol="0" anchor="ctr"/>
+          <a:lstStyle/>
+          <a:p>
+            <a:pPr indent="0" marL="0">
+              <a:buNone/>
+            </a:pPr>
+            <a:r>
+              <a:rPr lang="en-US" sz="1300" b="1" dirty="0">
+                <a:solidFill>
+                  <a:srgbClr val="7A1F2B"/>
+                </a:solidFill>
+                <a:latin typeface="Arial" pitchFamily="34" charset="0"/>
+                <a:ea typeface="Arial" pitchFamily="34" charset="-122"/>
+                <a:cs typeface="Arial" pitchFamily="34" charset="-120"/>
+              </a:rPr>
+              <a:t>summary.json</a:t>
+            </a:r>
+            <a:endParaRPr lang="en-US" sz="1300" dirty="0"/>
+          </a:p>
+        </p:txBody>
+      </p:sp>
+      <p:sp>
+        <p:nvSpPr>
+          <p:cNvPr id="11" name="Text 9"/>
+          <p:cNvSpPr txBox="1"/>
+          <p:nvPr/>
+        </p:nvSpPr>
+        <p:spPr>
+          <a:xfrm>
+            <a:off x="6199632" y="1609344"/>
+            <a:ext cx="2322576" cy="950976"/>
+          </a:xfrm>
+          <a:prstGeom prst="rect">
+            <a:avLst/>
+          </a:prstGeom>
+          <a:noFill/>
+          <a:ln/>
+        </p:spPr>
+        <p:txBody>
+          <a:bodyPr wrap="square" lIns="0" tIns="0" rIns="0" bIns="0" rtlCol="0" anchor="t"/>
+          <a:lstStyle/>
+          <a:p>
+            <a:pPr indent="0" marL="0">
+              <a:spcAft>
+                <a:spcPts val="300"/>
+              </a:spcAft>
+              <a:buNone/>
+            </a:pPr>
+            <a:r>
+              <a:rPr lang="en-US" sz="1000" dirty="0">
+                <a:solidFill>
+                  <a:srgbClr val="1F2933"/>
+                </a:solidFill>
+                <a:latin typeface="Arial" pitchFamily="34" charset="0"/>
+                <a:ea typeface="Arial" pitchFamily="34" charset="-122"/>
+                <a:cs typeface="Arial" pitchFamily="34" charset="-120"/>
+              </a:rPr>
+              <a:t>요약 지표 전부 + 사용한 설정(신호 방식, fps, 스무딩 창, 피크 민감도, ROI). 논문 Methods에 쓸 값.</a:t>
+            </a:r>
+            <a:endParaRPr lang="en-US" sz="1000" dirty="0"/>
+          </a:p>
+        </p:txBody>
+      </p:sp>
+      <p:sp>
+        <p:nvSpPr>
+          <p:cNvPr id="12" name="Text 10"/>
+          <p:cNvSpPr txBox="1"/>
+          <p:nvPr/>
+        </p:nvSpPr>
+        <p:spPr>
+          <a:xfrm>
+            <a:off x="457200" y="2834640"/>
+            <a:ext cx="4572000" cy="274320"/>
+          </a:xfrm>
+          <a:prstGeom prst="rect">
+            <a:avLst/>
+          </a:prstGeom>
+          <a:noFill/>
+          <a:ln/>
+        </p:spPr>
+        <p:txBody>
+          <a:bodyPr wrap="square" lIns="0" tIns="0" rIns="0" bIns="0" rtlCol="0" anchor="ctr"/>
+          <a:lstStyle/>
+          <a:p>
+            <a:pPr indent="0" marL="0">
+              <a:buNone/>
+            </a:pPr>
+            <a:r>
+              <a:rPr lang="en-US" sz="1300" b="1" dirty="0">
+                <a:solidFill>
+                  <a:srgbClr val="7A1F2B"/>
+                </a:solidFill>
+                <a:latin typeface="Arial" pitchFamily="34" charset="0"/>
+                <a:ea typeface="Arial" pitchFamily="34" charset="-122"/>
+                <a:cs typeface="Arial" pitchFamily="34" charset="-120"/>
+              </a:rPr>
+              <a:t>분석 후 확인할 것</a:t>
+            </a:r>
+            <a:endParaRPr lang="en-US" sz="1300" dirty="0"/>
+          </a:p>
+        </p:txBody>
+      </p:sp>
+      <p:sp>
+        <p:nvSpPr>
+          <p:cNvPr id="13" name="Text 11"/>
+          <p:cNvSpPr txBox="1"/>
+          <p:nvPr/>
+        </p:nvSpPr>
+        <p:spPr>
+          <a:xfrm>
+            <a:off x="457200" y="3200400"/>
+            <a:ext cx="8229600" cy="1508760"/>
+          </a:xfrm>
+          <a:prstGeom prst="rect">
+            <a:avLst/>
+          </a:prstGeom>
+          <a:noFill/>
+          <a:ln/>
+        </p:spPr>
+        <p:txBody>
+          <a:bodyPr wrap="square" lIns="0" tIns="0" rIns="0" bIns="0" rtlCol="0" anchor="t"/>
+          <a:lstStyle/>
+          <a:p>
+            <a:pPr marL="342900" indent="-342900">
+              <a:spcAft>
+                <a:spcPts val="500"/>
+              </a:spcAft>
+              <a:buSzPct val="100000"/>
+              <a:buChar char="•"/>
+            </a:pPr>
+            <a:r>
+              <a:rPr lang="en-US" sz="1100" dirty="0">
+                <a:solidFill>
+                  <a:srgbClr val="1F2933"/>
+                </a:solidFill>
+                <a:latin typeface="Arial" pitchFamily="34" charset="0"/>
+                <a:ea typeface="Arial" pitchFamily="34" charset="-122"/>
+                <a:cs typeface="Arial" pitchFamily="34" charset="-120"/>
+              </a:rPr>
+              <a:t>그림의 봉우리 수가 눈으로 센 박동 수와 맞는가? (틀리면 피크 민감도 조정)</a:t>
+            </a:r>
+            <a:endParaRPr lang="en-US" sz="1100" dirty="0"/>
+          </a:p>
+          <a:p>
+            <a:pPr marL="342900" indent="-342900">
+              <a:spcAft>
+                <a:spcPts val="500"/>
+              </a:spcAft>
+              <a:buSzPct val="100000"/>
+              <a:buChar char="•"/>
+            </a:pPr>
+            <a:r>
+              <a:rPr lang="en-US" sz="1100" dirty="0">
+                <a:solidFill>
+                  <a:srgbClr val="1F2933"/>
+                </a:solidFill>
+                <a:latin typeface="Arial" pitchFamily="34" charset="0"/>
+                <a:ea typeface="Arial" pitchFamily="34" charset="-122"/>
+                <a:cs typeface="Arial" pitchFamily="34" charset="-120"/>
+              </a:rPr>
+              <a:t>프레임 속도(fps)가 실제 촬영 값인가? (BPM·모든 시간 지표가 여기에 달림)</a:t>
+            </a:r>
+            <a:endParaRPr lang="en-US" sz="1100" dirty="0"/>
+          </a:p>
+          <a:p>
+            <a:pPr marL="342900" indent="-342900">
+              <a:spcAft>
+                <a:spcPts val="500"/>
+              </a:spcAft>
+              <a:buSzPct val="100000"/>
+              <a:buChar char="•"/>
+            </a:pPr>
+            <a:r>
+              <a:rPr lang="en-US" sz="1100" dirty="0">
+                <a:solidFill>
+                  <a:srgbClr val="1F2933"/>
+                </a:solidFill>
+                <a:latin typeface="Arial" pitchFamily="34" charset="0"/>
+                <a:ea typeface="Arial" pitchFamily="34" charset="-122"/>
+                <a:cs typeface="Arial" pitchFamily="34" charset="-120"/>
+              </a:rPr>
+              <a:t>PIV 텍스처 경고, ROI 적용 여부, 광류의 complete_wave 수</a:t>
+            </a:r>
+            <a:endParaRPr lang="en-US" sz="1100" dirty="0"/>
+          </a:p>
+          <a:p>
+            <a:pPr marL="342900" indent="-342900">
+              <a:spcAft>
+                <a:spcPts val="500"/>
+              </a:spcAft>
+              <a:buSzPct val="100000"/>
+              <a:buChar char="•"/>
+            </a:pPr>
+            <a:r>
+              <a:rPr lang="en-US" sz="1100" dirty="0">
+                <a:solidFill>
+                  <a:srgbClr val="1F2933"/>
+                </a:solidFill>
+                <a:latin typeface="Arial" pitchFamily="34" charset="0"/>
+                <a:ea typeface="Arial" pitchFamily="34" charset="-122"/>
+                <a:cs typeface="Arial" pitchFamily="34" charset="-120"/>
+              </a:rPr>
+              <a:t>두 방식(reference + optical_flow)으로 교차 확인했을 때 BPM이 일치하는가?</a:t>
+            </a:r>
+            <a:endParaRPr lang="en-US" sz="1100" dirty="0"/>
+          </a:p>
+          <a:p>
+            <a:pPr marL="342900" indent="-342900">
+              <a:spcAft>
+                <a:spcPts val="500"/>
+              </a:spcAft>
+              <a:buSzPct val="100000"/>
+              <a:buChar char="•"/>
+            </a:pPr>
+            <a:r>
+              <a:rPr lang="en-US" sz="1100" dirty="0">
+                <a:solidFill>
+                  <a:srgbClr val="1F2933"/>
+                </a:solidFill>
+                <a:latin typeface="Arial" pitchFamily="34" charset="0"/>
+                <a:ea typeface="Arial" pitchFamily="34" charset="-122"/>
+                <a:cs typeface="Arial" pitchFamily="34" charset="-120"/>
+              </a:rPr>
+              <a:t>그룹 비교: 그룹당 n, 오차막대 종류(SEM/SD), 사용 검정을 캡션대로 논문에 기재</a:t>
+            </a:r>
+            <a:endParaRPr lang="en-US" sz="1100" dirty="0"/>
+          </a:p>
+        </p:txBody>
+      </p:sp>
+      <p:sp>
+        <p:nvSpPr>
+          <p:cNvPr id="14" name="Text 12"/>
+          <p:cNvSpPr txBox="1"/>
+          <p:nvPr/>
+        </p:nvSpPr>
+        <p:spPr>
+          <a:xfrm>
+            <a:off x="457200" y="4800600"/>
+            <a:ext cx="8229600" cy="228600"/>
+          </a:xfrm>
+          <a:prstGeom prst="rect">
+            <a:avLst/>
+          </a:prstGeom>
+          <a:noFill/>
+          <a:ln/>
+        </p:spPr>
+        <p:txBody>
+          <a:bodyPr wrap="square" lIns="0" tIns="0" rIns="0" bIns="0" rtlCol="0" anchor="ctr"/>
+          <a:lstStyle/>
+          <a:p>
+            <a:pPr algn="r" indent="0" marL="0">
+              <a:buNone/>
+            </a:pPr>
+            <a:r>
+              <a:rPr lang="en-US" sz="800" dirty="0">
+                <a:solidFill>
+                  <a:srgbClr val="6B7280"/>
+                </a:solidFill>
+                <a:latin typeface="Arial" pitchFamily="34" charset="0"/>
+                <a:ea typeface="Arial" pitchFamily="34" charset="-122"/>
+                <a:cs typeface="Arial" pitchFamily="34" charset="-120"/>
+              </a:rPr>
+              <a:t>Cardiomyocyte Analyzer · 분석 프로토콜  17</a:t>
+            </a:r>
+            <a:endParaRPr lang="en-US" sz="800" dirty="0"/>
+          </a:p>
+        </p:txBody>
+      </p:sp>
+    </p:spTree>
+  </p:cSld>
+  <p:clrMapOvr>
+    <a:masterClrMapping/>
+  </p:clrMapOvr>
+</p:sld>
+</file>
+
+<file path=ppt/slides/slide18.xml><?xml version="1.0" encoding="utf-8"?>
+<p:sld xmlns:a="http://schemas.openxmlformats.org/drawingml/2006/main" xmlns:r="http://schemas.openxmlformats.org/officeDocument/2006/relationships" xmlns:p="http://schemas.openxmlformats.org/presentationml/2006/main">
+  <p:cSld name="Slide 18">
+    <p:bg>
+      <p:bgPr>
+        <a:solidFill>
+          <a:srgbClr val="FFFFFF"/>
+        </a:solidFill>
+      </p:bgPr>
+    </p:bg>
+    <p:spTree>
+      <p:nvGrpSpPr>
+        <p:cNvPr id="1" name=""/>
+        <p:cNvGrpSpPr/>
+        <p:nvPr/>
+      </p:nvGrpSpPr>
+      <p:grpSpPr>
+        <a:xfrm>
+          <a:off x="0" y="0"/>
+          <a:ext cx="0" cy="0"/>
+          <a:chOff x="0" y="0"/>
+          <a:chExt cx="0" cy="0"/>
+        </a:xfrm>
+      </p:grpSpPr>
+      <p:sp>
+        <p:nvSpPr>
+          <p:cNvPr id="2" name="Text 0"/>
+          <p:cNvSpPr txBox="1"/>
+          <p:nvPr/>
+        </p:nvSpPr>
+        <p:spPr>
+          <a:xfrm>
+            <a:off x="457200" y="274320"/>
+            <a:ext cx="8229600" cy="548640"/>
+          </a:xfrm>
+          <a:prstGeom prst="rect">
+            <a:avLst/>
+          </a:prstGeom>
+          <a:noFill/>
+          <a:ln/>
+        </p:spPr>
+        <p:txBody>
+          <a:bodyPr wrap="square" lIns="0" tIns="0" rIns="0" bIns="0" rtlCol="0" anchor="ctr"/>
+          <a:lstStyle/>
+          <a:p>
+            <a:pPr indent="0" marL="0">
+              <a:buNone/>
+            </a:pPr>
+            <a:r>
+              <a:rPr lang="en-US" sz="2600" b="1" dirty="0">
+                <a:solidFill>
+                  <a:srgbClr val="1F2933"/>
+                </a:solidFill>
+                <a:latin typeface="Arial" pitchFamily="34" charset="0"/>
+                <a:ea typeface="Arial" pitchFamily="34" charset="-122"/>
+                <a:cs typeface="Arial" pitchFamily="34" charset="-120"/>
+              </a:rPr>
               <a:t>검증 프로토콜 (논문용)</a:t>
             </a:r>
             <a:endParaRPr lang="en-US" sz="2600" dirty="0"/>
@@ -5065,7 +11090,7 @@
                 <a:ea typeface="Arial" pitchFamily="34" charset="-122"/>
                 <a:cs typeface="Arial" pitchFamily="34" charset="-120"/>
               </a:rPr>
-              <a:t>Cardiomyocyte Analyzer · 분석 프로토콜  13</a:t>
+              <a:t>Cardiomyocyte Analyzer · 분석 프로토콜  18</a:t>
             </a:r>
             <a:endParaRPr lang="en-US" sz="800" dirty="0"/>
           </a:p>
@@ -5079,9 +11104,9 @@
 </p:sld>
 </file>
 
-<file path=ppt/slides/slide14.xml><?xml version="1.0" encoding="utf-8"?>
+<file path=ppt/slides/slide19.xml><?xml version="1.0" encoding="utf-8"?>
 <p:sld xmlns:a="http://schemas.openxmlformats.org/drawingml/2006/main" xmlns:r="http://schemas.openxmlformats.org/officeDocument/2006/relationships" xmlns:p="http://schemas.openxmlformats.org/presentationml/2006/main">
-  <p:cSld name="Slide 14">
+  <p:cSld name="Slide 19">
     <p:bg>
       <p:bgPr>
         <a:solidFill>
